--- a/output/wordlabs-em-prefix-3day.pptx
+++ b/output/wordlabs-em-prefix-3day.pptx
@@ -4240,7 +4240,7 @@
                 <a:ea typeface="Calibri" pitchFamily="34" charset="-122"/>
                 <a:cs typeface="Calibri" pitchFamily="34" charset="-120"/>
               </a:rPr>
-              <a:t>"put into, make"</a:t>
+              <a:t>"put into, cause to be"</a:t>
             </a:r>
             <a:endParaRPr lang="en-US" sz="2200" dirty="0"/>
           </a:p>
@@ -4279,7 +4279,7 @@
                 <a:ea typeface="Calibri" pitchFamily="34" charset="-122"/>
                 <a:cs typeface="Calibri" pitchFamily="34" charset="-120"/>
               </a:rPr>
-              <a:t>Origin: Latin: in</a:t>
+              <a:t>Origin: Latin: im / French: em</a:t>
             </a:r>
             <a:endParaRPr lang="en-US" sz="1300" dirty="0"/>
           </a:p>
@@ -5288,7 +5288,7 @@
                 <a:ea typeface="Calibri" pitchFamily="34" charset="-122"/>
                 <a:cs typeface="Calibri" pitchFamily="34" charset="-120"/>
               </a:rPr>
-              <a:t>Word Labs  •  wordlabs.app  •  Prefix: 'em-' = put into, make</a:t>
+              <a:t>Word Labs  •  wordlabs.app  •  Prefix: 'em-' = put into, cause to be</a:t>
             </a:r>
             <a:endParaRPr lang="en-US" sz="800" dirty="0"/>
           </a:p>
@@ -5928,7 +5928,7 @@
                 <a:ea typeface="Calibri" pitchFamily="34" charset="-122"/>
                 <a:cs typeface="Calibri" pitchFamily="34" charset="-120"/>
               </a:rPr>
-              <a:t>Word Labs  •  wordlabs.app  •  Prefix: 'em-' = put into, make</a:t>
+              <a:t>Word Labs  •  wordlabs.app  •  Prefix: 'em-' = put into, cause to be</a:t>
             </a:r>
             <a:endParaRPr lang="en-US" sz="800" dirty="0"/>
           </a:p>
@@ -6040,7 +6040,7 @@
                 <a:ea typeface="Calibri" pitchFamily="34" charset="-122"/>
                 <a:cs typeface="Calibri" pitchFamily="34" charset="-120"/>
               </a:rPr>
-              <a:t>The principal wanted to </a:t>
+              <a:t>She wanted to </a:t>
             </a:r>
             <a:pPr algn="l" indent="0" marL="0">
               <a:buNone/>
@@ -6071,7 +6071,7 @@
                 <a:ea typeface="Calibri" pitchFamily="34" charset="-122"/>
                 <a:cs typeface="Calibri" pitchFamily="34" charset="-120"/>
               </a:rPr>
-              <a:t> students by </a:t>
+              <a:t> the younger students by </a:t>
             </a:r>
             <a:pPr algn="l" indent="0" marL="0">
               <a:buNone/>
@@ -6088,7 +6088,7 @@
                 <a:ea typeface="Calibri" pitchFamily="34" charset="-122"/>
                 <a:cs typeface="Calibri" pitchFamily="34" charset="-120"/>
               </a:rPr>
-              <a:t>employing</a:t>
+              <a:t>embracing</a:t>
             </a:r>
             <a:pPr algn="l" indent="0" marL="0">
               <a:buNone/>
@@ -6102,7 +6102,7 @@
                 <a:ea typeface="Calibri" pitchFamily="34" charset="-122"/>
                 <a:cs typeface="Calibri" pitchFamily="34" charset="-120"/>
               </a:rPr>
-              <a:t> their ideas in the new school plan.</a:t>
+              <a:t> their ideas.</a:t>
             </a:r>
             <a:endParaRPr lang="en-US" sz="1800" dirty="0"/>
           </a:p>
@@ -6385,7 +6385,7 @@
                 <a:ea typeface="Trebuchet MS" pitchFamily="34" charset="-122"/>
                 <a:cs typeface="Trebuchet MS" pitchFamily="34" charset="-120"/>
               </a:rPr>
-              <a:t>employing</a:t>
+              <a:t>embracing</a:t>
             </a:r>
             <a:endParaRPr lang="en-US" sz="1400" dirty="0"/>
           </a:p>
@@ -6716,7 +6716,7 @@
                 <a:ea typeface="Calibri" pitchFamily="34" charset="-122"/>
                 <a:cs typeface="Calibri" pitchFamily="34" charset="-120"/>
               </a:rPr>
-              <a:t>Word Labs  •  wordlabs.app  •  Prefix: 'em-' = put into, make</a:t>
+              <a:t>Word Labs  •  wordlabs.app  •  Prefix: 'em-' = put into, cause to be</a:t>
             </a:r>
             <a:endParaRPr lang="en-US" sz="800" dirty="0"/>
           </a:p>
@@ -7543,7 +7543,7 @@
                 <a:ea typeface="Calibri" pitchFamily="34" charset="-122"/>
                 <a:cs typeface="Calibri" pitchFamily="34" charset="-120"/>
               </a:rPr>
-              <a:t>Word Labs  •  wordlabs.app  •  Prefix: 'em-' = put into, make</a:t>
+              <a:t>Word Labs  •  wordlabs.app  •  Prefix: 'em-' = put into, cause to be</a:t>
             </a:r>
             <a:endParaRPr lang="en-US" sz="800" dirty="0"/>
           </a:p>
@@ -7860,7 +7860,7 @@
                 <a:ea typeface="Calibri" pitchFamily="34" charset="-122"/>
                 <a:cs typeface="Calibri" pitchFamily="34" charset="-120"/>
               </a:rPr>
-              <a:t>put into, make</a:t>
+              <a:t>put into, cause to be</a:t>
             </a:r>
             <a:endParaRPr lang="en-US" sz="850" dirty="0"/>
           </a:p>
@@ -8528,7 +8528,7 @@
                 <a:ea typeface="Calibri" pitchFamily="34" charset="-122"/>
                 <a:cs typeface="Calibri" pitchFamily="34" charset="-120"/>
               </a:rPr>
-              <a:t>Word Labs  •  wordlabs.app  •  Prefix: 'em-' = put into, make</a:t>
+              <a:t>Word Labs  •  wordlabs.app  •  Prefix: 'em-' = put into, cause to be</a:t>
             </a:r>
             <a:endParaRPr lang="en-US" sz="800" dirty="0"/>
           </a:p>
@@ -8845,7 +8845,7 @@
                 <a:ea typeface="Calibri" pitchFamily="34" charset="-122"/>
                 <a:cs typeface="Calibri" pitchFamily="34" charset="-120"/>
               </a:rPr>
-              <a:t>put into, make</a:t>
+              <a:t>put into, cause to be</a:t>
             </a:r>
             <a:endParaRPr lang="en-US" sz="850" dirty="0"/>
           </a:p>
@@ -9750,7 +9750,7 @@
                 <a:ea typeface="Calibri" pitchFamily="34" charset="-122"/>
                 <a:cs typeface="Calibri" pitchFamily="34" charset="-120"/>
               </a:rPr>
-              <a:t>Word Labs  •  wordlabs.app  •  Prefix: 'em-' = put into, make</a:t>
+              <a:t>Word Labs  •  wordlabs.app  •  Prefix: 'em-' = put into, cause to be</a:t>
             </a:r>
             <a:endParaRPr lang="en-US" sz="800" dirty="0"/>
           </a:p>
@@ -10067,7 +10067,7 @@
                 <a:ea typeface="Calibri" pitchFamily="34" charset="-122"/>
                 <a:cs typeface="Calibri" pitchFamily="34" charset="-120"/>
               </a:rPr>
-              <a:t>put into, make</a:t>
+              <a:t>put into, cause to be</a:t>
             </a:r>
             <a:endParaRPr lang="en-US" sz="850" dirty="0"/>
           </a:p>
@@ -11263,7 +11263,7 @@
                 <a:ea typeface="Calibri" pitchFamily="34" charset="-122"/>
                 <a:cs typeface="Calibri" pitchFamily="34" charset="-120"/>
               </a:rPr>
-              <a:t>Word Labs  •  wordlabs.app  •  Prefix: 'em-' = put into, make</a:t>
+              <a:t>Word Labs  •  wordlabs.app  •  Prefix: 'em-' = put into, cause to be</a:t>
             </a:r>
             <a:endParaRPr lang="en-US" sz="800" dirty="0"/>
           </a:p>
@@ -11402,7 +11402,7 @@
                 <a:ea typeface="Trebuchet MS" pitchFamily="34" charset="-122"/>
                 <a:cs typeface="Trebuchet MS" pitchFamily="34" charset="-120"/>
               </a:rPr>
-              <a:t>employing</a:t>
+              <a:t>embracing</a:t>
             </a:r>
             <a:endParaRPr lang="en-US" sz="2800" dirty="0"/>
           </a:p>
@@ -12090,7 +12090,7 @@
                 <a:ea typeface="Calibri" pitchFamily="34" charset="-122"/>
                 <a:cs typeface="Calibri" pitchFamily="34" charset="-120"/>
               </a:rPr>
-              <a:t>Word Labs  •  wordlabs.app  •  Prefix: 'em-' = put into, make</a:t>
+              <a:t>Word Labs  •  wordlabs.app  •  Prefix: 'em-' = put into, cause to be</a:t>
             </a:r>
             <a:endParaRPr lang="en-US" sz="800" dirty="0"/>
           </a:p>
@@ -12229,7 +12229,7 @@
                 <a:ea typeface="Trebuchet MS" pitchFamily="34" charset="-122"/>
                 <a:cs typeface="Trebuchet MS" pitchFamily="34" charset="-120"/>
               </a:rPr>
-              <a:t>employing</a:t>
+              <a:t>embracing</a:t>
             </a:r>
             <a:endParaRPr lang="en-US" sz="2800" dirty="0"/>
           </a:p>
@@ -12407,7 +12407,7 @@
                 <a:ea typeface="Calibri" pitchFamily="34" charset="-122"/>
                 <a:cs typeface="Calibri" pitchFamily="34" charset="-120"/>
               </a:rPr>
-              <a:t>put into, make</a:t>
+              <a:t>put into, cause to be</a:t>
             </a:r>
             <a:endParaRPr lang="en-US" sz="850" dirty="0"/>
           </a:p>
@@ -12480,7 +12480,7 @@
                 <a:ea typeface="Trebuchet MS" pitchFamily="34" charset="-122"/>
                 <a:cs typeface="Trebuchet MS" pitchFamily="34" charset="-120"/>
               </a:rPr>
-              <a:t>ploy</a:t>
+              <a:t>brace</a:t>
             </a:r>
             <a:endParaRPr lang="en-US" sz="1300" dirty="0"/>
           </a:p>
@@ -12519,7 +12519,7 @@
                 <a:ea typeface="Calibri" pitchFamily="34" charset="-122"/>
                 <a:cs typeface="Calibri" pitchFamily="34" charset="-120"/>
               </a:rPr>
-              <a:t>use, engage</a:t>
+              <a:t>hold, clasp</a:t>
             </a:r>
             <a:endParaRPr lang="en-US" sz="850" dirty="0"/>
           </a:p>
@@ -12527,7 +12527,46 @@
       </p:sp>
       <p:sp>
         <p:nvSpPr>
-          <p:cNvPr id="22" name="Shape 20"/>
+          <p:cNvPr id="22" name="Text 20"/>
+          <p:cNvSpPr/>
+          <p:nvPr/>
+        </p:nvSpPr>
+        <p:spPr>
+          <a:xfrm>
+            <a:off x="4370832" y="2752344"/>
+            <a:ext cx="1828800" cy="182880"/>
+          </a:xfrm>
+          <a:prstGeom prst="rect">
+            <a:avLst/>
+          </a:prstGeom>
+          <a:noFill/>
+          <a:ln/>
+        </p:spPr>
+        <p:txBody>
+          <a:bodyPr wrap="square" lIns="0" tIns="0" rIns="0" bIns="0" rtlCol="0" anchor="t"/>
+          <a:lstStyle/>
+          <a:p>
+            <a:pPr algn="ctr" indent="0" marL="0">
+              <a:buNone/>
+            </a:pPr>
+            <a:r>
+              <a:rPr lang="en-US" sz="700" i="1" dirty="0">
+                <a:solidFill>
+                  <a:srgbClr val="94A3B8"/>
+                </a:solidFill>
+                <a:latin typeface="Calibri" pitchFamily="34" charset="0"/>
+                <a:ea typeface="Calibri" pitchFamily="34" charset="-122"/>
+                <a:cs typeface="Calibri" pitchFamily="34" charset="-120"/>
+              </a:rPr>
+              <a:t>'e' dropped before vowel suffix</a:t>
+            </a:r>
+            <a:endParaRPr lang="en-US" sz="700" dirty="0"/>
+          </a:p>
+        </p:txBody>
+      </p:sp>
+      <p:sp>
+        <p:nvSpPr>
+          <p:cNvPr id="23" name="Shape 21"/>
           <p:cNvSpPr/>
           <p:nvPr/>
         </p:nvSpPr>
@@ -12561,7 +12600,7 @@
       </p:sp>
       <p:sp>
         <p:nvSpPr>
-          <p:cNvPr id="23" name="Text 21"/>
+          <p:cNvPr id="24" name="Text 22"/>
           <p:cNvSpPr/>
           <p:nvPr/>
         </p:nvSpPr>
@@ -12600,7 +12639,7 @@
       </p:sp>
       <p:sp>
         <p:nvSpPr>
-          <p:cNvPr id="24" name="Text 22"/>
+          <p:cNvPr id="25" name="Text 23"/>
           <p:cNvSpPr/>
           <p:nvPr/>
         </p:nvSpPr>
@@ -12631,7 +12670,7 @@
                 <a:ea typeface="Calibri" pitchFamily="34" charset="-122"/>
                 <a:cs typeface="Calibri" pitchFamily="34" charset="-120"/>
               </a:rPr>
-              <a:t>happening now</a:t>
+              <a:t>ongoing action</a:t>
             </a:r>
             <a:endParaRPr lang="en-US" sz="850" dirty="0"/>
           </a:p>
@@ -12639,7 +12678,7 @@
       </p:sp>
       <p:sp>
         <p:nvSpPr>
-          <p:cNvPr id="25" name="Shape 23"/>
+          <p:cNvPr id="26" name="Shape 24"/>
           <p:cNvSpPr/>
           <p:nvPr/>
         </p:nvSpPr>
@@ -12666,7 +12705,7 @@
       </p:sp>
       <p:sp>
         <p:nvSpPr>
-          <p:cNvPr id="26" name="Text 24"/>
+          <p:cNvPr id="27" name="Text 25"/>
           <p:cNvSpPr/>
           <p:nvPr/>
         </p:nvSpPr>
@@ -12705,7 +12744,7 @@
       </p:sp>
       <p:sp>
         <p:nvSpPr>
-          <p:cNvPr id="27" name="Shape 25"/>
+          <p:cNvPr id="28" name="Shape 26"/>
           <p:cNvSpPr/>
           <p:nvPr/>
         </p:nvSpPr>
@@ -12732,7 +12771,7 @@
       </p:sp>
       <p:sp>
         <p:nvSpPr>
-          <p:cNvPr id="28" name="Text 26"/>
+          <p:cNvPr id="29" name="Text 27"/>
           <p:cNvSpPr/>
           <p:nvPr/>
         </p:nvSpPr>
@@ -12771,7 +12810,7 @@
       </p:sp>
       <p:sp>
         <p:nvSpPr>
-          <p:cNvPr id="29" name="Shape 27"/>
+          <p:cNvPr id="30" name="Shape 28"/>
           <p:cNvSpPr/>
           <p:nvPr/>
         </p:nvSpPr>
@@ -12798,7 +12837,7 @@
       </p:sp>
       <p:sp>
         <p:nvSpPr>
-          <p:cNvPr id="30" name="Text 28"/>
+          <p:cNvPr id="31" name="Text 29"/>
           <p:cNvSpPr/>
           <p:nvPr/>
         </p:nvSpPr>
@@ -12837,7 +12876,7 @@
       </p:sp>
       <p:sp>
         <p:nvSpPr>
-          <p:cNvPr id="31" name="Shape 29"/>
+          <p:cNvPr id="32" name="Shape 30"/>
           <p:cNvSpPr/>
           <p:nvPr/>
         </p:nvSpPr>
@@ -12864,7 +12903,7 @@
       </p:sp>
       <p:sp>
         <p:nvSpPr>
-          <p:cNvPr id="32" name="Text 30"/>
+          <p:cNvPr id="33" name="Text 31"/>
           <p:cNvSpPr/>
           <p:nvPr/>
         </p:nvSpPr>
@@ -13187,7 +13226,7 @@
                 <a:ea typeface="Calibri" pitchFamily="34" charset="-122"/>
                 <a:cs typeface="Calibri" pitchFamily="34" charset="-120"/>
               </a:rPr>
-              <a:t>Word Labs  •  wordlabs.app  •  Prefix: 'em-' = put into, make</a:t>
+              <a:t>Word Labs  •  wordlabs.app  •  Prefix: 'em-' = put into, cause to be</a:t>
             </a:r>
             <a:endParaRPr lang="en-US" sz="800" dirty="0"/>
           </a:p>
@@ -13326,7 +13365,7 @@
                 <a:ea typeface="Trebuchet MS" pitchFamily="34" charset="-122"/>
                 <a:cs typeface="Trebuchet MS" pitchFamily="34" charset="-120"/>
               </a:rPr>
-              <a:t>employing</a:t>
+              <a:t>embracing</a:t>
             </a:r>
             <a:endParaRPr lang="en-US" sz="2800" dirty="0"/>
           </a:p>
@@ -13504,7 +13543,7 @@
                 <a:ea typeface="Calibri" pitchFamily="34" charset="-122"/>
                 <a:cs typeface="Calibri" pitchFamily="34" charset="-120"/>
               </a:rPr>
-              <a:t>put into, make</a:t>
+              <a:t>put into, cause to be</a:t>
             </a:r>
             <a:endParaRPr lang="en-US" sz="850" dirty="0"/>
           </a:p>
@@ -13577,7 +13616,7 @@
                 <a:ea typeface="Trebuchet MS" pitchFamily="34" charset="-122"/>
                 <a:cs typeface="Trebuchet MS" pitchFamily="34" charset="-120"/>
               </a:rPr>
-              <a:t>ploy</a:t>
+              <a:t>brace</a:t>
             </a:r>
             <a:endParaRPr lang="en-US" sz="1300" dirty="0"/>
           </a:p>
@@ -13616,7 +13655,7 @@
                 <a:ea typeface="Calibri" pitchFamily="34" charset="-122"/>
                 <a:cs typeface="Calibri" pitchFamily="34" charset="-120"/>
               </a:rPr>
-              <a:t>use, engage</a:t>
+              <a:t>hold, clasp</a:t>
             </a:r>
             <a:endParaRPr lang="en-US" sz="850" dirty="0"/>
           </a:p>
@@ -13624,7 +13663,46 @@
       </p:sp>
       <p:sp>
         <p:nvSpPr>
-          <p:cNvPr id="22" name="Shape 20"/>
+          <p:cNvPr id="22" name="Text 20"/>
+          <p:cNvSpPr/>
+          <p:nvPr/>
+        </p:nvSpPr>
+        <p:spPr>
+          <a:xfrm>
+            <a:off x="4370832" y="2752344"/>
+            <a:ext cx="1828800" cy="182880"/>
+          </a:xfrm>
+          <a:prstGeom prst="rect">
+            <a:avLst/>
+          </a:prstGeom>
+          <a:noFill/>
+          <a:ln/>
+        </p:spPr>
+        <p:txBody>
+          <a:bodyPr wrap="square" lIns="0" tIns="0" rIns="0" bIns="0" rtlCol="0" anchor="t"/>
+          <a:lstStyle/>
+          <a:p>
+            <a:pPr algn="ctr" indent="0" marL="0">
+              <a:buNone/>
+            </a:pPr>
+            <a:r>
+              <a:rPr lang="en-US" sz="700" i="1" dirty="0">
+                <a:solidFill>
+                  <a:srgbClr val="94A3B8"/>
+                </a:solidFill>
+                <a:latin typeface="Calibri" pitchFamily="34" charset="0"/>
+                <a:ea typeface="Calibri" pitchFamily="34" charset="-122"/>
+                <a:cs typeface="Calibri" pitchFamily="34" charset="-120"/>
+              </a:rPr>
+              <a:t>'e' dropped before vowel suffix</a:t>
+            </a:r>
+            <a:endParaRPr lang="en-US" sz="700" dirty="0"/>
+          </a:p>
+        </p:txBody>
+      </p:sp>
+      <p:sp>
+        <p:nvSpPr>
+          <p:cNvPr id="23" name="Shape 21"/>
           <p:cNvSpPr/>
           <p:nvPr/>
         </p:nvSpPr>
@@ -13658,7 +13736,7 @@
       </p:sp>
       <p:sp>
         <p:nvSpPr>
-          <p:cNvPr id="23" name="Text 21"/>
+          <p:cNvPr id="24" name="Text 22"/>
           <p:cNvSpPr/>
           <p:nvPr/>
         </p:nvSpPr>
@@ -13697,7 +13775,7 @@
       </p:sp>
       <p:sp>
         <p:nvSpPr>
-          <p:cNvPr id="24" name="Text 22"/>
+          <p:cNvPr id="25" name="Text 23"/>
           <p:cNvSpPr/>
           <p:nvPr/>
         </p:nvSpPr>
@@ -13728,7 +13806,7 @@
                 <a:ea typeface="Calibri" pitchFamily="34" charset="-122"/>
                 <a:cs typeface="Calibri" pitchFamily="34" charset="-120"/>
               </a:rPr>
-              <a:t>happening now</a:t>
+              <a:t>ongoing action</a:t>
             </a:r>
             <a:endParaRPr lang="en-US" sz="850" dirty="0"/>
           </a:p>
@@ -13736,7 +13814,7 @@
       </p:sp>
       <p:sp>
         <p:nvSpPr>
-          <p:cNvPr id="25" name="Shape 23"/>
+          <p:cNvPr id="26" name="Shape 24"/>
           <p:cNvSpPr/>
           <p:nvPr/>
         </p:nvSpPr>
@@ -13763,7 +13841,7 @@
       </p:sp>
       <p:sp>
         <p:nvSpPr>
-          <p:cNvPr id="26" name="Text 24"/>
+          <p:cNvPr id="27" name="Text 25"/>
           <p:cNvSpPr/>
           <p:nvPr/>
         </p:nvSpPr>
@@ -13802,7 +13880,7 @@
       </p:sp>
       <p:sp>
         <p:nvSpPr>
-          <p:cNvPr id="27" name="Shape 25"/>
+          <p:cNvPr id="28" name="Shape 26"/>
           <p:cNvSpPr/>
           <p:nvPr/>
         </p:nvSpPr>
@@ -13829,7 +13907,7 @@
       </p:sp>
       <p:sp>
         <p:nvSpPr>
-          <p:cNvPr id="28" name="Shape 26"/>
+          <p:cNvPr id="29" name="Shape 27"/>
           <p:cNvSpPr/>
           <p:nvPr/>
         </p:nvSpPr>
@@ -13856,7 +13934,7 @@
       </p:sp>
       <p:sp>
         <p:nvSpPr>
-          <p:cNvPr id="29" name="Text 27"/>
+          <p:cNvPr id="30" name="Text 28"/>
           <p:cNvSpPr/>
           <p:nvPr/>
         </p:nvSpPr>
@@ -13895,7 +13973,7 @@
       </p:sp>
       <p:sp>
         <p:nvSpPr>
-          <p:cNvPr id="30" name="Text 28"/>
+          <p:cNvPr id="31" name="Text 29"/>
           <p:cNvSpPr/>
           <p:nvPr/>
         </p:nvSpPr>
@@ -13934,7 +14012,7 @@
       </p:sp>
       <p:sp>
         <p:nvSpPr>
-          <p:cNvPr id="31" name="Shape 29"/>
+          <p:cNvPr id="32" name="Shape 30"/>
           <p:cNvSpPr/>
           <p:nvPr/>
         </p:nvSpPr>
@@ -13961,7 +14039,7 @@
       </p:sp>
       <p:sp>
         <p:nvSpPr>
-          <p:cNvPr id="32" name="Text 30"/>
+          <p:cNvPr id="33" name="Text 31"/>
           <p:cNvSpPr/>
           <p:nvPr/>
         </p:nvSpPr>
@@ -13992,7 +14070,7 @@
                 <a:ea typeface="Trebuchet MS" pitchFamily="34" charset="-122"/>
                 <a:cs typeface="Trebuchet MS" pitchFamily="34" charset="-120"/>
               </a:rPr>
-              <a:t>ploy</a:t>
+              <a:t>brac</a:t>
             </a:r>
             <a:endParaRPr lang="en-US" sz="1400" dirty="0"/>
           </a:p>
@@ -14000,7 +14078,7 @@
       </p:sp>
       <p:sp>
         <p:nvSpPr>
-          <p:cNvPr id="33" name="Text 31"/>
+          <p:cNvPr id="34" name="Text 32"/>
           <p:cNvSpPr/>
           <p:nvPr/>
         </p:nvSpPr>
@@ -14039,7 +14117,7 @@
       </p:sp>
       <p:sp>
         <p:nvSpPr>
-          <p:cNvPr id="34" name="Shape 32"/>
+          <p:cNvPr id="35" name="Shape 33"/>
           <p:cNvSpPr/>
           <p:nvPr/>
         </p:nvSpPr>
@@ -14066,7 +14144,7 @@
       </p:sp>
       <p:sp>
         <p:nvSpPr>
-          <p:cNvPr id="35" name="Text 33"/>
+          <p:cNvPr id="36" name="Text 34"/>
           <p:cNvSpPr/>
           <p:nvPr/>
         </p:nvSpPr>
@@ -14105,7 +14183,7 @@
       </p:sp>
       <p:sp>
         <p:nvSpPr>
-          <p:cNvPr id="36" name="Shape 34"/>
+          <p:cNvPr id="37" name="Shape 35"/>
           <p:cNvSpPr/>
           <p:nvPr/>
         </p:nvSpPr>
@@ -14132,7 +14210,7 @@
       </p:sp>
       <p:sp>
         <p:nvSpPr>
-          <p:cNvPr id="37" name="Text 35"/>
+          <p:cNvPr id="38" name="Text 36"/>
           <p:cNvSpPr/>
           <p:nvPr/>
         </p:nvSpPr>
@@ -14171,7 +14249,7 @@
       </p:sp>
       <p:sp>
         <p:nvSpPr>
-          <p:cNvPr id="38" name="Shape 36"/>
+          <p:cNvPr id="39" name="Shape 37"/>
           <p:cNvSpPr/>
           <p:nvPr/>
         </p:nvSpPr>
@@ -14198,7 +14276,7 @@
       </p:sp>
       <p:sp>
         <p:nvSpPr>
-          <p:cNvPr id="39" name="Text 37"/>
+          <p:cNvPr id="40" name="Text 38"/>
           <p:cNvSpPr/>
           <p:nvPr/>
         </p:nvSpPr>
@@ -14430,7 +14508,7 @@
                 <a:ea typeface="Calibri" pitchFamily="34" charset="-122"/>
                 <a:cs typeface="Calibri" pitchFamily="34" charset="-120"/>
               </a:rPr>
-              <a:t>Prefix 'em-' — put into, make</a:t>
+              <a:t>Prefix 'em-' — put into, cause to be</a:t>
             </a:r>
             <a:endParaRPr lang="en-US" sz="1600" dirty="0"/>
           </a:p>
@@ -14786,7 +14864,7 @@
                 <a:ea typeface="Calibri" pitchFamily="34" charset="-122"/>
                 <a:cs typeface="Calibri" pitchFamily="34" charset="-120"/>
               </a:rPr>
-              <a:t>Word Labs  •  wordlabs.app  •  Prefix: 'em-' = put into, make</a:t>
+              <a:t>Word Labs  •  wordlabs.app  •  Prefix: 'em-' = put into, cause to be</a:t>
             </a:r>
             <a:endParaRPr lang="en-US" sz="800" dirty="0"/>
           </a:p>
@@ -14925,7 +15003,7 @@
                 <a:ea typeface="Trebuchet MS" pitchFamily="34" charset="-122"/>
                 <a:cs typeface="Trebuchet MS" pitchFamily="34" charset="-120"/>
               </a:rPr>
-              <a:t>employing</a:t>
+              <a:t>embracing</a:t>
             </a:r>
             <a:endParaRPr lang="en-US" sz="2800" dirty="0"/>
           </a:p>
@@ -15103,7 +15181,7 @@
                 <a:ea typeface="Calibri" pitchFamily="34" charset="-122"/>
                 <a:cs typeface="Calibri" pitchFamily="34" charset="-120"/>
               </a:rPr>
-              <a:t>put into, make</a:t>
+              <a:t>put into, cause to be</a:t>
             </a:r>
             <a:endParaRPr lang="en-US" sz="850" dirty="0"/>
           </a:p>
@@ -15176,7 +15254,7 @@
                 <a:ea typeface="Trebuchet MS" pitchFamily="34" charset="-122"/>
                 <a:cs typeface="Trebuchet MS" pitchFamily="34" charset="-120"/>
               </a:rPr>
-              <a:t>ploy</a:t>
+              <a:t>brace</a:t>
             </a:r>
             <a:endParaRPr lang="en-US" sz="1300" dirty="0"/>
           </a:p>
@@ -15215,7 +15293,7 @@
                 <a:ea typeface="Calibri" pitchFamily="34" charset="-122"/>
                 <a:cs typeface="Calibri" pitchFamily="34" charset="-120"/>
               </a:rPr>
-              <a:t>use, engage</a:t>
+              <a:t>hold, clasp</a:t>
             </a:r>
             <a:endParaRPr lang="en-US" sz="850" dirty="0"/>
           </a:p>
@@ -15223,7 +15301,46 @@
       </p:sp>
       <p:sp>
         <p:nvSpPr>
-          <p:cNvPr id="22" name="Shape 20"/>
+          <p:cNvPr id="22" name="Text 20"/>
+          <p:cNvSpPr/>
+          <p:nvPr/>
+        </p:nvSpPr>
+        <p:spPr>
+          <a:xfrm>
+            <a:off x="4370832" y="2752344"/>
+            <a:ext cx="1828800" cy="182880"/>
+          </a:xfrm>
+          <a:prstGeom prst="rect">
+            <a:avLst/>
+          </a:prstGeom>
+          <a:noFill/>
+          <a:ln/>
+        </p:spPr>
+        <p:txBody>
+          <a:bodyPr wrap="square" lIns="0" tIns="0" rIns="0" bIns="0" rtlCol="0" anchor="t"/>
+          <a:lstStyle/>
+          <a:p>
+            <a:pPr algn="ctr" indent="0" marL="0">
+              <a:buNone/>
+            </a:pPr>
+            <a:r>
+              <a:rPr lang="en-US" sz="700" i="1" dirty="0">
+                <a:solidFill>
+                  <a:srgbClr val="94A3B8"/>
+                </a:solidFill>
+                <a:latin typeface="Calibri" pitchFamily="34" charset="0"/>
+                <a:ea typeface="Calibri" pitchFamily="34" charset="-122"/>
+                <a:cs typeface="Calibri" pitchFamily="34" charset="-120"/>
+              </a:rPr>
+              <a:t>'e' dropped before vowel suffix</a:t>
+            </a:r>
+            <a:endParaRPr lang="en-US" sz="700" dirty="0"/>
+          </a:p>
+        </p:txBody>
+      </p:sp>
+      <p:sp>
+        <p:nvSpPr>
+          <p:cNvPr id="23" name="Shape 21"/>
           <p:cNvSpPr/>
           <p:nvPr/>
         </p:nvSpPr>
@@ -15257,7 +15374,7 @@
       </p:sp>
       <p:sp>
         <p:nvSpPr>
-          <p:cNvPr id="23" name="Text 21"/>
+          <p:cNvPr id="24" name="Text 22"/>
           <p:cNvSpPr/>
           <p:nvPr/>
         </p:nvSpPr>
@@ -15296,7 +15413,7 @@
       </p:sp>
       <p:sp>
         <p:nvSpPr>
-          <p:cNvPr id="24" name="Text 22"/>
+          <p:cNvPr id="25" name="Text 23"/>
           <p:cNvSpPr/>
           <p:nvPr/>
         </p:nvSpPr>
@@ -15327,7 +15444,7 @@
                 <a:ea typeface="Calibri" pitchFamily="34" charset="-122"/>
                 <a:cs typeface="Calibri" pitchFamily="34" charset="-120"/>
               </a:rPr>
-              <a:t>happening now</a:t>
+              <a:t>ongoing action</a:t>
             </a:r>
             <a:endParaRPr lang="en-US" sz="850" dirty="0"/>
           </a:p>
@@ -15335,7 +15452,7 @@
       </p:sp>
       <p:sp>
         <p:nvSpPr>
-          <p:cNvPr id="25" name="Shape 23"/>
+          <p:cNvPr id="26" name="Shape 24"/>
           <p:cNvSpPr/>
           <p:nvPr/>
         </p:nvSpPr>
@@ -15362,7 +15479,7 @@
       </p:sp>
       <p:sp>
         <p:nvSpPr>
-          <p:cNvPr id="26" name="Text 24"/>
+          <p:cNvPr id="27" name="Text 25"/>
           <p:cNvSpPr/>
           <p:nvPr/>
         </p:nvSpPr>
@@ -15401,7 +15518,7 @@
       </p:sp>
       <p:sp>
         <p:nvSpPr>
-          <p:cNvPr id="27" name="Shape 25"/>
+          <p:cNvPr id="28" name="Shape 26"/>
           <p:cNvSpPr/>
           <p:nvPr/>
         </p:nvSpPr>
@@ -15428,7 +15545,7 @@
       </p:sp>
       <p:sp>
         <p:nvSpPr>
-          <p:cNvPr id="28" name="Shape 26"/>
+          <p:cNvPr id="29" name="Shape 27"/>
           <p:cNvSpPr/>
           <p:nvPr/>
         </p:nvSpPr>
@@ -15455,7 +15572,7 @@
       </p:sp>
       <p:sp>
         <p:nvSpPr>
-          <p:cNvPr id="29" name="Text 27"/>
+          <p:cNvPr id="30" name="Text 28"/>
           <p:cNvSpPr/>
           <p:nvPr/>
         </p:nvSpPr>
@@ -15494,7 +15611,7 @@
       </p:sp>
       <p:sp>
         <p:nvSpPr>
-          <p:cNvPr id="30" name="Text 28"/>
+          <p:cNvPr id="31" name="Text 29"/>
           <p:cNvSpPr/>
           <p:nvPr/>
         </p:nvSpPr>
@@ -15533,7 +15650,7 @@
       </p:sp>
       <p:sp>
         <p:nvSpPr>
-          <p:cNvPr id="31" name="Shape 29"/>
+          <p:cNvPr id="32" name="Shape 30"/>
           <p:cNvSpPr/>
           <p:nvPr/>
         </p:nvSpPr>
@@ -15560,7 +15677,7 @@
       </p:sp>
       <p:sp>
         <p:nvSpPr>
-          <p:cNvPr id="32" name="Text 30"/>
+          <p:cNvPr id="33" name="Text 31"/>
           <p:cNvSpPr/>
           <p:nvPr/>
         </p:nvSpPr>
@@ -15591,7 +15708,7 @@
                 <a:ea typeface="Trebuchet MS" pitchFamily="34" charset="-122"/>
                 <a:cs typeface="Trebuchet MS" pitchFamily="34" charset="-120"/>
               </a:rPr>
-              <a:t>ploy</a:t>
+              <a:t>brac</a:t>
             </a:r>
             <a:endParaRPr lang="en-US" sz="1400" dirty="0"/>
           </a:p>
@@ -15599,7 +15716,7 @@
       </p:sp>
       <p:sp>
         <p:nvSpPr>
-          <p:cNvPr id="33" name="Text 31"/>
+          <p:cNvPr id="34" name="Text 32"/>
           <p:cNvSpPr/>
           <p:nvPr/>
         </p:nvSpPr>
@@ -15638,7 +15755,7 @@
       </p:sp>
       <p:sp>
         <p:nvSpPr>
-          <p:cNvPr id="34" name="Shape 32"/>
+          <p:cNvPr id="35" name="Shape 33"/>
           <p:cNvSpPr/>
           <p:nvPr/>
         </p:nvSpPr>
@@ -15665,7 +15782,7 @@
       </p:sp>
       <p:sp>
         <p:nvSpPr>
-          <p:cNvPr id="35" name="Text 33"/>
+          <p:cNvPr id="36" name="Text 34"/>
           <p:cNvSpPr/>
           <p:nvPr/>
         </p:nvSpPr>
@@ -15704,7 +15821,7 @@
       </p:sp>
       <p:sp>
         <p:nvSpPr>
-          <p:cNvPr id="36" name="Shape 34"/>
+          <p:cNvPr id="37" name="Shape 35"/>
           <p:cNvSpPr/>
           <p:nvPr/>
         </p:nvSpPr>
@@ -15731,7 +15848,7 @@
       </p:sp>
       <p:sp>
         <p:nvSpPr>
-          <p:cNvPr id="37" name="Text 35"/>
+          <p:cNvPr id="38" name="Text 36"/>
           <p:cNvSpPr/>
           <p:nvPr/>
         </p:nvSpPr>
@@ -15770,18 +15887,18 @@
       </p:sp>
       <p:sp>
         <p:nvSpPr>
-          <p:cNvPr id="38" name="Shape 36"/>
+          <p:cNvPr id="39" name="Shape 37"/>
           <p:cNvSpPr/>
           <p:nvPr/>
         </p:nvSpPr>
         <p:spPr>
           <a:xfrm>
             <a:off x="1874520" y="4096512"/>
-            <a:ext cx="6903720" cy="658368"/>
+            <a:ext cx="6903720" cy="804672"/>
           </a:xfrm>
           <a:prstGeom prst="rect">
             <a:avLst>
-              <a:gd name="adj" fmla="val 8333"/>
+              <a:gd name="adj" fmla="val 6818"/>
             </a:avLst>
           </a:prstGeom>
           <a:solidFill>
@@ -15797,18 +15914,18 @@
       </p:sp>
       <p:sp>
         <p:nvSpPr>
-          <p:cNvPr id="39" name="Shape 37"/>
-          <p:cNvSpPr/>
-          <p:nvPr/>
-        </p:nvSpPr>
-        <p:spPr>
-          <a:xfrm>
-            <a:off x="2254649" y="4169664"/>
-            <a:ext cx="685800" cy="475488"/>
+          <p:cNvPr id="40" name="Shape 38"/>
+          <p:cNvSpPr/>
+          <p:nvPr/>
+        </p:nvSpPr>
+        <p:spPr>
+          <a:xfrm>
+            <a:off x="2023872" y="4169664"/>
+            <a:ext cx="685800" cy="384048"/>
           </a:xfrm>
           <a:prstGeom prst="rect">
             <a:avLst>
-              <a:gd name="adj" fmla="val 7692"/>
+              <a:gd name="adj" fmla="val 9524"/>
             </a:avLst>
           </a:prstGeom>
           <a:solidFill>
@@ -15824,14 +15941,14 @@
       </p:sp>
       <p:sp>
         <p:nvSpPr>
-          <p:cNvPr id="40" name="Text 38"/>
-          <p:cNvSpPr/>
-          <p:nvPr/>
-        </p:nvSpPr>
-        <p:spPr>
-          <a:xfrm>
-            <a:off x="2254649" y="4169664"/>
-            <a:ext cx="685800" cy="475488"/>
+          <p:cNvPr id="41" name="Text 39"/>
+          <p:cNvSpPr/>
+          <p:nvPr/>
+        </p:nvSpPr>
+        <p:spPr>
+          <a:xfrm>
+            <a:off x="2023872" y="4169664"/>
+            <a:ext cx="685800" cy="384048"/>
           </a:xfrm>
           <a:prstGeom prst="rect">
             <a:avLst/>
@@ -15863,18 +15980,18 @@
       </p:sp>
       <p:sp>
         <p:nvSpPr>
-          <p:cNvPr id="41" name="Shape 39"/>
-          <p:cNvSpPr/>
-          <p:nvPr/>
-        </p:nvSpPr>
-        <p:spPr>
-          <a:xfrm>
-            <a:off x="3293146" y="4169664"/>
-            <a:ext cx="685800" cy="475488"/>
+          <p:cNvPr id="42" name="Shape 40"/>
+          <p:cNvSpPr/>
+          <p:nvPr/>
+        </p:nvSpPr>
+        <p:spPr>
+          <a:xfrm>
+            <a:off x="2831592" y="4169664"/>
+            <a:ext cx="685800" cy="384048"/>
           </a:xfrm>
           <a:prstGeom prst="rect">
             <a:avLst>
-              <a:gd name="adj" fmla="val 7692"/>
+              <a:gd name="adj" fmla="val 9524"/>
             </a:avLst>
           </a:prstGeom>
           <a:solidFill>
@@ -15890,14 +16007,14 @@
       </p:sp>
       <p:sp>
         <p:nvSpPr>
-          <p:cNvPr id="42" name="Text 40"/>
-          <p:cNvSpPr/>
-          <p:nvPr/>
-        </p:nvSpPr>
-        <p:spPr>
-          <a:xfrm>
-            <a:off x="3293146" y="4169664"/>
-            <a:ext cx="685800" cy="475488"/>
+          <p:cNvPr id="43" name="Text 41"/>
+          <p:cNvSpPr/>
+          <p:nvPr/>
+        </p:nvSpPr>
+        <p:spPr>
+          <a:xfrm>
+            <a:off x="2831592" y="4169664"/>
+            <a:ext cx="685800" cy="384048"/>
           </a:xfrm>
           <a:prstGeom prst="rect">
             <a:avLst/>
@@ -15929,18 +16046,18 @@
       </p:sp>
       <p:sp>
         <p:nvSpPr>
-          <p:cNvPr id="43" name="Shape 41"/>
-          <p:cNvSpPr/>
-          <p:nvPr/>
-        </p:nvSpPr>
-        <p:spPr>
-          <a:xfrm>
-            <a:off x="4331643" y="4169664"/>
-            <a:ext cx="685800" cy="475488"/>
+          <p:cNvPr id="44" name="Shape 42"/>
+          <p:cNvSpPr/>
+          <p:nvPr/>
+        </p:nvSpPr>
+        <p:spPr>
+          <a:xfrm>
+            <a:off x="3639312" y="4169664"/>
+            <a:ext cx="685800" cy="384048"/>
           </a:xfrm>
           <a:prstGeom prst="rect">
             <a:avLst>
-              <a:gd name="adj" fmla="val 7692"/>
+              <a:gd name="adj" fmla="val 9524"/>
             </a:avLst>
           </a:prstGeom>
           <a:solidFill>
@@ -15956,14 +16073,14 @@
       </p:sp>
       <p:sp>
         <p:nvSpPr>
-          <p:cNvPr id="44" name="Text 42"/>
-          <p:cNvSpPr/>
-          <p:nvPr/>
-        </p:nvSpPr>
-        <p:spPr>
-          <a:xfrm>
-            <a:off x="4331643" y="4169664"/>
-            <a:ext cx="685800" cy="475488"/>
+          <p:cNvPr id="45" name="Text 43"/>
+          <p:cNvSpPr/>
+          <p:nvPr/>
+        </p:nvSpPr>
+        <p:spPr>
+          <a:xfrm>
+            <a:off x="3639312" y="4169664"/>
+            <a:ext cx="685800" cy="384048"/>
           </a:xfrm>
           <a:prstGeom prst="rect">
             <a:avLst/>
@@ -15987,7 +16104,7 @@
                 <a:ea typeface="Trebuchet MS" pitchFamily="34" charset="-122"/>
                 <a:cs typeface="Trebuchet MS" pitchFamily="34" charset="-120"/>
               </a:rPr>
-              <a:t>p</a:t>
+              <a:t>b</a:t>
             </a:r>
             <a:endParaRPr lang="en-US" sz="900" dirty="0"/>
           </a:p>
@@ -15995,18 +16112,18 @@
       </p:sp>
       <p:sp>
         <p:nvSpPr>
-          <p:cNvPr id="45" name="Shape 43"/>
-          <p:cNvSpPr/>
-          <p:nvPr/>
-        </p:nvSpPr>
-        <p:spPr>
-          <a:xfrm>
-            <a:off x="5370141" y="4169664"/>
-            <a:ext cx="685800" cy="475488"/>
+          <p:cNvPr id="46" name="Shape 44"/>
+          <p:cNvSpPr/>
+          <p:nvPr/>
+        </p:nvSpPr>
+        <p:spPr>
+          <a:xfrm>
+            <a:off x="4447032" y="4169664"/>
+            <a:ext cx="685800" cy="384048"/>
           </a:xfrm>
           <a:prstGeom prst="rect">
             <a:avLst>
-              <a:gd name="adj" fmla="val 7692"/>
+              <a:gd name="adj" fmla="val 9524"/>
             </a:avLst>
           </a:prstGeom>
           <a:solidFill>
@@ -16022,14 +16139,14 @@
       </p:sp>
       <p:sp>
         <p:nvSpPr>
-          <p:cNvPr id="46" name="Text 44"/>
-          <p:cNvSpPr/>
-          <p:nvPr/>
-        </p:nvSpPr>
-        <p:spPr>
-          <a:xfrm>
-            <a:off x="5370141" y="4169664"/>
-            <a:ext cx="685800" cy="475488"/>
+          <p:cNvPr id="47" name="Text 45"/>
+          <p:cNvSpPr/>
+          <p:nvPr/>
+        </p:nvSpPr>
+        <p:spPr>
+          <a:xfrm>
+            <a:off x="4447032" y="4169664"/>
+            <a:ext cx="685800" cy="384048"/>
           </a:xfrm>
           <a:prstGeom prst="rect">
             <a:avLst/>
@@ -16053,7 +16170,7 @@
                 <a:ea typeface="Trebuchet MS" pitchFamily="34" charset="-122"/>
                 <a:cs typeface="Trebuchet MS" pitchFamily="34" charset="-120"/>
               </a:rPr>
-              <a:t>l</a:t>
+              <a:t>r</a:t>
             </a:r>
             <a:endParaRPr lang="en-US" sz="900" dirty="0"/>
           </a:p>
@@ -16061,18 +16178,18 @@
       </p:sp>
       <p:sp>
         <p:nvSpPr>
-          <p:cNvPr id="47" name="Shape 45"/>
-          <p:cNvSpPr/>
-          <p:nvPr/>
-        </p:nvSpPr>
-        <p:spPr>
-          <a:xfrm>
-            <a:off x="6408638" y="4169664"/>
-            <a:ext cx="685800" cy="475488"/>
+          <p:cNvPr id="48" name="Shape 46"/>
+          <p:cNvSpPr/>
+          <p:nvPr/>
+        </p:nvSpPr>
+        <p:spPr>
+          <a:xfrm>
+            <a:off x="5254752" y="4169664"/>
+            <a:ext cx="685800" cy="384048"/>
           </a:xfrm>
           <a:prstGeom prst="rect">
             <a:avLst>
-              <a:gd name="adj" fmla="val 7692"/>
+              <a:gd name="adj" fmla="val 9524"/>
             </a:avLst>
           </a:prstGeom>
           <a:solidFill>
@@ -16088,14 +16205,14 @@
       </p:sp>
       <p:sp>
         <p:nvSpPr>
-          <p:cNvPr id="48" name="Text 46"/>
-          <p:cNvSpPr/>
-          <p:nvPr/>
-        </p:nvSpPr>
-        <p:spPr>
-          <a:xfrm>
-            <a:off x="6408638" y="4169664"/>
-            <a:ext cx="685800" cy="475488"/>
+          <p:cNvPr id="49" name="Text 47"/>
+          <p:cNvSpPr/>
+          <p:nvPr/>
+        </p:nvSpPr>
+        <p:spPr>
+          <a:xfrm>
+            <a:off x="5254752" y="4169664"/>
+            <a:ext cx="685800" cy="384048"/>
           </a:xfrm>
           <a:prstGeom prst="rect">
             <a:avLst/>
@@ -16119,7 +16236,7 @@
                 <a:ea typeface="Trebuchet MS" pitchFamily="34" charset="-122"/>
                 <a:cs typeface="Trebuchet MS" pitchFamily="34" charset="-120"/>
               </a:rPr>
-              <a:t>oy</a:t>
+              <a:t>a</a:t>
             </a:r>
             <a:endParaRPr lang="en-US" sz="900" dirty="0"/>
           </a:p>
@@ -16127,18 +16244,18 @@
       </p:sp>
       <p:sp>
         <p:nvSpPr>
-          <p:cNvPr id="49" name="Shape 47"/>
-          <p:cNvSpPr/>
-          <p:nvPr/>
-        </p:nvSpPr>
-        <p:spPr>
-          <a:xfrm>
-            <a:off x="7447135" y="4169664"/>
-            <a:ext cx="685800" cy="475488"/>
+          <p:cNvPr id="50" name="Shape 48"/>
+          <p:cNvSpPr/>
+          <p:nvPr/>
+        </p:nvSpPr>
+        <p:spPr>
+          <a:xfrm>
+            <a:off x="6062472" y="4169664"/>
+            <a:ext cx="685800" cy="384048"/>
           </a:xfrm>
           <a:prstGeom prst="rect">
             <a:avLst>
-              <a:gd name="adj" fmla="val 7692"/>
+              <a:gd name="adj" fmla="val 9524"/>
             </a:avLst>
           </a:prstGeom>
           <a:solidFill>
@@ -16154,14 +16271,14 @@
       </p:sp>
       <p:sp>
         <p:nvSpPr>
-          <p:cNvPr id="50" name="Text 48"/>
-          <p:cNvSpPr/>
-          <p:nvPr/>
-        </p:nvSpPr>
-        <p:spPr>
-          <a:xfrm>
-            <a:off x="7447135" y="4169664"/>
-            <a:ext cx="685800" cy="475488"/>
+          <p:cNvPr id="51" name="Text 49"/>
+          <p:cNvSpPr/>
+          <p:nvPr/>
+        </p:nvSpPr>
+        <p:spPr>
+          <a:xfrm>
+            <a:off x="6062472" y="4169664"/>
+            <a:ext cx="685800" cy="384048"/>
           </a:xfrm>
           <a:prstGeom prst="rect">
             <a:avLst/>
@@ -16185,7 +16302,178 @@
                 <a:ea typeface="Trebuchet MS" pitchFamily="34" charset="-122"/>
                 <a:cs typeface="Trebuchet MS" pitchFamily="34" charset="-120"/>
               </a:rPr>
-              <a:t>ing</a:t>
+              <a:t>c</a:t>
+            </a:r>
+            <a:endParaRPr lang="en-US" sz="900" dirty="0"/>
+          </a:p>
+        </p:txBody>
+      </p:sp>
+      <p:sp>
+        <p:nvSpPr>
+          <p:cNvPr id="52" name="Text 50"/>
+          <p:cNvSpPr/>
+          <p:nvPr/>
+        </p:nvSpPr>
+        <p:spPr>
+          <a:xfrm>
+            <a:off x="6062472" y="4572000"/>
+            <a:ext cx="685800" cy="219456"/>
+          </a:xfrm>
+          <a:prstGeom prst="rect">
+            <a:avLst/>
+          </a:prstGeom>
+          <a:noFill/>
+          <a:ln/>
+        </p:spPr>
+        <p:txBody>
+          <a:bodyPr wrap="square" lIns="0" tIns="0" rIns="0" bIns="0" rtlCol="0" anchor="t"/>
+          <a:lstStyle/>
+          <a:p>
+            <a:pPr algn="ctr" indent="0" marL="0">
+              <a:buNone/>
+            </a:pPr>
+            <a:r>
+              <a:rPr lang="en-US" sz="750" i="1" dirty="0">
+                <a:solidFill>
+                  <a:srgbClr val="94A3B8"/>
+                </a:solidFill>
+                <a:latin typeface="Calibri" pitchFamily="34" charset="0"/>
+                <a:ea typeface="Calibri" pitchFamily="34" charset="-122"/>
+                <a:cs typeface="Calibri" pitchFamily="34" charset="-120"/>
+              </a:rPr>
+              <a:t>/s/</a:t>
+            </a:r>
+            <a:endParaRPr lang="en-US" sz="750" dirty="0"/>
+          </a:p>
+        </p:txBody>
+      </p:sp>
+      <p:sp>
+        <p:nvSpPr>
+          <p:cNvPr id="53" name="Shape 51"/>
+          <p:cNvSpPr/>
+          <p:nvPr/>
+        </p:nvSpPr>
+        <p:spPr>
+          <a:xfrm>
+            <a:off x="6870192" y="4169664"/>
+            <a:ext cx="685800" cy="384048"/>
+          </a:xfrm>
+          <a:prstGeom prst="rect">
+            <a:avLst>
+              <a:gd name="adj" fmla="val 9524"/>
+            </a:avLst>
+          </a:prstGeom>
+          <a:solidFill>
+            <a:srgbClr val="FFFFFF"/>
+          </a:solidFill>
+          <a:ln w="12700">
+            <a:solidFill>
+              <a:srgbClr val="DB2777"/>
+            </a:solidFill>
+            <a:prstDash val="solid"/>
+          </a:ln>
+        </p:spPr>
+      </p:sp>
+      <p:sp>
+        <p:nvSpPr>
+          <p:cNvPr id="54" name="Text 52"/>
+          <p:cNvSpPr/>
+          <p:nvPr/>
+        </p:nvSpPr>
+        <p:spPr>
+          <a:xfrm>
+            <a:off x="6870192" y="4169664"/>
+            <a:ext cx="685800" cy="384048"/>
+          </a:xfrm>
+          <a:prstGeom prst="rect">
+            <a:avLst/>
+          </a:prstGeom>
+          <a:noFill/>
+          <a:ln/>
+        </p:spPr>
+        <p:txBody>
+          <a:bodyPr wrap="square" lIns="0" tIns="0" rIns="0" bIns="0" rtlCol="0" anchor="ctr"/>
+          <a:lstStyle/>
+          <a:p>
+            <a:pPr algn="ctr" indent="0" marL="0">
+              <a:buNone/>
+            </a:pPr>
+            <a:r>
+              <a:rPr lang="en-US" sz="900" b="1" dirty="0">
+                <a:solidFill>
+                  <a:srgbClr val="9D174D"/>
+                </a:solidFill>
+                <a:latin typeface="Trebuchet MS" pitchFamily="34" charset="0"/>
+                <a:ea typeface="Trebuchet MS" pitchFamily="34" charset="-122"/>
+                <a:cs typeface="Trebuchet MS" pitchFamily="34" charset="-120"/>
+              </a:rPr>
+              <a:t>i</a:t>
+            </a:r>
+            <a:endParaRPr lang="en-US" sz="900" dirty="0"/>
+          </a:p>
+        </p:txBody>
+      </p:sp>
+      <p:sp>
+        <p:nvSpPr>
+          <p:cNvPr id="55" name="Shape 53"/>
+          <p:cNvSpPr/>
+          <p:nvPr/>
+        </p:nvSpPr>
+        <p:spPr>
+          <a:xfrm>
+            <a:off x="7677912" y="4169664"/>
+            <a:ext cx="685800" cy="384048"/>
+          </a:xfrm>
+          <a:prstGeom prst="rect">
+            <a:avLst>
+              <a:gd name="adj" fmla="val 9524"/>
+            </a:avLst>
+          </a:prstGeom>
+          <a:solidFill>
+            <a:srgbClr val="FFFFFF"/>
+          </a:solidFill>
+          <a:ln w="12700">
+            <a:solidFill>
+              <a:srgbClr val="DB2777"/>
+            </a:solidFill>
+            <a:prstDash val="solid"/>
+          </a:ln>
+        </p:spPr>
+      </p:sp>
+      <p:sp>
+        <p:nvSpPr>
+          <p:cNvPr id="56" name="Text 54"/>
+          <p:cNvSpPr/>
+          <p:nvPr/>
+        </p:nvSpPr>
+        <p:spPr>
+          <a:xfrm>
+            <a:off x="7677912" y="4169664"/>
+            <a:ext cx="685800" cy="384048"/>
+          </a:xfrm>
+          <a:prstGeom prst="rect">
+            <a:avLst/>
+          </a:prstGeom>
+          <a:noFill/>
+          <a:ln/>
+        </p:spPr>
+        <p:txBody>
+          <a:bodyPr wrap="square" lIns="0" tIns="0" rIns="0" bIns="0" rtlCol="0" anchor="ctr"/>
+          <a:lstStyle/>
+          <a:p>
+            <a:pPr algn="ctr" indent="0" marL="0">
+              <a:buNone/>
+            </a:pPr>
+            <a:r>
+              <a:rPr lang="en-US" sz="900" b="1" dirty="0">
+                <a:solidFill>
+                  <a:srgbClr val="9D174D"/>
+                </a:solidFill>
+                <a:latin typeface="Trebuchet MS" pitchFamily="34" charset="0"/>
+                <a:ea typeface="Trebuchet MS" pitchFamily="34" charset="-122"/>
+                <a:cs typeface="Trebuchet MS" pitchFamily="34" charset="-120"/>
+              </a:rPr>
+              <a:t>ng</a:t>
             </a:r>
             <a:endParaRPr lang="en-US" sz="900" dirty="0"/>
           </a:p>
@@ -16759,7 +17047,7 @@
                 <a:ea typeface="Calibri" pitchFamily="34" charset="-122"/>
                 <a:cs typeface="Calibri" pitchFamily="34" charset="-120"/>
               </a:rPr>
-              <a:t>Word Labs  •  wordlabs.app  •  Prefix: 'em-' = put into, make</a:t>
+              <a:t>Word Labs  •  wordlabs.app  •  Prefix: 'em-' = put into, cause to be</a:t>
             </a:r>
             <a:endParaRPr lang="en-US" sz="800" dirty="0"/>
           </a:p>
@@ -17399,7 +17687,7 @@
                 <a:ea typeface="Calibri" pitchFamily="34" charset="-122"/>
                 <a:cs typeface="Calibri" pitchFamily="34" charset="-120"/>
               </a:rPr>
-              <a:t>Word Labs  •  wordlabs.app  •  Prefix: 'em-' = put into, make</a:t>
+              <a:t>Word Labs  •  wordlabs.app  •  Prefix: 'em-' = put into, cause to be</a:t>
             </a:r>
             <a:endParaRPr lang="en-US" sz="800" dirty="0"/>
           </a:p>
@@ -17511,7 +17799,7 @@
                 <a:ea typeface="Calibri" pitchFamily="34" charset="-122"/>
                 <a:cs typeface="Calibri" pitchFamily="34" charset="-120"/>
               </a:rPr>
-              <a:t>To </a:t>
+              <a:t>The explorer began to </a:t>
             </a:r>
             <a:pPr algn="l" indent="0" marL="0">
               <a:buNone/>
@@ -17528,7 +17816,7 @@
                 <a:ea typeface="Calibri" pitchFamily="34" charset="-122"/>
                 <a:cs typeface="Calibri" pitchFamily="34" charset="-120"/>
               </a:rPr>
-              <a:t>embody</a:t>
+              <a:t>embark</a:t>
             </a:r>
             <a:pPr algn="l" indent="0" marL="0">
               <a:buNone/>
@@ -17542,7 +17830,7 @@
                 <a:ea typeface="Calibri" pitchFamily="34" charset="-122"/>
                 <a:cs typeface="Calibri" pitchFamily="34" charset="-120"/>
               </a:rPr>
-              <a:t> kindness, we should </a:t>
+              <a:t> on the voyage, feeling </a:t>
             </a:r>
             <a:pPr algn="l" indent="0" marL="0">
               <a:buNone/>
@@ -17559,7 +17847,7 @@
                 <a:ea typeface="Calibri" pitchFamily="34" charset="-122"/>
                 <a:cs typeface="Calibri" pitchFamily="34" charset="-120"/>
               </a:rPr>
-              <a:t>embrace</a:t>
+              <a:t>embedded</a:t>
             </a:r>
             <a:pPr algn="l" indent="0" marL="0">
               <a:buNone/>
@@ -17573,7 +17861,7 @@
                 <a:ea typeface="Calibri" pitchFamily="34" charset="-122"/>
                 <a:cs typeface="Calibri" pitchFamily="34" charset="-120"/>
               </a:rPr>
-              <a:t> others' differences and </a:t>
+              <a:t> in the spirit of </a:t>
             </a:r>
             <a:pPr algn="l" indent="0" marL="0">
               <a:buNone/>
@@ -17590,7 +17878,7 @@
                 <a:ea typeface="Calibri" pitchFamily="34" charset="-122"/>
                 <a:cs typeface="Calibri" pitchFamily="34" charset="-120"/>
               </a:rPr>
-              <a:t>empower</a:t>
+              <a:t>adventure</a:t>
             </a:r>
             <a:pPr algn="l" indent="0" marL="0">
               <a:buNone/>
@@ -17604,7 +17892,7 @@
                 <a:ea typeface="Calibri" pitchFamily="34" charset="-122"/>
                 <a:cs typeface="Calibri" pitchFamily="34" charset="-120"/>
               </a:rPr>
-              <a:t> those who need our help.</a:t>
+              <a:t>.</a:t>
             </a:r>
             <a:endParaRPr lang="en-US" sz="1800" dirty="0"/>
           </a:p>
@@ -17759,7 +18047,7 @@
                 <a:ea typeface="Trebuchet MS" pitchFamily="34" charset="-122"/>
                 <a:cs typeface="Trebuchet MS" pitchFamily="34" charset="-120"/>
               </a:rPr>
-              <a:t>embody</a:t>
+              <a:t>embark</a:t>
             </a:r>
             <a:endParaRPr lang="en-US" sz="1400" dirty="0"/>
           </a:p>
@@ -17887,7 +18175,7 @@
                 <a:ea typeface="Trebuchet MS" pitchFamily="34" charset="-122"/>
                 <a:cs typeface="Trebuchet MS" pitchFamily="34" charset="-120"/>
               </a:rPr>
-              <a:t>embrace</a:t>
+              <a:t>embedded</a:t>
             </a:r>
             <a:endParaRPr lang="en-US" sz="1400" dirty="0"/>
           </a:p>
@@ -18015,7 +18303,7 @@
                 <a:ea typeface="Trebuchet MS" pitchFamily="34" charset="-122"/>
                 <a:cs typeface="Trebuchet MS" pitchFamily="34" charset="-120"/>
               </a:rPr>
-              <a:t>empower</a:t>
+              <a:t>adventure</a:t>
             </a:r>
             <a:endParaRPr lang="en-US" sz="1400" dirty="0"/>
           </a:p>
@@ -18346,7 +18634,7 @@
                 <a:ea typeface="Calibri" pitchFamily="34" charset="-122"/>
                 <a:cs typeface="Calibri" pitchFamily="34" charset="-120"/>
               </a:rPr>
-              <a:t>Word Labs  •  wordlabs.app  •  Prefix: 'em-' = put into, make</a:t>
+              <a:t>Word Labs  •  wordlabs.app  •  Prefix: 'em-' = put into, cause to be</a:t>
             </a:r>
             <a:endParaRPr lang="en-US" sz="800" dirty="0"/>
           </a:p>
@@ -18485,7 +18773,7 @@
                 <a:ea typeface="Trebuchet MS" pitchFamily="34" charset="-122"/>
                 <a:cs typeface="Trebuchet MS" pitchFamily="34" charset="-120"/>
               </a:rPr>
-              <a:t>embody</a:t>
+              <a:t>embark</a:t>
             </a:r>
             <a:endParaRPr lang="en-US" sz="2800" dirty="0"/>
           </a:p>
@@ -19173,7 +19461,7 @@
                 <a:ea typeface="Calibri" pitchFamily="34" charset="-122"/>
                 <a:cs typeface="Calibri" pitchFamily="34" charset="-120"/>
               </a:rPr>
-              <a:t>Word Labs  •  wordlabs.app  •  Prefix: 'em-' = put into, make</a:t>
+              <a:t>Word Labs  •  wordlabs.app  •  Prefix: 'em-' = put into, cause to be</a:t>
             </a:r>
             <a:endParaRPr lang="en-US" sz="800" dirty="0"/>
           </a:p>
@@ -19312,7 +19600,7 @@
                 <a:ea typeface="Trebuchet MS" pitchFamily="34" charset="-122"/>
                 <a:cs typeface="Trebuchet MS" pitchFamily="34" charset="-120"/>
               </a:rPr>
-              <a:t>embody</a:t>
+              <a:t>embark</a:t>
             </a:r>
             <a:endParaRPr lang="en-US" sz="2800" dirty="0"/>
           </a:p>
@@ -19392,7 +19680,7 @@
         </p:nvSpPr>
         <p:spPr>
           <a:xfrm>
-            <a:off x="2221992" y="2258568"/>
+            <a:off x="2938272" y="2258568"/>
             <a:ext cx="1828800" cy="292608"/>
           </a:xfrm>
           <a:prstGeom prst="rect">
@@ -19426,7 +19714,7 @@
         </p:nvSpPr>
         <p:spPr>
           <a:xfrm>
-            <a:off x="2221992" y="2258568"/>
+            <a:off x="2938272" y="2258568"/>
             <a:ext cx="1828800" cy="292608"/>
           </a:xfrm>
           <a:prstGeom prst="rect">
@@ -19465,7 +19753,7 @@
         </p:nvSpPr>
         <p:spPr>
           <a:xfrm>
-            <a:off x="2221992" y="2569464"/>
+            <a:off x="2938272" y="2569464"/>
             <a:ext cx="1828800" cy="201168"/>
           </a:xfrm>
           <a:prstGeom prst="rect">
@@ -19490,7 +19778,7 @@
                 <a:ea typeface="Calibri" pitchFamily="34" charset="-122"/>
                 <a:cs typeface="Calibri" pitchFamily="34" charset="-120"/>
               </a:rPr>
-              <a:t>put into, make</a:t>
+              <a:t>put into, cause to be</a:t>
             </a:r>
             <a:endParaRPr lang="en-US" sz="850" dirty="0"/>
           </a:p>
@@ -19504,7 +19792,7 @@
         </p:nvSpPr>
         <p:spPr>
           <a:xfrm>
-            <a:off x="4370832" y="2258568"/>
+            <a:off x="5803392" y="2258568"/>
             <a:ext cx="1828800" cy="292608"/>
           </a:xfrm>
           <a:prstGeom prst="rect">
@@ -19538,7 +19826,7 @@
         </p:nvSpPr>
         <p:spPr>
           <a:xfrm>
-            <a:off x="4370832" y="2258568"/>
+            <a:off x="5803392" y="2258568"/>
             <a:ext cx="1828800" cy="292608"/>
           </a:xfrm>
           <a:prstGeom prst="rect">
@@ -19563,7 +19851,7 @@
                 <a:ea typeface="Trebuchet MS" pitchFamily="34" charset="-122"/>
                 <a:cs typeface="Trebuchet MS" pitchFamily="34" charset="-120"/>
               </a:rPr>
-              <a:t>bodi</a:t>
+              <a:t>bark</a:t>
             </a:r>
             <a:endParaRPr lang="en-US" sz="1300" dirty="0"/>
           </a:p>
@@ -19577,7 +19865,7 @@
         </p:nvSpPr>
         <p:spPr>
           <a:xfrm>
-            <a:off x="4370832" y="2569464"/>
+            <a:off x="5803392" y="2569464"/>
             <a:ext cx="1828800" cy="201168"/>
           </a:xfrm>
           <a:prstGeom prst="rect">
@@ -19602,7 +19890,7 @@
                 <a:ea typeface="Calibri" pitchFamily="34" charset="-122"/>
                 <a:cs typeface="Calibri" pitchFamily="34" charset="-120"/>
               </a:rPr>
-              <a:t>physical form</a:t>
+              <a:t>a ship or vessel</a:t>
             </a:r>
             <a:endParaRPr lang="en-US" sz="850" dirty="0"/>
           </a:p>
@@ -19616,30 +19904,23 @@
         </p:nvSpPr>
         <p:spPr>
           <a:xfrm>
-            <a:off x="6519672" y="2258568"/>
-            <a:ext cx="1828800" cy="292608"/>
+            <a:off x="365760" y="3273552"/>
+            <a:ext cx="1371600" cy="658368"/>
           </a:xfrm>
           <a:prstGeom prst="rect">
             <a:avLst>
-              <a:gd name="adj" fmla="val 25000"/>
+              <a:gd name="adj" fmla="val 8333"/>
             </a:avLst>
           </a:prstGeom>
           <a:solidFill>
-            <a:srgbClr val="FCE7F3"/>
-          </a:solidFill>
-          <a:ln w="19050">
-            <a:solidFill>
-              <a:srgbClr val="DB2777"/>
-            </a:solidFill>
-            <a:prstDash val="solid"/>
-          </a:ln>
-          <a:effectLst>
-            <a:outerShdw sx="100000" sy="100000" kx="0" ky="0" algn="bl" rotWithShape="0" blurRad="101600" dist="38100" dir="8100000">
-              <a:srgbClr val="000000">
-                <a:alpha val="12000"/>
-              </a:srgbClr>
-            </a:outerShdw>
-          </a:effectLst>
+            <a:srgbClr val="E2E8F0"/>
+          </a:solidFill>
+          <a:ln w="12700">
+            <a:solidFill>
+              <a:srgbClr val="E2E8F0"/>
+            </a:solidFill>
+            <a:prstDash val="solid"/>
+          </a:ln>
         </p:spPr>
       </p:sp>
       <p:sp>
@@ -19650,90 +19931,117 @@
         </p:nvSpPr>
         <p:spPr>
           <a:xfrm>
-            <a:off x="6519672" y="2258568"/>
-            <a:ext cx="1828800" cy="292608"/>
-          </a:xfrm>
-          <a:prstGeom prst="rect">
-            <a:avLst/>
-          </a:prstGeom>
-          <a:noFill/>
-          <a:ln/>
-        </p:spPr>
-        <p:txBody>
-          <a:bodyPr wrap="square" lIns="0" tIns="0" rIns="0" bIns="0" rtlCol="0" anchor="ctr"/>
-          <a:lstStyle/>
-          <a:p>
-            <a:pPr algn="ctr" indent="0" marL="0">
-              <a:buNone/>
-            </a:pPr>
-            <a:r>
-              <a:rPr lang="en-US" sz="1300" b="1" dirty="0">
-                <a:solidFill>
-                  <a:srgbClr val="9D174D"/>
+            <a:off x="365760" y="3273552"/>
+            <a:ext cx="1371600" cy="658368"/>
+          </a:xfrm>
+          <a:prstGeom prst="rect">
+            <a:avLst/>
+          </a:prstGeom>
+          <a:noFill/>
+          <a:ln/>
+        </p:spPr>
+        <p:txBody>
+          <a:bodyPr wrap="square" lIns="0" tIns="0" rIns="0" bIns="0" rtlCol="0" anchor="ctr"/>
+          <a:lstStyle/>
+          <a:p>
+            <a:pPr algn="ctr" indent="0" marL="0">
+              <a:buNone/>
+            </a:pPr>
+            <a:r>
+              <a:rPr lang="en-US" sz="1100" b="1" dirty="0">
+                <a:solidFill>
+                  <a:srgbClr val="475569"/>
                 </a:solidFill>
                 <a:latin typeface="Trebuchet MS" pitchFamily="34" charset="0"/>
                 <a:ea typeface="Trebuchet MS" pitchFamily="34" charset="-122"/>
                 <a:cs typeface="Trebuchet MS" pitchFamily="34" charset="-120"/>
               </a:rPr>
-              <a:t>y</a:t>
-            </a:r>
-            <a:endParaRPr lang="en-US" sz="1300" dirty="0"/>
-          </a:p>
-        </p:txBody>
-      </p:sp>
-      <p:sp>
-        <p:nvSpPr>
-          <p:cNvPr id="24" name="Text 22"/>
-          <p:cNvSpPr/>
-          <p:nvPr/>
-        </p:nvSpPr>
-        <p:spPr>
-          <a:xfrm>
-            <a:off x="6519672" y="2569464"/>
-            <a:ext cx="1828800" cy="201168"/>
-          </a:xfrm>
-          <a:prstGeom prst="rect">
-            <a:avLst/>
-          </a:prstGeom>
-          <a:noFill/>
-          <a:ln/>
-        </p:spPr>
-        <p:txBody>
-          <a:bodyPr wrap="square" lIns="0" tIns="0" rIns="0" bIns="0" rtlCol="0" anchor="t"/>
-          <a:lstStyle/>
-          <a:p>
-            <a:pPr algn="ctr" indent="0" marL="0">
-              <a:buNone/>
-            </a:pPr>
-            <a:r>
-              <a:rPr lang="en-US" sz="850" dirty="0">
-                <a:solidFill>
-                  <a:srgbClr val="475569"/>
+              <a:t>Syllables</a:t>
+            </a:r>
+            <a:endParaRPr lang="en-US" sz="1100" dirty="0"/>
+          </a:p>
+        </p:txBody>
+      </p:sp>
+      <p:sp>
+        <p:nvSpPr>
+          <p:cNvPr id="24" name="Shape 22"/>
+          <p:cNvSpPr/>
+          <p:nvPr/>
+        </p:nvSpPr>
+        <p:spPr>
+          <a:xfrm>
+            <a:off x="1874520" y="3273552"/>
+            <a:ext cx="6903720" cy="658368"/>
+          </a:xfrm>
+          <a:prstGeom prst="rect">
+            <a:avLst>
+              <a:gd name="adj" fmla="val 8333"/>
+            </a:avLst>
+          </a:prstGeom>
+          <a:solidFill>
+            <a:srgbClr val="F8FAFC"/>
+          </a:solidFill>
+          <a:ln w="12700">
+            <a:solidFill>
+              <a:srgbClr val="E2E8F0"/>
+            </a:solidFill>
+            <a:prstDash val="dash"/>
+          </a:ln>
+        </p:spPr>
+      </p:sp>
+      <p:sp>
+        <p:nvSpPr>
+          <p:cNvPr id="25" name="Text 23"/>
+          <p:cNvSpPr/>
+          <p:nvPr/>
+        </p:nvSpPr>
+        <p:spPr>
+          <a:xfrm>
+            <a:off x="1874520" y="3273552"/>
+            <a:ext cx="6903720" cy="658368"/>
+          </a:xfrm>
+          <a:prstGeom prst="rect">
+            <a:avLst/>
+          </a:prstGeom>
+          <a:noFill/>
+          <a:ln/>
+        </p:spPr>
+        <p:txBody>
+          <a:bodyPr wrap="square" rtlCol="0" anchor="ctr"/>
+          <a:lstStyle/>
+          <a:p>
+            <a:pPr algn="ctr" indent="0" marL="0">
+              <a:buNone/>
+            </a:pPr>
+            <a:r>
+              <a:rPr lang="en-US" sz="1100" i="1" dirty="0">
+                <a:solidFill>
+                  <a:srgbClr val="CBD5E1"/>
                 </a:solidFill>
                 <a:latin typeface="Calibri" pitchFamily="34" charset="0"/>
                 <a:ea typeface="Calibri" pitchFamily="34" charset="-122"/>
                 <a:cs typeface="Calibri" pitchFamily="34" charset="-120"/>
               </a:rPr>
-              <a:t>forms a verb</a:t>
-            </a:r>
-            <a:endParaRPr lang="en-US" sz="850" dirty="0"/>
-          </a:p>
-        </p:txBody>
-      </p:sp>
-      <p:sp>
-        <p:nvSpPr>
-          <p:cNvPr id="25" name="Shape 23"/>
-          <p:cNvSpPr/>
-          <p:nvPr/>
-        </p:nvSpPr>
-        <p:spPr>
-          <a:xfrm>
-            <a:off x="365760" y="3273552"/>
-            <a:ext cx="1371600" cy="658368"/>
+              <a:t>Write here...</a:t>
+            </a:r>
+            <a:endParaRPr lang="en-US" sz="1100" dirty="0"/>
+          </a:p>
+        </p:txBody>
+      </p:sp>
+      <p:sp>
+        <p:nvSpPr>
+          <p:cNvPr id="26" name="Shape 24"/>
+          <p:cNvSpPr/>
+          <p:nvPr/>
+        </p:nvSpPr>
+        <p:spPr>
+          <a:xfrm>
+            <a:off x="365760" y="4096512"/>
+            <a:ext cx="1371600" cy="804672"/>
           </a:xfrm>
           <a:prstGeom prst="rect">
             <a:avLst>
-              <a:gd name="adj" fmla="val 8333"/>
+              <a:gd name="adj" fmla="val 6818"/>
             </a:avLst>
           </a:prstGeom>
           <a:solidFill>
@@ -19749,14 +20057,14 @@
       </p:sp>
       <p:sp>
         <p:nvSpPr>
-          <p:cNvPr id="26" name="Text 24"/>
-          <p:cNvSpPr/>
-          <p:nvPr/>
-        </p:nvSpPr>
-        <p:spPr>
-          <a:xfrm>
-            <a:off x="365760" y="3273552"/>
-            <a:ext cx="1371600" cy="658368"/>
+          <p:cNvPr id="27" name="Text 25"/>
+          <p:cNvSpPr/>
+          <p:nvPr/>
+        </p:nvSpPr>
+        <p:spPr>
+          <a:xfrm>
+            <a:off x="365760" y="4096512"/>
+            <a:ext cx="1371600" cy="804672"/>
           </a:xfrm>
           <a:prstGeom prst="rect">
             <a:avLst/>
@@ -19780,7 +20088,7 @@
                 <a:ea typeface="Trebuchet MS" pitchFamily="34" charset="-122"/>
                 <a:cs typeface="Trebuchet MS" pitchFamily="34" charset="-120"/>
               </a:rPr>
-              <a:t>Syllables</a:t>
+              <a:t>Phonemes</a:t>
             </a:r>
             <a:endParaRPr lang="en-US" sz="1100" dirty="0"/>
           </a:p>
@@ -19788,80 +20096,14 @@
       </p:sp>
       <p:sp>
         <p:nvSpPr>
-          <p:cNvPr id="27" name="Shape 25"/>
-          <p:cNvSpPr/>
-          <p:nvPr/>
-        </p:nvSpPr>
-        <p:spPr>
-          <a:xfrm>
-            <a:off x="1874520" y="3273552"/>
-            <a:ext cx="6903720" cy="658368"/>
-          </a:xfrm>
-          <a:prstGeom prst="rect">
-            <a:avLst>
-              <a:gd name="adj" fmla="val 8333"/>
-            </a:avLst>
-          </a:prstGeom>
-          <a:solidFill>
-            <a:srgbClr val="F8FAFC"/>
-          </a:solidFill>
-          <a:ln w="12700">
-            <a:solidFill>
-              <a:srgbClr val="E2E8F0"/>
-            </a:solidFill>
-            <a:prstDash val="dash"/>
-          </a:ln>
-        </p:spPr>
-      </p:sp>
-      <p:sp>
-        <p:nvSpPr>
-          <p:cNvPr id="28" name="Text 26"/>
-          <p:cNvSpPr/>
-          <p:nvPr/>
-        </p:nvSpPr>
-        <p:spPr>
-          <a:xfrm>
-            <a:off x="1874520" y="3273552"/>
-            <a:ext cx="6903720" cy="658368"/>
-          </a:xfrm>
-          <a:prstGeom prst="rect">
-            <a:avLst/>
-          </a:prstGeom>
-          <a:noFill/>
-          <a:ln/>
-        </p:spPr>
-        <p:txBody>
-          <a:bodyPr wrap="square" rtlCol="0" anchor="ctr"/>
-          <a:lstStyle/>
-          <a:p>
-            <a:pPr algn="ctr" indent="0" marL="0">
-              <a:buNone/>
-            </a:pPr>
-            <a:r>
-              <a:rPr lang="en-US" sz="1100" i="1" dirty="0">
-                <a:solidFill>
-                  <a:srgbClr val="CBD5E1"/>
-                </a:solidFill>
-                <a:latin typeface="Calibri" pitchFamily="34" charset="0"/>
-                <a:ea typeface="Calibri" pitchFamily="34" charset="-122"/>
-                <a:cs typeface="Calibri" pitchFamily="34" charset="-120"/>
-              </a:rPr>
-              <a:t>Write here...</a:t>
-            </a:r>
-            <a:endParaRPr lang="en-US" sz="1100" dirty="0"/>
-          </a:p>
-        </p:txBody>
-      </p:sp>
-      <p:sp>
-        <p:nvSpPr>
-          <p:cNvPr id="29" name="Shape 27"/>
-          <p:cNvSpPr/>
-          <p:nvPr/>
-        </p:nvSpPr>
-        <p:spPr>
-          <a:xfrm>
-            <a:off x="365760" y="4096512"/>
-            <a:ext cx="1371600" cy="804672"/>
+          <p:cNvPr id="28" name="Shape 26"/>
+          <p:cNvSpPr/>
+          <p:nvPr/>
+        </p:nvSpPr>
+        <p:spPr>
+          <a:xfrm>
+            <a:off x="1874520" y="4096512"/>
+            <a:ext cx="6903720" cy="804672"/>
           </a:xfrm>
           <a:prstGeom prst="rect">
             <a:avLst>
@@ -19869,85 +20111,19 @@
             </a:avLst>
           </a:prstGeom>
           <a:solidFill>
-            <a:srgbClr val="E2E8F0"/>
+            <a:srgbClr val="F8FAFC"/>
           </a:solidFill>
           <a:ln w="12700">
             <a:solidFill>
               <a:srgbClr val="E2E8F0"/>
             </a:solidFill>
-            <a:prstDash val="solid"/>
-          </a:ln>
-        </p:spPr>
-      </p:sp>
-      <p:sp>
-        <p:nvSpPr>
-          <p:cNvPr id="30" name="Text 28"/>
-          <p:cNvSpPr/>
-          <p:nvPr/>
-        </p:nvSpPr>
-        <p:spPr>
-          <a:xfrm>
-            <a:off x="365760" y="4096512"/>
-            <a:ext cx="1371600" cy="804672"/>
-          </a:xfrm>
-          <a:prstGeom prst="rect">
-            <a:avLst/>
-          </a:prstGeom>
-          <a:noFill/>
-          <a:ln/>
-        </p:spPr>
-        <p:txBody>
-          <a:bodyPr wrap="square" lIns="0" tIns="0" rIns="0" bIns="0" rtlCol="0" anchor="ctr"/>
-          <a:lstStyle/>
-          <a:p>
-            <a:pPr algn="ctr" indent="0" marL="0">
-              <a:buNone/>
-            </a:pPr>
-            <a:r>
-              <a:rPr lang="en-US" sz="1100" b="1" dirty="0">
-                <a:solidFill>
-                  <a:srgbClr val="475569"/>
-                </a:solidFill>
-                <a:latin typeface="Trebuchet MS" pitchFamily="34" charset="0"/>
-                <a:ea typeface="Trebuchet MS" pitchFamily="34" charset="-122"/>
-                <a:cs typeface="Trebuchet MS" pitchFamily="34" charset="-120"/>
-              </a:rPr>
-              <a:t>Phonemes</a:t>
-            </a:r>
-            <a:endParaRPr lang="en-US" sz="1100" dirty="0"/>
-          </a:p>
-        </p:txBody>
-      </p:sp>
-      <p:sp>
-        <p:nvSpPr>
-          <p:cNvPr id="31" name="Shape 29"/>
-          <p:cNvSpPr/>
-          <p:nvPr/>
-        </p:nvSpPr>
-        <p:spPr>
-          <a:xfrm>
-            <a:off x="1874520" y="4096512"/>
-            <a:ext cx="6903720" cy="804672"/>
-          </a:xfrm>
-          <a:prstGeom prst="rect">
-            <a:avLst>
-              <a:gd name="adj" fmla="val 6818"/>
-            </a:avLst>
-          </a:prstGeom>
-          <a:solidFill>
-            <a:srgbClr val="F8FAFC"/>
-          </a:solidFill>
-          <a:ln w="12700">
-            <a:solidFill>
-              <a:srgbClr val="E2E8F0"/>
-            </a:solidFill>
             <a:prstDash val="dash"/>
           </a:ln>
         </p:spPr>
       </p:sp>
       <p:sp>
         <p:nvSpPr>
-          <p:cNvPr id="32" name="Text 30"/>
+          <p:cNvPr id="29" name="Text 27"/>
           <p:cNvSpPr/>
           <p:nvPr/>
         </p:nvSpPr>
@@ -20270,7 +20446,7 @@
                 <a:ea typeface="Calibri" pitchFamily="34" charset="-122"/>
                 <a:cs typeface="Calibri" pitchFamily="34" charset="-120"/>
               </a:rPr>
-              <a:t>Word Labs  •  wordlabs.app  •  Prefix: 'em-' = put into, make</a:t>
+              <a:t>Word Labs  •  wordlabs.app  •  Prefix: 'em-' = put into, cause to be</a:t>
             </a:r>
             <a:endParaRPr lang="en-US" sz="800" dirty="0"/>
           </a:p>
@@ -20409,7 +20585,7 @@
                 <a:ea typeface="Trebuchet MS" pitchFamily="34" charset="-122"/>
                 <a:cs typeface="Trebuchet MS" pitchFamily="34" charset="-120"/>
               </a:rPr>
-              <a:t>embody</a:t>
+              <a:t>embark</a:t>
             </a:r>
             <a:endParaRPr lang="en-US" sz="2800" dirty="0"/>
           </a:p>
@@ -20489,7 +20665,7 @@
         </p:nvSpPr>
         <p:spPr>
           <a:xfrm>
-            <a:off x="2221992" y="2258568"/>
+            <a:off x="2938272" y="2258568"/>
             <a:ext cx="1828800" cy="292608"/>
           </a:xfrm>
           <a:prstGeom prst="rect">
@@ -20523,7 +20699,7 @@
         </p:nvSpPr>
         <p:spPr>
           <a:xfrm>
-            <a:off x="2221992" y="2258568"/>
+            <a:off x="2938272" y="2258568"/>
             <a:ext cx="1828800" cy="292608"/>
           </a:xfrm>
           <a:prstGeom prst="rect">
@@ -20562,7 +20738,7 @@
         </p:nvSpPr>
         <p:spPr>
           <a:xfrm>
-            <a:off x="2221992" y="2569464"/>
+            <a:off x="2938272" y="2569464"/>
             <a:ext cx="1828800" cy="201168"/>
           </a:xfrm>
           <a:prstGeom prst="rect">
@@ -20587,7 +20763,7 @@
                 <a:ea typeface="Calibri" pitchFamily="34" charset="-122"/>
                 <a:cs typeface="Calibri" pitchFamily="34" charset="-120"/>
               </a:rPr>
-              <a:t>put into, make</a:t>
+              <a:t>put into, cause to be</a:t>
             </a:r>
             <a:endParaRPr lang="en-US" sz="850" dirty="0"/>
           </a:p>
@@ -20601,7 +20777,7 @@
         </p:nvSpPr>
         <p:spPr>
           <a:xfrm>
-            <a:off x="4370832" y="2258568"/>
+            <a:off x="5803392" y="2258568"/>
             <a:ext cx="1828800" cy="292608"/>
           </a:xfrm>
           <a:prstGeom prst="rect">
@@ -20635,7 +20811,7 @@
         </p:nvSpPr>
         <p:spPr>
           <a:xfrm>
-            <a:off x="4370832" y="2258568"/>
+            <a:off x="5803392" y="2258568"/>
             <a:ext cx="1828800" cy="292608"/>
           </a:xfrm>
           <a:prstGeom prst="rect">
@@ -20660,7 +20836,7 @@
                 <a:ea typeface="Trebuchet MS" pitchFamily="34" charset="-122"/>
                 <a:cs typeface="Trebuchet MS" pitchFamily="34" charset="-120"/>
               </a:rPr>
-              <a:t>bodi</a:t>
+              <a:t>bark</a:t>
             </a:r>
             <a:endParaRPr lang="en-US" sz="1300" dirty="0"/>
           </a:p>
@@ -20674,7 +20850,7 @@
         </p:nvSpPr>
         <p:spPr>
           <a:xfrm>
-            <a:off x="4370832" y="2569464"/>
+            <a:off x="5803392" y="2569464"/>
             <a:ext cx="1828800" cy="201168"/>
           </a:xfrm>
           <a:prstGeom prst="rect">
@@ -20699,7 +20875,7 @@
                 <a:ea typeface="Calibri" pitchFamily="34" charset="-122"/>
                 <a:cs typeface="Calibri" pitchFamily="34" charset="-120"/>
               </a:rPr>
-              <a:t>physical form</a:t>
+              <a:t>a ship or vessel</a:t>
             </a:r>
             <a:endParaRPr lang="en-US" sz="850" dirty="0"/>
           </a:p>
@@ -20713,30 +20889,23 @@
         </p:nvSpPr>
         <p:spPr>
           <a:xfrm>
-            <a:off x="6519672" y="2258568"/>
-            <a:ext cx="1828800" cy="292608"/>
+            <a:off x="365760" y="3273552"/>
+            <a:ext cx="1371600" cy="658368"/>
           </a:xfrm>
           <a:prstGeom prst="rect">
             <a:avLst>
-              <a:gd name="adj" fmla="val 25000"/>
+              <a:gd name="adj" fmla="val 8333"/>
             </a:avLst>
           </a:prstGeom>
           <a:solidFill>
-            <a:srgbClr val="FCE7F3"/>
-          </a:solidFill>
-          <a:ln w="19050">
-            <a:solidFill>
-              <a:srgbClr val="DB2777"/>
-            </a:solidFill>
-            <a:prstDash val="solid"/>
-          </a:ln>
-          <a:effectLst>
-            <a:outerShdw sx="100000" sy="100000" kx="0" ky="0" algn="bl" rotWithShape="0" blurRad="101600" dist="38100" dir="8100000">
-              <a:srgbClr val="000000">
-                <a:alpha val="12000"/>
-              </a:srgbClr>
-            </a:outerShdw>
-          </a:effectLst>
+            <a:srgbClr val="E2E8F0"/>
+          </a:solidFill>
+          <a:ln w="12700">
+            <a:solidFill>
+              <a:srgbClr val="E2E8F0"/>
+            </a:solidFill>
+            <a:prstDash val="solid"/>
+          </a:ln>
         </p:spPr>
       </p:sp>
       <p:sp>
@@ -20747,86 +20916,47 @@
         </p:nvSpPr>
         <p:spPr>
           <a:xfrm>
-            <a:off x="6519672" y="2258568"/>
-            <a:ext cx="1828800" cy="292608"/>
-          </a:xfrm>
-          <a:prstGeom prst="rect">
-            <a:avLst/>
-          </a:prstGeom>
-          <a:noFill/>
-          <a:ln/>
-        </p:spPr>
-        <p:txBody>
-          <a:bodyPr wrap="square" lIns="0" tIns="0" rIns="0" bIns="0" rtlCol="0" anchor="ctr"/>
-          <a:lstStyle/>
-          <a:p>
-            <a:pPr algn="ctr" indent="0" marL="0">
-              <a:buNone/>
-            </a:pPr>
-            <a:r>
-              <a:rPr lang="en-US" sz="1300" b="1" dirty="0">
-                <a:solidFill>
-                  <a:srgbClr val="9D174D"/>
+            <a:off x="365760" y="3273552"/>
+            <a:ext cx="1371600" cy="658368"/>
+          </a:xfrm>
+          <a:prstGeom prst="rect">
+            <a:avLst/>
+          </a:prstGeom>
+          <a:noFill/>
+          <a:ln/>
+        </p:spPr>
+        <p:txBody>
+          <a:bodyPr wrap="square" lIns="0" tIns="0" rIns="0" bIns="0" rtlCol="0" anchor="ctr"/>
+          <a:lstStyle/>
+          <a:p>
+            <a:pPr algn="ctr" indent="0" marL="0">
+              <a:buNone/>
+            </a:pPr>
+            <a:r>
+              <a:rPr lang="en-US" sz="1100" b="1" dirty="0">
+                <a:solidFill>
+                  <a:srgbClr val="475569"/>
                 </a:solidFill>
                 <a:latin typeface="Trebuchet MS" pitchFamily="34" charset="0"/>
                 <a:ea typeface="Trebuchet MS" pitchFamily="34" charset="-122"/>
                 <a:cs typeface="Trebuchet MS" pitchFamily="34" charset="-120"/>
               </a:rPr>
-              <a:t>y</a:t>
-            </a:r>
-            <a:endParaRPr lang="en-US" sz="1300" dirty="0"/>
-          </a:p>
-        </p:txBody>
-      </p:sp>
-      <p:sp>
-        <p:nvSpPr>
-          <p:cNvPr id="24" name="Text 22"/>
-          <p:cNvSpPr/>
-          <p:nvPr/>
-        </p:nvSpPr>
-        <p:spPr>
-          <a:xfrm>
-            <a:off x="6519672" y="2569464"/>
-            <a:ext cx="1828800" cy="201168"/>
-          </a:xfrm>
-          <a:prstGeom prst="rect">
-            <a:avLst/>
-          </a:prstGeom>
-          <a:noFill/>
-          <a:ln/>
-        </p:spPr>
-        <p:txBody>
-          <a:bodyPr wrap="square" lIns="0" tIns="0" rIns="0" bIns="0" rtlCol="0" anchor="t"/>
-          <a:lstStyle/>
-          <a:p>
-            <a:pPr algn="ctr" indent="0" marL="0">
-              <a:buNone/>
-            </a:pPr>
-            <a:r>
-              <a:rPr lang="en-US" sz="850" dirty="0">
-                <a:solidFill>
-                  <a:srgbClr val="475569"/>
-                </a:solidFill>
-                <a:latin typeface="Calibri" pitchFamily="34" charset="0"/>
-                <a:ea typeface="Calibri" pitchFamily="34" charset="-122"/>
-                <a:cs typeface="Calibri" pitchFamily="34" charset="-120"/>
-              </a:rPr>
-              <a:t>forms a verb</a:t>
-            </a:r>
-            <a:endParaRPr lang="en-US" sz="850" dirty="0"/>
-          </a:p>
-        </p:txBody>
-      </p:sp>
-      <p:sp>
-        <p:nvSpPr>
-          <p:cNvPr id="25" name="Shape 23"/>
-          <p:cNvSpPr/>
-          <p:nvPr/>
-        </p:nvSpPr>
-        <p:spPr>
-          <a:xfrm>
-            <a:off x="365760" y="3273552"/>
-            <a:ext cx="1371600" cy="658368"/>
+              <a:t>Syllables</a:t>
+            </a:r>
+            <a:endParaRPr lang="en-US" sz="1100" dirty="0"/>
+          </a:p>
+        </p:txBody>
+      </p:sp>
+      <p:sp>
+        <p:nvSpPr>
+          <p:cNvPr id="24" name="Shape 22"/>
+          <p:cNvSpPr/>
+          <p:nvPr/>
+        </p:nvSpPr>
+        <p:spPr>
+          <a:xfrm>
+            <a:off x="1874520" y="3273552"/>
+            <a:ext cx="6903720" cy="658368"/>
           </a:xfrm>
           <a:prstGeom prst="rect">
             <a:avLst>
@@ -20834,11 +20964,38 @@
             </a:avLst>
           </a:prstGeom>
           <a:solidFill>
-            <a:srgbClr val="E2E8F0"/>
-          </a:solidFill>
-          <a:ln w="12700">
-            <a:solidFill>
-              <a:srgbClr val="E2E8F0"/>
+            <a:srgbClr val="CCFBF1"/>
+          </a:solidFill>
+          <a:ln w="12700">
+            <a:solidFill>
+              <a:srgbClr val="0D9488"/>
+            </a:solidFill>
+            <a:prstDash val="solid"/>
+          </a:ln>
+        </p:spPr>
+      </p:sp>
+      <p:sp>
+        <p:nvSpPr>
+          <p:cNvPr id="25" name="Shape 23"/>
+          <p:cNvSpPr/>
+          <p:nvPr/>
+        </p:nvSpPr>
+        <p:spPr>
+          <a:xfrm>
+            <a:off x="2999232" y="3364992"/>
+            <a:ext cx="1645920" cy="475488"/>
+          </a:xfrm>
+          <a:prstGeom prst="rect">
+            <a:avLst>
+              <a:gd name="adj" fmla="val 9615"/>
+            </a:avLst>
+          </a:prstGeom>
+          <a:solidFill>
+            <a:srgbClr val="FFFFFF"/>
+          </a:solidFill>
+          <a:ln w="12700">
+            <a:solidFill>
+              <a:srgbClr val="0D9488"/>
             </a:solidFill>
             <a:prstDash val="solid"/>
           </a:ln>
@@ -20852,63 +21009,75 @@
         </p:nvSpPr>
         <p:spPr>
           <a:xfrm>
-            <a:off x="365760" y="3273552"/>
-            <a:ext cx="1371600" cy="658368"/>
-          </a:xfrm>
-          <a:prstGeom prst="rect">
-            <a:avLst/>
-          </a:prstGeom>
-          <a:noFill/>
-          <a:ln/>
-        </p:spPr>
-        <p:txBody>
-          <a:bodyPr wrap="square" lIns="0" tIns="0" rIns="0" bIns="0" rtlCol="0" anchor="ctr"/>
-          <a:lstStyle/>
-          <a:p>
-            <a:pPr algn="ctr" indent="0" marL="0">
-              <a:buNone/>
-            </a:pPr>
-            <a:r>
-              <a:rPr lang="en-US" sz="1100" b="1" dirty="0">
-                <a:solidFill>
-                  <a:srgbClr val="475569"/>
+            <a:off x="2999232" y="3364992"/>
+            <a:ext cx="1645920" cy="475488"/>
+          </a:xfrm>
+          <a:prstGeom prst="rect">
+            <a:avLst/>
+          </a:prstGeom>
+          <a:noFill/>
+          <a:ln/>
+        </p:spPr>
+        <p:txBody>
+          <a:bodyPr wrap="square" lIns="0" tIns="0" rIns="0" bIns="0" rtlCol="0" anchor="ctr"/>
+          <a:lstStyle/>
+          <a:p>
+            <a:pPr algn="ctr" indent="0" marL="0">
+              <a:buNone/>
+            </a:pPr>
+            <a:r>
+              <a:rPr lang="en-US" sz="1400" b="1" dirty="0">
+                <a:solidFill>
+                  <a:srgbClr val="0D9488"/>
                 </a:solidFill>
                 <a:latin typeface="Trebuchet MS" pitchFamily="34" charset="0"/>
                 <a:ea typeface="Trebuchet MS" pitchFamily="34" charset="-122"/>
                 <a:cs typeface="Trebuchet MS" pitchFamily="34" charset="-120"/>
               </a:rPr>
-              <a:t>Syllables</a:t>
-            </a:r>
-            <a:endParaRPr lang="en-US" sz="1100" dirty="0"/>
-          </a:p>
-        </p:txBody>
-      </p:sp>
-      <p:sp>
-        <p:nvSpPr>
-          <p:cNvPr id="27" name="Shape 25"/>
-          <p:cNvSpPr/>
-          <p:nvPr/>
-        </p:nvSpPr>
-        <p:spPr>
-          <a:xfrm>
-            <a:off x="1874520" y="3273552"/>
-            <a:ext cx="6903720" cy="658368"/>
-          </a:xfrm>
-          <a:prstGeom prst="rect">
-            <a:avLst>
-              <a:gd name="adj" fmla="val 8333"/>
-            </a:avLst>
-          </a:prstGeom>
-          <a:solidFill>
-            <a:srgbClr val="CCFBF1"/>
-          </a:solidFill>
-          <a:ln w="12700">
-            <a:solidFill>
-              <a:srgbClr val="0D9488"/>
-            </a:solidFill>
-            <a:prstDash val="solid"/>
-          </a:ln>
-        </p:spPr>
+              <a:t>em</a:t>
+            </a:r>
+            <a:endParaRPr lang="en-US" sz="1400" dirty="0"/>
+          </a:p>
+        </p:txBody>
+      </p:sp>
+      <p:sp>
+        <p:nvSpPr>
+          <p:cNvPr id="27" name="Text 25"/>
+          <p:cNvSpPr/>
+          <p:nvPr/>
+        </p:nvSpPr>
+        <p:spPr>
+          <a:xfrm>
+            <a:off x="4645152" y="3364992"/>
+            <a:ext cx="1097280" cy="475488"/>
+          </a:xfrm>
+          <a:prstGeom prst="rect">
+            <a:avLst/>
+          </a:prstGeom>
+          <a:noFill/>
+          <a:ln/>
+        </p:spPr>
+        <p:txBody>
+          <a:bodyPr wrap="square" lIns="0" tIns="0" rIns="0" bIns="0" rtlCol="0" anchor="ctr"/>
+          <a:lstStyle/>
+          <a:p>
+            <a:pPr algn="ctr" indent="0" marL="0">
+              <a:buNone/>
+            </a:pPr>
+            <a:r>
+              <a:rPr lang="en-US" sz="1600" b="1" dirty="0">
+                <a:solidFill>
+                  <a:srgbClr val="0D9488"/>
+                </a:solidFill>
+                <a:latin typeface="Trebuchet MS" pitchFamily="34" charset="0"/>
+                <a:ea typeface="Trebuchet MS" pitchFamily="34" charset="-122"/>
+                <a:cs typeface="Trebuchet MS" pitchFamily="34" charset="-120"/>
+              </a:rPr>
+              <a:t>·</a:t>
+            </a:r>
+            <a:endParaRPr lang="en-US" sz="1600" dirty="0"/>
+          </a:p>
+        </p:txBody>
       </p:sp>
       <p:sp>
         <p:nvSpPr>
@@ -20918,7 +21087,7 @@
         </p:nvSpPr>
         <p:spPr>
           <a:xfrm>
-            <a:off x="2313432" y="3364992"/>
+            <a:off x="5742432" y="3364992"/>
             <a:ext cx="1645920" cy="475488"/>
           </a:xfrm>
           <a:prstGeom prst="rect">
@@ -20945,7 +21114,7 @@
         </p:nvSpPr>
         <p:spPr>
           <a:xfrm>
-            <a:off x="2313432" y="3364992"/>
+            <a:off x="5742432" y="3364992"/>
             <a:ext cx="1645920" cy="475488"/>
           </a:xfrm>
           <a:prstGeom prst="rect">
@@ -20970,7 +21139,7 @@
                 <a:ea typeface="Trebuchet MS" pitchFamily="34" charset="-122"/>
                 <a:cs typeface="Trebuchet MS" pitchFamily="34" charset="-120"/>
               </a:rPr>
-              <a:t>em</a:t>
+              <a:t>bark</a:t>
             </a:r>
             <a:endParaRPr lang="en-US" sz="1400" dirty="0"/>
           </a:p>
@@ -20978,224 +21147,80 @@
       </p:sp>
       <p:sp>
         <p:nvSpPr>
-          <p:cNvPr id="30" name="Text 28"/>
-          <p:cNvSpPr/>
-          <p:nvPr/>
-        </p:nvSpPr>
-        <p:spPr>
-          <a:xfrm>
-            <a:off x="3959352" y="3364992"/>
-            <a:ext cx="411480" cy="475488"/>
-          </a:xfrm>
-          <a:prstGeom prst="rect">
-            <a:avLst/>
-          </a:prstGeom>
-          <a:noFill/>
-          <a:ln/>
-        </p:spPr>
-        <p:txBody>
-          <a:bodyPr wrap="square" lIns="0" tIns="0" rIns="0" bIns="0" rtlCol="0" anchor="ctr"/>
-          <a:lstStyle/>
-          <a:p>
-            <a:pPr algn="ctr" indent="0" marL="0">
-              <a:buNone/>
-            </a:pPr>
-            <a:r>
-              <a:rPr lang="en-US" sz="1600" b="1" dirty="0">
-                <a:solidFill>
-                  <a:srgbClr val="0D9488"/>
+          <p:cNvPr id="30" name="Shape 28"/>
+          <p:cNvSpPr/>
+          <p:nvPr/>
+        </p:nvSpPr>
+        <p:spPr>
+          <a:xfrm>
+            <a:off x="365760" y="4096512"/>
+            <a:ext cx="1371600" cy="804672"/>
+          </a:xfrm>
+          <a:prstGeom prst="rect">
+            <a:avLst>
+              <a:gd name="adj" fmla="val 6818"/>
+            </a:avLst>
+          </a:prstGeom>
+          <a:solidFill>
+            <a:srgbClr val="E2E8F0"/>
+          </a:solidFill>
+          <a:ln w="12700">
+            <a:solidFill>
+              <a:srgbClr val="E2E8F0"/>
+            </a:solidFill>
+            <a:prstDash val="solid"/>
+          </a:ln>
+        </p:spPr>
+      </p:sp>
+      <p:sp>
+        <p:nvSpPr>
+          <p:cNvPr id="31" name="Text 29"/>
+          <p:cNvSpPr/>
+          <p:nvPr/>
+        </p:nvSpPr>
+        <p:spPr>
+          <a:xfrm>
+            <a:off x="365760" y="4096512"/>
+            <a:ext cx="1371600" cy="804672"/>
+          </a:xfrm>
+          <a:prstGeom prst="rect">
+            <a:avLst/>
+          </a:prstGeom>
+          <a:noFill/>
+          <a:ln/>
+        </p:spPr>
+        <p:txBody>
+          <a:bodyPr wrap="square" lIns="0" tIns="0" rIns="0" bIns="0" rtlCol="0" anchor="ctr"/>
+          <a:lstStyle/>
+          <a:p>
+            <a:pPr algn="ctr" indent="0" marL="0">
+              <a:buNone/>
+            </a:pPr>
+            <a:r>
+              <a:rPr lang="en-US" sz="1100" b="1" dirty="0">
+                <a:solidFill>
+                  <a:srgbClr val="475569"/>
                 </a:solidFill>
                 <a:latin typeface="Trebuchet MS" pitchFamily="34" charset="0"/>
                 <a:ea typeface="Trebuchet MS" pitchFamily="34" charset="-122"/>
                 <a:cs typeface="Trebuchet MS" pitchFamily="34" charset="-120"/>
               </a:rPr>
-              <a:t>·</a:t>
-            </a:r>
-            <a:endParaRPr lang="en-US" sz="1600" dirty="0"/>
-          </a:p>
-        </p:txBody>
-      </p:sp>
-      <p:sp>
-        <p:nvSpPr>
-          <p:cNvPr id="31" name="Shape 29"/>
-          <p:cNvSpPr/>
-          <p:nvPr/>
-        </p:nvSpPr>
-        <p:spPr>
-          <a:xfrm>
-            <a:off x="4370832" y="3364992"/>
-            <a:ext cx="1645920" cy="475488"/>
-          </a:xfrm>
-          <a:prstGeom prst="rect">
-            <a:avLst>
-              <a:gd name="adj" fmla="val 9615"/>
-            </a:avLst>
-          </a:prstGeom>
-          <a:solidFill>
-            <a:srgbClr val="FFFFFF"/>
-          </a:solidFill>
-          <a:ln w="12700">
-            <a:solidFill>
-              <a:srgbClr val="0D9488"/>
-            </a:solidFill>
-            <a:prstDash val="solid"/>
-          </a:ln>
-        </p:spPr>
-      </p:sp>
-      <p:sp>
-        <p:nvSpPr>
-          <p:cNvPr id="32" name="Text 30"/>
-          <p:cNvSpPr/>
-          <p:nvPr/>
-        </p:nvSpPr>
-        <p:spPr>
-          <a:xfrm>
-            <a:off x="4370832" y="3364992"/>
-            <a:ext cx="1645920" cy="475488"/>
-          </a:xfrm>
-          <a:prstGeom prst="rect">
-            <a:avLst/>
-          </a:prstGeom>
-          <a:noFill/>
-          <a:ln/>
-        </p:spPr>
-        <p:txBody>
-          <a:bodyPr wrap="square" lIns="0" tIns="0" rIns="0" bIns="0" rtlCol="0" anchor="ctr"/>
-          <a:lstStyle/>
-          <a:p>
-            <a:pPr algn="ctr" indent="0" marL="0">
-              <a:buNone/>
-            </a:pPr>
-            <a:r>
-              <a:rPr lang="en-US" sz="1400" b="1" dirty="0">
-                <a:solidFill>
-                  <a:srgbClr val="0D9488"/>
-                </a:solidFill>
-                <a:latin typeface="Trebuchet MS" pitchFamily="34" charset="0"/>
-                <a:ea typeface="Trebuchet MS" pitchFamily="34" charset="-122"/>
-                <a:cs typeface="Trebuchet MS" pitchFamily="34" charset="-120"/>
-              </a:rPr>
-              <a:t>bod</a:t>
-            </a:r>
-            <a:endParaRPr lang="en-US" sz="1400" dirty="0"/>
-          </a:p>
-        </p:txBody>
-      </p:sp>
-      <p:sp>
-        <p:nvSpPr>
-          <p:cNvPr id="33" name="Text 31"/>
-          <p:cNvSpPr/>
-          <p:nvPr/>
-        </p:nvSpPr>
-        <p:spPr>
-          <a:xfrm>
-            <a:off x="6016752" y="3364992"/>
-            <a:ext cx="411480" cy="475488"/>
-          </a:xfrm>
-          <a:prstGeom prst="rect">
-            <a:avLst/>
-          </a:prstGeom>
-          <a:noFill/>
-          <a:ln/>
-        </p:spPr>
-        <p:txBody>
-          <a:bodyPr wrap="square" lIns="0" tIns="0" rIns="0" bIns="0" rtlCol="0" anchor="ctr"/>
-          <a:lstStyle/>
-          <a:p>
-            <a:pPr algn="ctr" indent="0" marL="0">
-              <a:buNone/>
-            </a:pPr>
-            <a:r>
-              <a:rPr lang="en-US" sz="1600" b="1" dirty="0">
-                <a:solidFill>
-                  <a:srgbClr val="0D9488"/>
-                </a:solidFill>
-                <a:latin typeface="Trebuchet MS" pitchFamily="34" charset="0"/>
-                <a:ea typeface="Trebuchet MS" pitchFamily="34" charset="-122"/>
-                <a:cs typeface="Trebuchet MS" pitchFamily="34" charset="-120"/>
-              </a:rPr>
-              <a:t>·</a:t>
-            </a:r>
-            <a:endParaRPr lang="en-US" sz="1600" dirty="0"/>
-          </a:p>
-        </p:txBody>
-      </p:sp>
-      <p:sp>
-        <p:nvSpPr>
-          <p:cNvPr id="34" name="Shape 32"/>
-          <p:cNvSpPr/>
-          <p:nvPr/>
-        </p:nvSpPr>
-        <p:spPr>
-          <a:xfrm>
-            <a:off x="6428232" y="3364992"/>
-            <a:ext cx="1645920" cy="475488"/>
-          </a:xfrm>
-          <a:prstGeom prst="rect">
-            <a:avLst>
-              <a:gd name="adj" fmla="val 9615"/>
-            </a:avLst>
-          </a:prstGeom>
-          <a:solidFill>
-            <a:srgbClr val="FFFFFF"/>
-          </a:solidFill>
-          <a:ln w="12700">
-            <a:solidFill>
-              <a:srgbClr val="0D9488"/>
-            </a:solidFill>
-            <a:prstDash val="solid"/>
-          </a:ln>
-        </p:spPr>
-      </p:sp>
-      <p:sp>
-        <p:nvSpPr>
-          <p:cNvPr id="35" name="Text 33"/>
-          <p:cNvSpPr/>
-          <p:nvPr/>
-        </p:nvSpPr>
-        <p:spPr>
-          <a:xfrm>
-            <a:off x="6428232" y="3364992"/>
-            <a:ext cx="1645920" cy="475488"/>
-          </a:xfrm>
-          <a:prstGeom prst="rect">
-            <a:avLst/>
-          </a:prstGeom>
-          <a:noFill/>
-          <a:ln/>
-        </p:spPr>
-        <p:txBody>
-          <a:bodyPr wrap="square" lIns="0" tIns="0" rIns="0" bIns="0" rtlCol="0" anchor="ctr"/>
-          <a:lstStyle/>
-          <a:p>
-            <a:pPr algn="ctr" indent="0" marL="0">
-              <a:buNone/>
-            </a:pPr>
-            <a:r>
-              <a:rPr lang="en-US" sz="1400" b="1" dirty="0">
-                <a:solidFill>
-                  <a:srgbClr val="0D9488"/>
-                </a:solidFill>
-                <a:latin typeface="Trebuchet MS" pitchFamily="34" charset="0"/>
-                <a:ea typeface="Trebuchet MS" pitchFamily="34" charset="-122"/>
-                <a:cs typeface="Trebuchet MS" pitchFamily="34" charset="-120"/>
-              </a:rPr>
-              <a:t>y</a:t>
-            </a:r>
-            <a:endParaRPr lang="en-US" sz="1400" dirty="0"/>
-          </a:p>
-        </p:txBody>
-      </p:sp>
-      <p:sp>
-        <p:nvSpPr>
-          <p:cNvPr id="36" name="Shape 34"/>
-          <p:cNvSpPr/>
-          <p:nvPr/>
-        </p:nvSpPr>
-        <p:spPr>
-          <a:xfrm>
-            <a:off x="365760" y="4096512"/>
-            <a:ext cx="1371600" cy="804672"/>
+              <a:t>Phonemes</a:t>
+            </a:r>
+            <a:endParaRPr lang="en-US" sz="1100" dirty="0"/>
+          </a:p>
+        </p:txBody>
+      </p:sp>
+      <p:sp>
+        <p:nvSpPr>
+          <p:cNvPr id="32" name="Shape 30"/>
+          <p:cNvSpPr/>
+          <p:nvPr/>
+        </p:nvSpPr>
+        <p:spPr>
+          <a:xfrm>
+            <a:off x="1874520" y="4096512"/>
+            <a:ext cx="6903720" cy="804672"/>
           </a:xfrm>
           <a:prstGeom prst="rect">
             <a:avLst>
@@ -21203,85 +21228,19 @@
             </a:avLst>
           </a:prstGeom>
           <a:solidFill>
-            <a:srgbClr val="E2E8F0"/>
+            <a:srgbClr val="F8FAFC"/>
           </a:solidFill>
           <a:ln w="12700">
             <a:solidFill>
               <a:srgbClr val="E2E8F0"/>
             </a:solidFill>
-            <a:prstDash val="solid"/>
-          </a:ln>
-        </p:spPr>
-      </p:sp>
-      <p:sp>
-        <p:nvSpPr>
-          <p:cNvPr id="37" name="Text 35"/>
-          <p:cNvSpPr/>
-          <p:nvPr/>
-        </p:nvSpPr>
-        <p:spPr>
-          <a:xfrm>
-            <a:off x="365760" y="4096512"/>
-            <a:ext cx="1371600" cy="804672"/>
-          </a:xfrm>
-          <a:prstGeom prst="rect">
-            <a:avLst/>
-          </a:prstGeom>
-          <a:noFill/>
-          <a:ln/>
-        </p:spPr>
-        <p:txBody>
-          <a:bodyPr wrap="square" lIns="0" tIns="0" rIns="0" bIns="0" rtlCol="0" anchor="ctr"/>
-          <a:lstStyle/>
-          <a:p>
-            <a:pPr algn="ctr" indent="0" marL="0">
-              <a:buNone/>
-            </a:pPr>
-            <a:r>
-              <a:rPr lang="en-US" sz="1100" b="1" dirty="0">
-                <a:solidFill>
-                  <a:srgbClr val="475569"/>
-                </a:solidFill>
-                <a:latin typeface="Trebuchet MS" pitchFamily="34" charset="0"/>
-                <a:ea typeface="Trebuchet MS" pitchFamily="34" charset="-122"/>
-                <a:cs typeface="Trebuchet MS" pitchFamily="34" charset="-120"/>
-              </a:rPr>
-              <a:t>Phonemes</a:t>
-            </a:r>
-            <a:endParaRPr lang="en-US" sz="1100" dirty="0"/>
-          </a:p>
-        </p:txBody>
-      </p:sp>
-      <p:sp>
-        <p:nvSpPr>
-          <p:cNvPr id="38" name="Shape 36"/>
-          <p:cNvSpPr/>
-          <p:nvPr/>
-        </p:nvSpPr>
-        <p:spPr>
-          <a:xfrm>
-            <a:off x="1874520" y="4096512"/>
-            <a:ext cx="6903720" cy="804672"/>
-          </a:xfrm>
-          <a:prstGeom prst="rect">
-            <a:avLst>
-              <a:gd name="adj" fmla="val 6818"/>
-            </a:avLst>
-          </a:prstGeom>
-          <a:solidFill>
-            <a:srgbClr val="F8FAFC"/>
-          </a:solidFill>
-          <a:ln w="12700">
-            <a:solidFill>
-              <a:srgbClr val="E2E8F0"/>
-            </a:solidFill>
             <a:prstDash val="dash"/>
           </a:ln>
         </p:spPr>
       </p:sp>
       <p:sp>
         <p:nvSpPr>
-          <p:cNvPr id="39" name="Text 37"/>
+          <p:cNvPr id="33" name="Text 31"/>
           <p:cNvSpPr/>
           <p:nvPr/>
         </p:nvSpPr>
@@ -21604,7 +21563,7 @@
                 <a:ea typeface="Calibri" pitchFamily="34" charset="-122"/>
                 <a:cs typeface="Calibri" pitchFamily="34" charset="-120"/>
               </a:rPr>
-              <a:t>Word Labs  •  wordlabs.app  •  Prefix: 'em-' = put into, make</a:t>
+              <a:t>Word Labs  •  wordlabs.app  •  Prefix: 'em-' = put into, cause to be</a:t>
             </a:r>
             <a:endParaRPr lang="en-US" sz="800" dirty="0"/>
           </a:p>
@@ -21743,7 +21702,7 @@
                 <a:ea typeface="Trebuchet MS" pitchFamily="34" charset="-122"/>
                 <a:cs typeface="Trebuchet MS" pitchFamily="34" charset="-120"/>
               </a:rPr>
-              <a:t>embody</a:t>
+              <a:t>embark</a:t>
             </a:r>
             <a:endParaRPr lang="en-US" sz="2800" dirty="0"/>
           </a:p>
@@ -21823,7 +21782,7 @@
         </p:nvSpPr>
         <p:spPr>
           <a:xfrm>
-            <a:off x="2221992" y="2258568"/>
+            <a:off x="2938272" y="2258568"/>
             <a:ext cx="1828800" cy="292608"/>
           </a:xfrm>
           <a:prstGeom prst="rect">
@@ -21857,7 +21816,7 @@
         </p:nvSpPr>
         <p:spPr>
           <a:xfrm>
-            <a:off x="2221992" y="2258568"/>
+            <a:off x="2938272" y="2258568"/>
             <a:ext cx="1828800" cy="292608"/>
           </a:xfrm>
           <a:prstGeom prst="rect">
@@ -21896,7 +21855,7 @@
         </p:nvSpPr>
         <p:spPr>
           <a:xfrm>
-            <a:off x="2221992" y="2569464"/>
+            <a:off x="2938272" y="2569464"/>
             <a:ext cx="1828800" cy="201168"/>
           </a:xfrm>
           <a:prstGeom prst="rect">
@@ -21921,7 +21880,7 @@
                 <a:ea typeface="Calibri" pitchFamily="34" charset="-122"/>
                 <a:cs typeface="Calibri" pitchFamily="34" charset="-120"/>
               </a:rPr>
-              <a:t>put into, make</a:t>
+              <a:t>put into, cause to be</a:t>
             </a:r>
             <a:endParaRPr lang="en-US" sz="850" dirty="0"/>
           </a:p>
@@ -21935,7 +21894,7 @@
         </p:nvSpPr>
         <p:spPr>
           <a:xfrm>
-            <a:off x="4370832" y="2258568"/>
+            <a:off x="5803392" y="2258568"/>
             <a:ext cx="1828800" cy="292608"/>
           </a:xfrm>
           <a:prstGeom prst="rect">
@@ -21969,7 +21928,7 @@
         </p:nvSpPr>
         <p:spPr>
           <a:xfrm>
-            <a:off x="4370832" y="2258568"/>
+            <a:off x="5803392" y="2258568"/>
             <a:ext cx="1828800" cy="292608"/>
           </a:xfrm>
           <a:prstGeom prst="rect">
@@ -21994,7 +21953,7 @@
                 <a:ea typeface="Trebuchet MS" pitchFamily="34" charset="-122"/>
                 <a:cs typeface="Trebuchet MS" pitchFamily="34" charset="-120"/>
               </a:rPr>
-              <a:t>bodi</a:t>
+              <a:t>bark</a:t>
             </a:r>
             <a:endParaRPr lang="en-US" sz="1300" dirty="0"/>
           </a:p>
@@ -22008,7 +21967,7 @@
         </p:nvSpPr>
         <p:spPr>
           <a:xfrm>
-            <a:off x="4370832" y="2569464"/>
+            <a:off x="5803392" y="2569464"/>
             <a:ext cx="1828800" cy="201168"/>
           </a:xfrm>
           <a:prstGeom prst="rect">
@@ -22033,7 +21992,7 @@
                 <a:ea typeface="Calibri" pitchFamily="34" charset="-122"/>
                 <a:cs typeface="Calibri" pitchFamily="34" charset="-120"/>
               </a:rPr>
-              <a:t>physical form</a:t>
+              <a:t>a ship or vessel</a:t>
             </a:r>
             <a:endParaRPr lang="en-US" sz="850" dirty="0"/>
           </a:p>
@@ -22047,30 +22006,23 @@
         </p:nvSpPr>
         <p:spPr>
           <a:xfrm>
-            <a:off x="6519672" y="2258568"/>
-            <a:ext cx="1828800" cy="292608"/>
+            <a:off x="365760" y="3273552"/>
+            <a:ext cx="1371600" cy="658368"/>
           </a:xfrm>
           <a:prstGeom prst="rect">
             <a:avLst>
-              <a:gd name="adj" fmla="val 25000"/>
+              <a:gd name="adj" fmla="val 8333"/>
             </a:avLst>
           </a:prstGeom>
           <a:solidFill>
-            <a:srgbClr val="FCE7F3"/>
-          </a:solidFill>
-          <a:ln w="19050">
-            <a:solidFill>
-              <a:srgbClr val="DB2777"/>
-            </a:solidFill>
-            <a:prstDash val="solid"/>
-          </a:ln>
-          <a:effectLst>
-            <a:outerShdw sx="100000" sy="100000" kx="0" ky="0" algn="bl" rotWithShape="0" blurRad="101600" dist="38100" dir="8100000">
-              <a:srgbClr val="000000">
-                <a:alpha val="12000"/>
-              </a:srgbClr>
-            </a:outerShdw>
-          </a:effectLst>
+            <a:srgbClr val="E2E8F0"/>
+          </a:solidFill>
+          <a:ln w="12700">
+            <a:solidFill>
+              <a:srgbClr val="E2E8F0"/>
+            </a:solidFill>
+            <a:prstDash val="solid"/>
+          </a:ln>
         </p:spPr>
       </p:sp>
       <p:sp>
@@ -22081,86 +22033,47 @@
         </p:nvSpPr>
         <p:spPr>
           <a:xfrm>
-            <a:off x="6519672" y="2258568"/>
-            <a:ext cx="1828800" cy="292608"/>
-          </a:xfrm>
-          <a:prstGeom prst="rect">
-            <a:avLst/>
-          </a:prstGeom>
-          <a:noFill/>
-          <a:ln/>
-        </p:spPr>
-        <p:txBody>
-          <a:bodyPr wrap="square" lIns="0" tIns="0" rIns="0" bIns="0" rtlCol="0" anchor="ctr"/>
-          <a:lstStyle/>
-          <a:p>
-            <a:pPr algn="ctr" indent="0" marL="0">
-              <a:buNone/>
-            </a:pPr>
-            <a:r>
-              <a:rPr lang="en-US" sz="1300" b="1" dirty="0">
-                <a:solidFill>
-                  <a:srgbClr val="9D174D"/>
+            <a:off x="365760" y="3273552"/>
+            <a:ext cx="1371600" cy="658368"/>
+          </a:xfrm>
+          <a:prstGeom prst="rect">
+            <a:avLst/>
+          </a:prstGeom>
+          <a:noFill/>
+          <a:ln/>
+        </p:spPr>
+        <p:txBody>
+          <a:bodyPr wrap="square" lIns="0" tIns="0" rIns="0" bIns="0" rtlCol="0" anchor="ctr"/>
+          <a:lstStyle/>
+          <a:p>
+            <a:pPr algn="ctr" indent="0" marL="0">
+              <a:buNone/>
+            </a:pPr>
+            <a:r>
+              <a:rPr lang="en-US" sz="1100" b="1" dirty="0">
+                <a:solidFill>
+                  <a:srgbClr val="475569"/>
                 </a:solidFill>
                 <a:latin typeface="Trebuchet MS" pitchFamily="34" charset="0"/>
                 <a:ea typeface="Trebuchet MS" pitchFamily="34" charset="-122"/>
                 <a:cs typeface="Trebuchet MS" pitchFamily="34" charset="-120"/>
               </a:rPr>
-              <a:t>y</a:t>
-            </a:r>
-            <a:endParaRPr lang="en-US" sz="1300" dirty="0"/>
-          </a:p>
-        </p:txBody>
-      </p:sp>
-      <p:sp>
-        <p:nvSpPr>
-          <p:cNvPr id="24" name="Text 22"/>
-          <p:cNvSpPr/>
-          <p:nvPr/>
-        </p:nvSpPr>
-        <p:spPr>
-          <a:xfrm>
-            <a:off x="6519672" y="2569464"/>
-            <a:ext cx="1828800" cy="201168"/>
-          </a:xfrm>
-          <a:prstGeom prst="rect">
-            <a:avLst/>
-          </a:prstGeom>
-          <a:noFill/>
-          <a:ln/>
-        </p:spPr>
-        <p:txBody>
-          <a:bodyPr wrap="square" lIns="0" tIns="0" rIns="0" bIns="0" rtlCol="0" anchor="t"/>
-          <a:lstStyle/>
-          <a:p>
-            <a:pPr algn="ctr" indent="0" marL="0">
-              <a:buNone/>
-            </a:pPr>
-            <a:r>
-              <a:rPr lang="en-US" sz="850" dirty="0">
-                <a:solidFill>
-                  <a:srgbClr val="475569"/>
-                </a:solidFill>
-                <a:latin typeface="Calibri" pitchFamily="34" charset="0"/>
-                <a:ea typeface="Calibri" pitchFamily="34" charset="-122"/>
-                <a:cs typeface="Calibri" pitchFamily="34" charset="-120"/>
-              </a:rPr>
-              <a:t>forms a verb</a:t>
-            </a:r>
-            <a:endParaRPr lang="en-US" sz="850" dirty="0"/>
-          </a:p>
-        </p:txBody>
-      </p:sp>
-      <p:sp>
-        <p:nvSpPr>
-          <p:cNvPr id="25" name="Shape 23"/>
-          <p:cNvSpPr/>
-          <p:nvPr/>
-        </p:nvSpPr>
-        <p:spPr>
-          <a:xfrm>
-            <a:off x="365760" y="3273552"/>
-            <a:ext cx="1371600" cy="658368"/>
+              <a:t>Syllables</a:t>
+            </a:r>
+            <a:endParaRPr lang="en-US" sz="1100" dirty="0"/>
+          </a:p>
+        </p:txBody>
+      </p:sp>
+      <p:sp>
+        <p:nvSpPr>
+          <p:cNvPr id="24" name="Shape 22"/>
+          <p:cNvSpPr/>
+          <p:nvPr/>
+        </p:nvSpPr>
+        <p:spPr>
+          <a:xfrm>
+            <a:off x="1874520" y="3273552"/>
+            <a:ext cx="6903720" cy="658368"/>
           </a:xfrm>
           <a:prstGeom prst="rect">
             <a:avLst>
@@ -22168,11 +22081,38 @@
             </a:avLst>
           </a:prstGeom>
           <a:solidFill>
-            <a:srgbClr val="E2E8F0"/>
-          </a:solidFill>
-          <a:ln w="12700">
-            <a:solidFill>
-              <a:srgbClr val="E2E8F0"/>
+            <a:srgbClr val="CCFBF1"/>
+          </a:solidFill>
+          <a:ln w="12700">
+            <a:solidFill>
+              <a:srgbClr val="0D9488"/>
+            </a:solidFill>
+            <a:prstDash val="solid"/>
+          </a:ln>
+        </p:spPr>
+      </p:sp>
+      <p:sp>
+        <p:nvSpPr>
+          <p:cNvPr id="25" name="Shape 23"/>
+          <p:cNvSpPr/>
+          <p:nvPr/>
+        </p:nvSpPr>
+        <p:spPr>
+          <a:xfrm>
+            <a:off x="2999232" y="3364992"/>
+            <a:ext cx="1645920" cy="475488"/>
+          </a:xfrm>
+          <a:prstGeom prst="rect">
+            <a:avLst>
+              <a:gd name="adj" fmla="val 9615"/>
+            </a:avLst>
+          </a:prstGeom>
+          <a:solidFill>
+            <a:srgbClr val="FFFFFF"/>
+          </a:solidFill>
+          <a:ln w="12700">
+            <a:solidFill>
+              <a:srgbClr val="0D9488"/>
             </a:solidFill>
             <a:prstDash val="solid"/>
           </a:ln>
@@ -22186,32 +22126,203 @@
         </p:nvSpPr>
         <p:spPr>
           <a:xfrm>
-            <a:off x="365760" y="3273552"/>
-            <a:ext cx="1371600" cy="658368"/>
-          </a:xfrm>
-          <a:prstGeom prst="rect">
-            <a:avLst/>
-          </a:prstGeom>
-          <a:noFill/>
-          <a:ln/>
-        </p:spPr>
-        <p:txBody>
-          <a:bodyPr wrap="square" lIns="0" tIns="0" rIns="0" bIns="0" rtlCol="0" anchor="ctr"/>
-          <a:lstStyle/>
-          <a:p>
-            <a:pPr algn="ctr" indent="0" marL="0">
-              <a:buNone/>
-            </a:pPr>
-            <a:r>
-              <a:rPr lang="en-US" sz="1100" b="1" dirty="0">
-                <a:solidFill>
-                  <a:srgbClr val="475569"/>
+            <a:off x="2999232" y="3364992"/>
+            <a:ext cx="1645920" cy="475488"/>
+          </a:xfrm>
+          <a:prstGeom prst="rect">
+            <a:avLst/>
+          </a:prstGeom>
+          <a:noFill/>
+          <a:ln/>
+        </p:spPr>
+        <p:txBody>
+          <a:bodyPr wrap="square" lIns="0" tIns="0" rIns="0" bIns="0" rtlCol="0" anchor="ctr"/>
+          <a:lstStyle/>
+          <a:p>
+            <a:pPr algn="ctr" indent="0" marL="0">
+              <a:buNone/>
+            </a:pPr>
+            <a:r>
+              <a:rPr lang="en-US" sz="1400" b="1" dirty="0">
+                <a:solidFill>
+                  <a:srgbClr val="0D9488"/>
                 </a:solidFill>
                 <a:latin typeface="Trebuchet MS" pitchFamily="34" charset="0"/>
                 <a:ea typeface="Trebuchet MS" pitchFamily="34" charset="-122"/>
                 <a:cs typeface="Trebuchet MS" pitchFamily="34" charset="-120"/>
               </a:rPr>
-              <a:t>Syllables</a:t>
+              <a:t>em</a:t>
+            </a:r>
+            <a:endParaRPr lang="en-US" sz="1400" dirty="0"/>
+          </a:p>
+        </p:txBody>
+      </p:sp>
+      <p:sp>
+        <p:nvSpPr>
+          <p:cNvPr id="27" name="Text 25"/>
+          <p:cNvSpPr/>
+          <p:nvPr/>
+        </p:nvSpPr>
+        <p:spPr>
+          <a:xfrm>
+            <a:off x="4645152" y="3364992"/>
+            <a:ext cx="1097280" cy="475488"/>
+          </a:xfrm>
+          <a:prstGeom prst="rect">
+            <a:avLst/>
+          </a:prstGeom>
+          <a:noFill/>
+          <a:ln/>
+        </p:spPr>
+        <p:txBody>
+          <a:bodyPr wrap="square" lIns="0" tIns="0" rIns="0" bIns="0" rtlCol="0" anchor="ctr"/>
+          <a:lstStyle/>
+          <a:p>
+            <a:pPr algn="ctr" indent="0" marL="0">
+              <a:buNone/>
+            </a:pPr>
+            <a:r>
+              <a:rPr lang="en-US" sz="1600" b="1" dirty="0">
+                <a:solidFill>
+                  <a:srgbClr val="0D9488"/>
+                </a:solidFill>
+                <a:latin typeface="Trebuchet MS" pitchFamily="34" charset="0"/>
+                <a:ea typeface="Trebuchet MS" pitchFamily="34" charset="-122"/>
+                <a:cs typeface="Trebuchet MS" pitchFamily="34" charset="-120"/>
+              </a:rPr>
+              <a:t>·</a:t>
+            </a:r>
+            <a:endParaRPr lang="en-US" sz="1600" dirty="0"/>
+          </a:p>
+        </p:txBody>
+      </p:sp>
+      <p:sp>
+        <p:nvSpPr>
+          <p:cNvPr id="28" name="Shape 26"/>
+          <p:cNvSpPr/>
+          <p:nvPr/>
+        </p:nvSpPr>
+        <p:spPr>
+          <a:xfrm>
+            <a:off x="5742432" y="3364992"/>
+            <a:ext cx="1645920" cy="475488"/>
+          </a:xfrm>
+          <a:prstGeom prst="rect">
+            <a:avLst>
+              <a:gd name="adj" fmla="val 9615"/>
+            </a:avLst>
+          </a:prstGeom>
+          <a:solidFill>
+            <a:srgbClr val="FFFFFF"/>
+          </a:solidFill>
+          <a:ln w="12700">
+            <a:solidFill>
+              <a:srgbClr val="0D9488"/>
+            </a:solidFill>
+            <a:prstDash val="solid"/>
+          </a:ln>
+        </p:spPr>
+      </p:sp>
+      <p:sp>
+        <p:nvSpPr>
+          <p:cNvPr id="29" name="Text 27"/>
+          <p:cNvSpPr/>
+          <p:nvPr/>
+        </p:nvSpPr>
+        <p:spPr>
+          <a:xfrm>
+            <a:off x="5742432" y="3364992"/>
+            <a:ext cx="1645920" cy="475488"/>
+          </a:xfrm>
+          <a:prstGeom prst="rect">
+            <a:avLst/>
+          </a:prstGeom>
+          <a:noFill/>
+          <a:ln/>
+        </p:spPr>
+        <p:txBody>
+          <a:bodyPr wrap="square" lIns="0" tIns="0" rIns="0" bIns="0" rtlCol="0" anchor="ctr"/>
+          <a:lstStyle/>
+          <a:p>
+            <a:pPr algn="ctr" indent="0" marL="0">
+              <a:buNone/>
+            </a:pPr>
+            <a:r>
+              <a:rPr lang="en-US" sz="1400" b="1" dirty="0">
+                <a:solidFill>
+                  <a:srgbClr val="0D9488"/>
+                </a:solidFill>
+                <a:latin typeface="Trebuchet MS" pitchFamily="34" charset="0"/>
+                <a:ea typeface="Trebuchet MS" pitchFamily="34" charset="-122"/>
+                <a:cs typeface="Trebuchet MS" pitchFamily="34" charset="-120"/>
+              </a:rPr>
+              <a:t>bark</a:t>
+            </a:r>
+            <a:endParaRPr lang="en-US" sz="1400" dirty="0"/>
+          </a:p>
+        </p:txBody>
+      </p:sp>
+      <p:sp>
+        <p:nvSpPr>
+          <p:cNvPr id="30" name="Shape 28"/>
+          <p:cNvSpPr/>
+          <p:nvPr/>
+        </p:nvSpPr>
+        <p:spPr>
+          <a:xfrm>
+            <a:off x="365760" y="4096512"/>
+            <a:ext cx="1371600" cy="804672"/>
+          </a:xfrm>
+          <a:prstGeom prst="rect">
+            <a:avLst>
+              <a:gd name="adj" fmla="val 6818"/>
+            </a:avLst>
+          </a:prstGeom>
+          <a:solidFill>
+            <a:srgbClr val="E2E8F0"/>
+          </a:solidFill>
+          <a:ln w="12700">
+            <a:solidFill>
+              <a:srgbClr val="E2E8F0"/>
+            </a:solidFill>
+            <a:prstDash val="solid"/>
+          </a:ln>
+        </p:spPr>
+      </p:sp>
+      <p:sp>
+        <p:nvSpPr>
+          <p:cNvPr id="31" name="Text 29"/>
+          <p:cNvSpPr/>
+          <p:nvPr/>
+        </p:nvSpPr>
+        <p:spPr>
+          <a:xfrm>
+            <a:off x="365760" y="4096512"/>
+            <a:ext cx="1371600" cy="804672"/>
+          </a:xfrm>
+          <a:prstGeom prst="rect">
+            <a:avLst/>
+          </a:prstGeom>
+          <a:noFill/>
+          <a:ln/>
+        </p:spPr>
+        <p:txBody>
+          <a:bodyPr wrap="square" lIns="0" tIns="0" rIns="0" bIns="0" rtlCol="0" anchor="ctr"/>
+          <a:lstStyle/>
+          <a:p>
+            <a:pPr algn="ctr" indent="0" marL="0">
+              <a:buNone/>
+            </a:pPr>
+            <a:r>
+              <a:rPr lang="en-US" sz="1100" b="1" dirty="0">
+                <a:solidFill>
+                  <a:srgbClr val="475569"/>
+                </a:solidFill>
+                <a:latin typeface="Trebuchet MS" pitchFamily="34" charset="0"/>
+                <a:ea typeface="Trebuchet MS" pitchFamily="34" charset="-122"/>
+                <a:cs typeface="Trebuchet MS" pitchFamily="34" charset="-120"/>
+              </a:rPr>
+              <a:t>Phonemes</a:t>
             </a:r>
             <a:endParaRPr lang="en-US" sz="1100" dirty="0"/>
           </a:p>
@@ -22219,13 +22330,13 @@
       </p:sp>
       <p:sp>
         <p:nvSpPr>
-          <p:cNvPr id="27" name="Shape 25"/>
-          <p:cNvSpPr/>
-          <p:nvPr/>
-        </p:nvSpPr>
-        <p:spPr>
-          <a:xfrm>
-            <a:off x="1874520" y="3273552"/>
+          <p:cNvPr id="32" name="Shape 30"/>
+          <p:cNvSpPr/>
+          <p:nvPr/>
+        </p:nvSpPr>
+        <p:spPr>
+          <a:xfrm>
+            <a:off x="1874520" y="4096512"/>
             <a:ext cx="6903720" cy="658368"/>
           </a:xfrm>
           <a:prstGeom prst="rect">
@@ -22234,30 +22345,30 @@
             </a:avLst>
           </a:prstGeom>
           <a:solidFill>
-            <a:srgbClr val="CCFBF1"/>
-          </a:solidFill>
-          <a:ln w="12700">
-            <a:solidFill>
-              <a:srgbClr val="0D9488"/>
-            </a:solidFill>
-            <a:prstDash val="solid"/>
-          </a:ln>
-        </p:spPr>
-      </p:sp>
-      <p:sp>
-        <p:nvSpPr>
-          <p:cNvPr id="28" name="Shape 26"/>
-          <p:cNvSpPr/>
-          <p:nvPr/>
-        </p:nvSpPr>
-        <p:spPr>
-          <a:xfrm>
-            <a:off x="2313432" y="3364992"/>
-            <a:ext cx="1645920" cy="475488"/>
+            <a:srgbClr val="FCE7F3"/>
+          </a:solidFill>
+          <a:ln w="12700">
+            <a:solidFill>
+              <a:srgbClr val="DB2777"/>
+            </a:solidFill>
+            <a:prstDash val="solid"/>
+          </a:ln>
+        </p:spPr>
+      </p:sp>
+      <p:sp>
+        <p:nvSpPr>
+          <p:cNvPr id="33" name="Shape 31"/>
+          <p:cNvSpPr/>
+          <p:nvPr/>
+        </p:nvSpPr>
+        <p:spPr>
+          <a:xfrm>
+            <a:off x="2427732" y="4169664"/>
+            <a:ext cx="685800" cy="475488"/>
           </a:xfrm>
           <a:prstGeom prst="rect">
             <a:avLst>
-              <a:gd name="adj" fmla="val 9615"/>
+              <a:gd name="adj" fmla="val 7692"/>
             </a:avLst>
           </a:prstGeom>
           <a:solidFill>
@@ -22265,104 +22376,131 @@
           </a:solidFill>
           <a:ln w="12700">
             <a:solidFill>
-              <a:srgbClr val="0D9488"/>
-            </a:solidFill>
-            <a:prstDash val="solid"/>
-          </a:ln>
-        </p:spPr>
-      </p:sp>
-      <p:sp>
-        <p:nvSpPr>
-          <p:cNvPr id="29" name="Text 27"/>
-          <p:cNvSpPr/>
-          <p:nvPr/>
-        </p:nvSpPr>
-        <p:spPr>
-          <a:xfrm>
-            <a:off x="2313432" y="3364992"/>
-            <a:ext cx="1645920" cy="475488"/>
-          </a:xfrm>
-          <a:prstGeom prst="rect">
-            <a:avLst/>
-          </a:prstGeom>
-          <a:noFill/>
-          <a:ln/>
-        </p:spPr>
-        <p:txBody>
-          <a:bodyPr wrap="square" lIns="0" tIns="0" rIns="0" bIns="0" rtlCol="0" anchor="ctr"/>
-          <a:lstStyle/>
-          <a:p>
-            <a:pPr algn="ctr" indent="0" marL="0">
-              <a:buNone/>
-            </a:pPr>
-            <a:r>
-              <a:rPr lang="en-US" sz="1400" b="1" dirty="0">
-                <a:solidFill>
-                  <a:srgbClr val="0D9488"/>
+              <a:srgbClr val="DB2777"/>
+            </a:solidFill>
+            <a:prstDash val="solid"/>
+          </a:ln>
+        </p:spPr>
+      </p:sp>
+      <p:sp>
+        <p:nvSpPr>
+          <p:cNvPr id="34" name="Text 32"/>
+          <p:cNvSpPr/>
+          <p:nvPr/>
+        </p:nvSpPr>
+        <p:spPr>
+          <a:xfrm>
+            <a:off x="2427732" y="4169664"/>
+            <a:ext cx="685800" cy="475488"/>
+          </a:xfrm>
+          <a:prstGeom prst="rect">
+            <a:avLst/>
+          </a:prstGeom>
+          <a:noFill/>
+          <a:ln/>
+        </p:spPr>
+        <p:txBody>
+          <a:bodyPr wrap="square" lIns="0" tIns="0" rIns="0" bIns="0" rtlCol="0" anchor="ctr"/>
+          <a:lstStyle/>
+          <a:p>
+            <a:pPr algn="ctr" indent="0" marL="0">
+              <a:buNone/>
+            </a:pPr>
+            <a:r>
+              <a:rPr lang="en-US" sz="900" b="1" dirty="0">
+                <a:solidFill>
+                  <a:srgbClr val="9D174D"/>
                 </a:solidFill>
                 <a:latin typeface="Trebuchet MS" pitchFamily="34" charset="0"/>
                 <a:ea typeface="Trebuchet MS" pitchFamily="34" charset="-122"/>
                 <a:cs typeface="Trebuchet MS" pitchFamily="34" charset="-120"/>
               </a:rPr>
-              <a:t>em</a:t>
-            </a:r>
-            <a:endParaRPr lang="en-US" sz="1400" dirty="0"/>
-          </a:p>
-        </p:txBody>
-      </p:sp>
-      <p:sp>
-        <p:nvSpPr>
-          <p:cNvPr id="30" name="Text 28"/>
-          <p:cNvSpPr/>
-          <p:nvPr/>
-        </p:nvSpPr>
-        <p:spPr>
-          <a:xfrm>
-            <a:off x="3959352" y="3364992"/>
-            <a:ext cx="411480" cy="475488"/>
-          </a:xfrm>
-          <a:prstGeom prst="rect">
-            <a:avLst/>
-          </a:prstGeom>
-          <a:noFill/>
-          <a:ln/>
-        </p:spPr>
-        <p:txBody>
-          <a:bodyPr wrap="square" lIns="0" tIns="0" rIns="0" bIns="0" rtlCol="0" anchor="ctr"/>
-          <a:lstStyle/>
-          <a:p>
-            <a:pPr algn="ctr" indent="0" marL="0">
-              <a:buNone/>
-            </a:pPr>
-            <a:r>
-              <a:rPr lang="en-US" sz="1600" b="1" dirty="0">
-                <a:solidFill>
-                  <a:srgbClr val="0D9488"/>
+              <a:t>e</a:t>
+            </a:r>
+            <a:endParaRPr lang="en-US" sz="900" dirty="0"/>
+          </a:p>
+        </p:txBody>
+      </p:sp>
+      <p:sp>
+        <p:nvSpPr>
+          <p:cNvPr id="35" name="Shape 33"/>
+          <p:cNvSpPr/>
+          <p:nvPr/>
+        </p:nvSpPr>
+        <p:spPr>
+          <a:xfrm>
+            <a:off x="3639312" y="4169664"/>
+            <a:ext cx="685800" cy="475488"/>
+          </a:xfrm>
+          <a:prstGeom prst="rect">
+            <a:avLst>
+              <a:gd name="adj" fmla="val 7692"/>
+            </a:avLst>
+          </a:prstGeom>
+          <a:solidFill>
+            <a:srgbClr val="FFFFFF"/>
+          </a:solidFill>
+          <a:ln w="12700">
+            <a:solidFill>
+              <a:srgbClr val="DB2777"/>
+            </a:solidFill>
+            <a:prstDash val="solid"/>
+          </a:ln>
+        </p:spPr>
+      </p:sp>
+      <p:sp>
+        <p:nvSpPr>
+          <p:cNvPr id="36" name="Text 34"/>
+          <p:cNvSpPr/>
+          <p:nvPr/>
+        </p:nvSpPr>
+        <p:spPr>
+          <a:xfrm>
+            <a:off x="3639312" y="4169664"/>
+            <a:ext cx="685800" cy="475488"/>
+          </a:xfrm>
+          <a:prstGeom prst="rect">
+            <a:avLst/>
+          </a:prstGeom>
+          <a:noFill/>
+          <a:ln/>
+        </p:spPr>
+        <p:txBody>
+          <a:bodyPr wrap="square" lIns="0" tIns="0" rIns="0" bIns="0" rtlCol="0" anchor="ctr"/>
+          <a:lstStyle/>
+          <a:p>
+            <a:pPr algn="ctr" indent="0" marL="0">
+              <a:buNone/>
+            </a:pPr>
+            <a:r>
+              <a:rPr lang="en-US" sz="900" b="1" dirty="0">
+                <a:solidFill>
+                  <a:srgbClr val="9D174D"/>
                 </a:solidFill>
                 <a:latin typeface="Trebuchet MS" pitchFamily="34" charset="0"/>
                 <a:ea typeface="Trebuchet MS" pitchFamily="34" charset="-122"/>
                 <a:cs typeface="Trebuchet MS" pitchFamily="34" charset="-120"/>
               </a:rPr>
-              <a:t>·</a:t>
-            </a:r>
-            <a:endParaRPr lang="en-US" sz="1600" dirty="0"/>
-          </a:p>
-        </p:txBody>
-      </p:sp>
-      <p:sp>
-        <p:nvSpPr>
-          <p:cNvPr id="31" name="Shape 29"/>
-          <p:cNvSpPr/>
-          <p:nvPr/>
-        </p:nvSpPr>
-        <p:spPr>
-          <a:xfrm>
-            <a:off x="4370832" y="3364992"/>
-            <a:ext cx="1645920" cy="475488"/>
+              <a:t>m</a:t>
+            </a:r>
+            <a:endParaRPr lang="en-US" sz="900" dirty="0"/>
+          </a:p>
+        </p:txBody>
+      </p:sp>
+      <p:sp>
+        <p:nvSpPr>
+          <p:cNvPr id="37" name="Shape 35"/>
+          <p:cNvSpPr/>
+          <p:nvPr/>
+        </p:nvSpPr>
+        <p:spPr>
+          <a:xfrm>
+            <a:off x="4850892" y="4169664"/>
+            <a:ext cx="685800" cy="475488"/>
           </a:xfrm>
           <a:prstGeom prst="rect">
             <a:avLst>
-              <a:gd name="adj" fmla="val 9615"/>
+              <a:gd name="adj" fmla="val 7692"/>
             </a:avLst>
           </a:prstGeom>
           <a:solidFill>
@@ -22370,104 +22508,131 @@
           </a:solidFill>
           <a:ln w="12700">
             <a:solidFill>
-              <a:srgbClr val="0D9488"/>
-            </a:solidFill>
-            <a:prstDash val="solid"/>
-          </a:ln>
-        </p:spPr>
-      </p:sp>
-      <p:sp>
-        <p:nvSpPr>
-          <p:cNvPr id="32" name="Text 30"/>
-          <p:cNvSpPr/>
-          <p:nvPr/>
-        </p:nvSpPr>
-        <p:spPr>
-          <a:xfrm>
-            <a:off x="4370832" y="3364992"/>
-            <a:ext cx="1645920" cy="475488"/>
-          </a:xfrm>
-          <a:prstGeom prst="rect">
-            <a:avLst/>
-          </a:prstGeom>
-          <a:noFill/>
-          <a:ln/>
-        </p:spPr>
-        <p:txBody>
-          <a:bodyPr wrap="square" lIns="0" tIns="0" rIns="0" bIns="0" rtlCol="0" anchor="ctr"/>
-          <a:lstStyle/>
-          <a:p>
-            <a:pPr algn="ctr" indent="0" marL="0">
-              <a:buNone/>
-            </a:pPr>
-            <a:r>
-              <a:rPr lang="en-US" sz="1400" b="1" dirty="0">
-                <a:solidFill>
-                  <a:srgbClr val="0D9488"/>
+              <a:srgbClr val="DB2777"/>
+            </a:solidFill>
+            <a:prstDash val="solid"/>
+          </a:ln>
+        </p:spPr>
+      </p:sp>
+      <p:sp>
+        <p:nvSpPr>
+          <p:cNvPr id="38" name="Text 36"/>
+          <p:cNvSpPr/>
+          <p:nvPr/>
+        </p:nvSpPr>
+        <p:spPr>
+          <a:xfrm>
+            <a:off x="4850892" y="4169664"/>
+            <a:ext cx="685800" cy="475488"/>
+          </a:xfrm>
+          <a:prstGeom prst="rect">
+            <a:avLst/>
+          </a:prstGeom>
+          <a:noFill/>
+          <a:ln/>
+        </p:spPr>
+        <p:txBody>
+          <a:bodyPr wrap="square" lIns="0" tIns="0" rIns="0" bIns="0" rtlCol="0" anchor="ctr"/>
+          <a:lstStyle/>
+          <a:p>
+            <a:pPr algn="ctr" indent="0" marL="0">
+              <a:buNone/>
+            </a:pPr>
+            <a:r>
+              <a:rPr lang="en-US" sz="900" b="1" dirty="0">
+                <a:solidFill>
+                  <a:srgbClr val="9D174D"/>
                 </a:solidFill>
                 <a:latin typeface="Trebuchet MS" pitchFamily="34" charset="0"/>
                 <a:ea typeface="Trebuchet MS" pitchFamily="34" charset="-122"/>
                 <a:cs typeface="Trebuchet MS" pitchFamily="34" charset="-120"/>
               </a:rPr>
-              <a:t>bod</a:t>
-            </a:r>
-            <a:endParaRPr lang="en-US" sz="1400" dirty="0"/>
-          </a:p>
-        </p:txBody>
-      </p:sp>
-      <p:sp>
-        <p:nvSpPr>
-          <p:cNvPr id="33" name="Text 31"/>
-          <p:cNvSpPr/>
-          <p:nvPr/>
-        </p:nvSpPr>
-        <p:spPr>
-          <a:xfrm>
-            <a:off x="6016752" y="3364992"/>
-            <a:ext cx="411480" cy="475488"/>
-          </a:xfrm>
-          <a:prstGeom prst="rect">
-            <a:avLst/>
-          </a:prstGeom>
-          <a:noFill/>
-          <a:ln/>
-        </p:spPr>
-        <p:txBody>
-          <a:bodyPr wrap="square" lIns="0" tIns="0" rIns="0" bIns="0" rtlCol="0" anchor="ctr"/>
-          <a:lstStyle/>
-          <a:p>
-            <a:pPr algn="ctr" indent="0" marL="0">
-              <a:buNone/>
-            </a:pPr>
-            <a:r>
-              <a:rPr lang="en-US" sz="1600" b="1" dirty="0">
-                <a:solidFill>
-                  <a:srgbClr val="0D9488"/>
+              <a:t>b</a:t>
+            </a:r>
+            <a:endParaRPr lang="en-US" sz="900" dirty="0"/>
+          </a:p>
+        </p:txBody>
+      </p:sp>
+      <p:sp>
+        <p:nvSpPr>
+          <p:cNvPr id="39" name="Shape 37"/>
+          <p:cNvSpPr/>
+          <p:nvPr/>
+        </p:nvSpPr>
+        <p:spPr>
+          <a:xfrm>
+            <a:off x="6062472" y="4169664"/>
+            <a:ext cx="685800" cy="475488"/>
+          </a:xfrm>
+          <a:prstGeom prst="rect">
+            <a:avLst>
+              <a:gd name="adj" fmla="val 7692"/>
+            </a:avLst>
+          </a:prstGeom>
+          <a:solidFill>
+            <a:srgbClr val="FFFFFF"/>
+          </a:solidFill>
+          <a:ln w="12700">
+            <a:solidFill>
+              <a:srgbClr val="DB2777"/>
+            </a:solidFill>
+            <a:prstDash val="solid"/>
+          </a:ln>
+        </p:spPr>
+      </p:sp>
+      <p:sp>
+        <p:nvSpPr>
+          <p:cNvPr id="40" name="Text 38"/>
+          <p:cNvSpPr/>
+          <p:nvPr/>
+        </p:nvSpPr>
+        <p:spPr>
+          <a:xfrm>
+            <a:off x="6062472" y="4169664"/>
+            <a:ext cx="685800" cy="475488"/>
+          </a:xfrm>
+          <a:prstGeom prst="rect">
+            <a:avLst/>
+          </a:prstGeom>
+          <a:noFill/>
+          <a:ln/>
+        </p:spPr>
+        <p:txBody>
+          <a:bodyPr wrap="square" lIns="0" tIns="0" rIns="0" bIns="0" rtlCol="0" anchor="ctr"/>
+          <a:lstStyle/>
+          <a:p>
+            <a:pPr algn="ctr" indent="0" marL="0">
+              <a:buNone/>
+            </a:pPr>
+            <a:r>
+              <a:rPr lang="en-US" sz="900" b="1" dirty="0">
+                <a:solidFill>
+                  <a:srgbClr val="9D174D"/>
                 </a:solidFill>
                 <a:latin typeface="Trebuchet MS" pitchFamily="34" charset="0"/>
                 <a:ea typeface="Trebuchet MS" pitchFamily="34" charset="-122"/>
                 <a:cs typeface="Trebuchet MS" pitchFamily="34" charset="-120"/>
               </a:rPr>
-              <a:t>·</a:t>
-            </a:r>
-            <a:endParaRPr lang="en-US" sz="1600" dirty="0"/>
-          </a:p>
-        </p:txBody>
-      </p:sp>
-      <p:sp>
-        <p:nvSpPr>
-          <p:cNvPr id="34" name="Shape 32"/>
-          <p:cNvSpPr/>
-          <p:nvPr/>
-        </p:nvSpPr>
-        <p:spPr>
-          <a:xfrm>
-            <a:off x="6428232" y="3364992"/>
-            <a:ext cx="1645920" cy="475488"/>
+              <a:t>ar</a:t>
+            </a:r>
+            <a:endParaRPr lang="en-US" sz="900" dirty="0"/>
+          </a:p>
+        </p:txBody>
+      </p:sp>
+      <p:sp>
+        <p:nvSpPr>
+          <p:cNvPr id="41" name="Shape 39"/>
+          <p:cNvSpPr/>
+          <p:nvPr/>
+        </p:nvSpPr>
+        <p:spPr>
+          <a:xfrm>
+            <a:off x="7274052" y="4169664"/>
+            <a:ext cx="685800" cy="475488"/>
           </a:xfrm>
           <a:prstGeom prst="rect">
             <a:avLst>
-              <a:gd name="adj" fmla="val 9615"/>
+              <a:gd name="adj" fmla="val 7692"/>
             </a:avLst>
           </a:prstGeom>
           <a:solidFill>
@@ -22475,535 +22640,46 @@
           </a:solidFill>
           <a:ln w="12700">
             <a:solidFill>
-              <a:srgbClr val="0D9488"/>
-            </a:solidFill>
-            <a:prstDash val="solid"/>
-          </a:ln>
-        </p:spPr>
-      </p:sp>
-      <p:sp>
-        <p:nvSpPr>
-          <p:cNvPr id="35" name="Text 33"/>
-          <p:cNvSpPr/>
-          <p:nvPr/>
-        </p:nvSpPr>
-        <p:spPr>
-          <a:xfrm>
-            <a:off x="6428232" y="3364992"/>
-            <a:ext cx="1645920" cy="475488"/>
-          </a:xfrm>
-          <a:prstGeom prst="rect">
-            <a:avLst/>
-          </a:prstGeom>
-          <a:noFill/>
-          <a:ln/>
-        </p:spPr>
-        <p:txBody>
-          <a:bodyPr wrap="square" lIns="0" tIns="0" rIns="0" bIns="0" rtlCol="0" anchor="ctr"/>
-          <a:lstStyle/>
-          <a:p>
-            <a:pPr algn="ctr" indent="0" marL="0">
-              <a:buNone/>
-            </a:pPr>
-            <a:r>
-              <a:rPr lang="en-US" sz="1400" b="1" dirty="0">
-                <a:solidFill>
-                  <a:srgbClr val="0D9488"/>
+              <a:srgbClr val="DB2777"/>
+            </a:solidFill>
+            <a:prstDash val="solid"/>
+          </a:ln>
+        </p:spPr>
+      </p:sp>
+      <p:sp>
+        <p:nvSpPr>
+          <p:cNvPr id="42" name="Text 40"/>
+          <p:cNvSpPr/>
+          <p:nvPr/>
+        </p:nvSpPr>
+        <p:spPr>
+          <a:xfrm>
+            <a:off x="7274052" y="4169664"/>
+            <a:ext cx="685800" cy="475488"/>
+          </a:xfrm>
+          <a:prstGeom prst="rect">
+            <a:avLst/>
+          </a:prstGeom>
+          <a:noFill/>
+          <a:ln/>
+        </p:spPr>
+        <p:txBody>
+          <a:bodyPr wrap="square" lIns="0" tIns="0" rIns="0" bIns="0" rtlCol="0" anchor="ctr"/>
+          <a:lstStyle/>
+          <a:p>
+            <a:pPr algn="ctr" indent="0" marL="0">
+              <a:buNone/>
+            </a:pPr>
+            <a:r>
+              <a:rPr lang="en-US" sz="900" b="1" dirty="0">
+                <a:solidFill>
+                  <a:srgbClr val="9D174D"/>
                 </a:solidFill>
                 <a:latin typeface="Trebuchet MS" pitchFamily="34" charset="0"/>
                 <a:ea typeface="Trebuchet MS" pitchFamily="34" charset="-122"/>
                 <a:cs typeface="Trebuchet MS" pitchFamily="34" charset="-120"/>
               </a:rPr>
-              <a:t>y</a:t>
-            </a:r>
-            <a:endParaRPr lang="en-US" sz="1400" dirty="0"/>
-          </a:p>
-        </p:txBody>
-      </p:sp>
-      <p:sp>
-        <p:nvSpPr>
-          <p:cNvPr id="36" name="Shape 34"/>
-          <p:cNvSpPr/>
-          <p:nvPr/>
-        </p:nvSpPr>
-        <p:spPr>
-          <a:xfrm>
-            <a:off x="365760" y="4096512"/>
-            <a:ext cx="1371600" cy="804672"/>
-          </a:xfrm>
-          <a:prstGeom prst="rect">
-            <a:avLst>
-              <a:gd name="adj" fmla="val 6818"/>
-            </a:avLst>
-          </a:prstGeom>
-          <a:solidFill>
-            <a:srgbClr val="E2E8F0"/>
-          </a:solidFill>
-          <a:ln w="12700">
-            <a:solidFill>
-              <a:srgbClr val="E2E8F0"/>
-            </a:solidFill>
-            <a:prstDash val="solid"/>
-          </a:ln>
-        </p:spPr>
-      </p:sp>
-      <p:sp>
-        <p:nvSpPr>
-          <p:cNvPr id="37" name="Text 35"/>
-          <p:cNvSpPr/>
-          <p:nvPr/>
-        </p:nvSpPr>
-        <p:spPr>
-          <a:xfrm>
-            <a:off x="365760" y="4096512"/>
-            <a:ext cx="1371600" cy="804672"/>
-          </a:xfrm>
-          <a:prstGeom prst="rect">
-            <a:avLst/>
-          </a:prstGeom>
-          <a:noFill/>
-          <a:ln/>
-        </p:spPr>
-        <p:txBody>
-          <a:bodyPr wrap="square" lIns="0" tIns="0" rIns="0" bIns="0" rtlCol="0" anchor="ctr"/>
-          <a:lstStyle/>
-          <a:p>
-            <a:pPr algn="ctr" indent="0" marL="0">
-              <a:buNone/>
-            </a:pPr>
-            <a:r>
-              <a:rPr lang="en-US" sz="1100" b="1" dirty="0">
-                <a:solidFill>
-                  <a:srgbClr val="475569"/>
-                </a:solidFill>
-                <a:latin typeface="Trebuchet MS" pitchFamily="34" charset="0"/>
-                <a:ea typeface="Trebuchet MS" pitchFamily="34" charset="-122"/>
-                <a:cs typeface="Trebuchet MS" pitchFamily="34" charset="-120"/>
-              </a:rPr>
-              <a:t>Phonemes</a:t>
-            </a:r>
-            <a:endParaRPr lang="en-US" sz="1100" dirty="0"/>
-          </a:p>
-        </p:txBody>
-      </p:sp>
-      <p:sp>
-        <p:nvSpPr>
-          <p:cNvPr id="38" name="Shape 36"/>
-          <p:cNvSpPr/>
-          <p:nvPr/>
-        </p:nvSpPr>
-        <p:spPr>
-          <a:xfrm>
-            <a:off x="1874520" y="4096512"/>
-            <a:ext cx="6903720" cy="658368"/>
-          </a:xfrm>
-          <a:prstGeom prst="rect">
-            <a:avLst>
-              <a:gd name="adj" fmla="val 8333"/>
-            </a:avLst>
-          </a:prstGeom>
-          <a:solidFill>
-            <a:srgbClr val="FCE7F3"/>
-          </a:solidFill>
-          <a:ln w="12700">
-            <a:solidFill>
-              <a:srgbClr val="DB2777"/>
-            </a:solidFill>
-            <a:prstDash val="solid"/>
-          </a:ln>
-        </p:spPr>
-      </p:sp>
-      <p:sp>
-        <p:nvSpPr>
-          <p:cNvPr id="39" name="Shape 37"/>
-          <p:cNvSpPr/>
-          <p:nvPr/>
-        </p:nvSpPr>
-        <p:spPr>
-          <a:xfrm>
-            <a:off x="2254649" y="4169664"/>
-            <a:ext cx="685800" cy="475488"/>
-          </a:xfrm>
-          <a:prstGeom prst="rect">
-            <a:avLst>
-              <a:gd name="adj" fmla="val 7692"/>
-            </a:avLst>
-          </a:prstGeom>
-          <a:solidFill>
-            <a:srgbClr val="FFFFFF"/>
-          </a:solidFill>
-          <a:ln w="12700">
-            <a:solidFill>
-              <a:srgbClr val="DB2777"/>
-            </a:solidFill>
-            <a:prstDash val="solid"/>
-          </a:ln>
-        </p:spPr>
-      </p:sp>
-      <p:sp>
-        <p:nvSpPr>
-          <p:cNvPr id="40" name="Text 38"/>
-          <p:cNvSpPr/>
-          <p:nvPr/>
-        </p:nvSpPr>
-        <p:spPr>
-          <a:xfrm>
-            <a:off x="2254649" y="4169664"/>
-            <a:ext cx="685800" cy="475488"/>
-          </a:xfrm>
-          <a:prstGeom prst="rect">
-            <a:avLst/>
-          </a:prstGeom>
-          <a:noFill/>
-          <a:ln/>
-        </p:spPr>
-        <p:txBody>
-          <a:bodyPr wrap="square" lIns="0" tIns="0" rIns="0" bIns="0" rtlCol="0" anchor="ctr"/>
-          <a:lstStyle/>
-          <a:p>
-            <a:pPr algn="ctr" indent="0" marL="0">
-              <a:buNone/>
-            </a:pPr>
-            <a:r>
-              <a:rPr lang="en-US" sz="900" b="1" dirty="0">
-                <a:solidFill>
-                  <a:srgbClr val="9D174D"/>
-                </a:solidFill>
-                <a:latin typeface="Trebuchet MS" pitchFamily="34" charset="0"/>
-                <a:ea typeface="Trebuchet MS" pitchFamily="34" charset="-122"/>
-                <a:cs typeface="Trebuchet MS" pitchFamily="34" charset="-120"/>
-              </a:rPr>
-              <a:t>e</a:t>
-            </a:r>
-            <a:endParaRPr lang="en-US" sz="900" dirty="0"/>
-          </a:p>
-        </p:txBody>
-      </p:sp>
-      <p:sp>
-        <p:nvSpPr>
-          <p:cNvPr id="41" name="Shape 39"/>
-          <p:cNvSpPr/>
-          <p:nvPr/>
-        </p:nvSpPr>
-        <p:spPr>
-          <a:xfrm>
-            <a:off x="3293146" y="4169664"/>
-            <a:ext cx="685800" cy="475488"/>
-          </a:xfrm>
-          <a:prstGeom prst="rect">
-            <a:avLst>
-              <a:gd name="adj" fmla="val 7692"/>
-            </a:avLst>
-          </a:prstGeom>
-          <a:solidFill>
-            <a:srgbClr val="FFFFFF"/>
-          </a:solidFill>
-          <a:ln w="12700">
-            <a:solidFill>
-              <a:srgbClr val="DB2777"/>
-            </a:solidFill>
-            <a:prstDash val="solid"/>
-          </a:ln>
-        </p:spPr>
-      </p:sp>
-      <p:sp>
-        <p:nvSpPr>
-          <p:cNvPr id="42" name="Text 40"/>
-          <p:cNvSpPr/>
-          <p:nvPr/>
-        </p:nvSpPr>
-        <p:spPr>
-          <a:xfrm>
-            <a:off x="3293146" y="4169664"/>
-            <a:ext cx="685800" cy="475488"/>
-          </a:xfrm>
-          <a:prstGeom prst="rect">
-            <a:avLst/>
-          </a:prstGeom>
-          <a:noFill/>
-          <a:ln/>
-        </p:spPr>
-        <p:txBody>
-          <a:bodyPr wrap="square" lIns="0" tIns="0" rIns="0" bIns="0" rtlCol="0" anchor="ctr"/>
-          <a:lstStyle/>
-          <a:p>
-            <a:pPr algn="ctr" indent="0" marL="0">
-              <a:buNone/>
-            </a:pPr>
-            <a:r>
-              <a:rPr lang="en-US" sz="900" b="1" dirty="0">
-                <a:solidFill>
-                  <a:srgbClr val="9D174D"/>
-                </a:solidFill>
-                <a:latin typeface="Trebuchet MS" pitchFamily="34" charset="0"/>
-                <a:ea typeface="Trebuchet MS" pitchFamily="34" charset="-122"/>
-                <a:cs typeface="Trebuchet MS" pitchFamily="34" charset="-120"/>
-              </a:rPr>
-              <a:t>m</a:t>
-            </a:r>
-            <a:endParaRPr lang="en-US" sz="900" dirty="0"/>
-          </a:p>
-        </p:txBody>
-      </p:sp>
-      <p:sp>
-        <p:nvSpPr>
-          <p:cNvPr id="43" name="Shape 41"/>
-          <p:cNvSpPr/>
-          <p:nvPr/>
-        </p:nvSpPr>
-        <p:spPr>
-          <a:xfrm>
-            <a:off x="4331643" y="4169664"/>
-            <a:ext cx="685800" cy="475488"/>
-          </a:xfrm>
-          <a:prstGeom prst="rect">
-            <a:avLst>
-              <a:gd name="adj" fmla="val 7692"/>
-            </a:avLst>
-          </a:prstGeom>
-          <a:solidFill>
-            <a:srgbClr val="FFFFFF"/>
-          </a:solidFill>
-          <a:ln w="12700">
-            <a:solidFill>
-              <a:srgbClr val="DB2777"/>
-            </a:solidFill>
-            <a:prstDash val="solid"/>
-          </a:ln>
-        </p:spPr>
-      </p:sp>
-      <p:sp>
-        <p:nvSpPr>
-          <p:cNvPr id="44" name="Text 42"/>
-          <p:cNvSpPr/>
-          <p:nvPr/>
-        </p:nvSpPr>
-        <p:spPr>
-          <a:xfrm>
-            <a:off x="4331643" y="4169664"/>
-            <a:ext cx="685800" cy="475488"/>
-          </a:xfrm>
-          <a:prstGeom prst="rect">
-            <a:avLst/>
-          </a:prstGeom>
-          <a:noFill/>
-          <a:ln/>
-        </p:spPr>
-        <p:txBody>
-          <a:bodyPr wrap="square" lIns="0" tIns="0" rIns="0" bIns="0" rtlCol="0" anchor="ctr"/>
-          <a:lstStyle/>
-          <a:p>
-            <a:pPr algn="ctr" indent="0" marL="0">
-              <a:buNone/>
-            </a:pPr>
-            <a:r>
-              <a:rPr lang="en-US" sz="900" b="1" dirty="0">
-                <a:solidFill>
-                  <a:srgbClr val="9D174D"/>
-                </a:solidFill>
-                <a:latin typeface="Trebuchet MS" pitchFamily="34" charset="0"/>
-                <a:ea typeface="Trebuchet MS" pitchFamily="34" charset="-122"/>
-                <a:cs typeface="Trebuchet MS" pitchFamily="34" charset="-120"/>
-              </a:rPr>
-              <a:t>b</a:t>
-            </a:r>
-            <a:endParaRPr lang="en-US" sz="900" dirty="0"/>
-          </a:p>
-        </p:txBody>
-      </p:sp>
-      <p:sp>
-        <p:nvSpPr>
-          <p:cNvPr id="45" name="Shape 43"/>
-          <p:cNvSpPr/>
-          <p:nvPr/>
-        </p:nvSpPr>
-        <p:spPr>
-          <a:xfrm>
-            <a:off x="5370141" y="4169664"/>
-            <a:ext cx="685800" cy="475488"/>
-          </a:xfrm>
-          <a:prstGeom prst="rect">
-            <a:avLst>
-              <a:gd name="adj" fmla="val 7692"/>
-            </a:avLst>
-          </a:prstGeom>
-          <a:solidFill>
-            <a:srgbClr val="FFFFFF"/>
-          </a:solidFill>
-          <a:ln w="12700">
-            <a:solidFill>
-              <a:srgbClr val="DB2777"/>
-            </a:solidFill>
-            <a:prstDash val="solid"/>
-          </a:ln>
-        </p:spPr>
-      </p:sp>
-      <p:sp>
-        <p:nvSpPr>
-          <p:cNvPr id="46" name="Text 44"/>
-          <p:cNvSpPr/>
-          <p:nvPr/>
-        </p:nvSpPr>
-        <p:spPr>
-          <a:xfrm>
-            <a:off x="5370141" y="4169664"/>
-            <a:ext cx="685800" cy="475488"/>
-          </a:xfrm>
-          <a:prstGeom prst="rect">
-            <a:avLst/>
-          </a:prstGeom>
-          <a:noFill/>
-          <a:ln/>
-        </p:spPr>
-        <p:txBody>
-          <a:bodyPr wrap="square" lIns="0" tIns="0" rIns="0" bIns="0" rtlCol="0" anchor="ctr"/>
-          <a:lstStyle/>
-          <a:p>
-            <a:pPr algn="ctr" indent="0" marL="0">
-              <a:buNone/>
-            </a:pPr>
-            <a:r>
-              <a:rPr lang="en-US" sz="900" b="1" dirty="0">
-                <a:solidFill>
-                  <a:srgbClr val="9D174D"/>
-                </a:solidFill>
-                <a:latin typeface="Trebuchet MS" pitchFamily="34" charset="0"/>
-                <a:ea typeface="Trebuchet MS" pitchFamily="34" charset="-122"/>
-                <a:cs typeface="Trebuchet MS" pitchFamily="34" charset="-120"/>
-              </a:rPr>
-              <a:t>o</a:t>
-            </a:r>
-            <a:endParaRPr lang="en-US" sz="900" dirty="0"/>
-          </a:p>
-        </p:txBody>
-      </p:sp>
-      <p:sp>
-        <p:nvSpPr>
-          <p:cNvPr id="47" name="Shape 45"/>
-          <p:cNvSpPr/>
-          <p:nvPr/>
-        </p:nvSpPr>
-        <p:spPr>
-          <a:xfrm>
-            <a:off x="6408638" y="4169664"/>
-            <a:ext cx="685800" cy="475488"/>
-          </a:xfrm>
-          <a:prstGeom prst="rect">
-            <a:avLst>
-              <a:gd name="adj" fmla="val 7692"/>
-            </a:avLst>
-          </a:prstGeom>
-          <a:solidFill>
-            <a:srgbClr val="FFFFFF"/>
-          </a:solidFill>
-          <a:ln w="12700">
-            <a:solidFill>
-              <a:srgbClr val="DB2777"/>
-            </a:solidFill>
-            <a:prstDash val="solid"/>
-          </a:ln>
-        </p:spPr>
-      </p:sp>
-      <p:sp>
-        <p:nvSpPr>
-          <p:cNvPr id="48" name="Text 46"/>
-          <p:cNvSpPr/>
-          <p:nvPr/>
-        </p:nvSpPr>
-        <p:spPr>
-          <a:xfrm>
-            <a:off x="6408638" y="4169664"/>
-            <a:ext cx="685800" cy="475488"/>
-          </a:xfrm>
-          <a:prstGeom prst="rect">
-            <a:avLst/>
-          </a:prstGeom>
-          <a:noFill/>
-          <a:ln/>
-        </p:spPr>
-        <p:txBody>
-          <a:bodyPr wrap="square" lIns="0" tIns="0" rIns="0" bIns="0" rtlCol="0" anchor="ctr"/>
-          <a:lstStyle/>
-          <a:p>
-            <a:pPr algn="ctr" indent="0" marL="0">
-              <a:buNone/>
-            </a:pPr>
-            <a:r>
-              <a:rPr lang="en-US" sz="900" b="1" dirty="0">
-                <a:solidFill>
-                  <a:srgbClr val="9D174D"/>
-                </a:solidFill>
-                <a:latin typeface="Trebuchet MS" pitchFamily="34" charset="0"/>
-                <a:ea typeface="Trebuchet MS" pitchFamily="34" charset="-122"/>
-                <a:cs typeface="Trebuchet MS" pitchFamily="34" charset="-120"/>
-              </a:rPr>
-              <a:t>d</a:t>
-            </a:r>
-            <a:endParaRPr lang="en-US" sz="900" dirty="0"/>
-          </a:p>
-        </p:txBody>
-      </p:sp>
-      <p:sp>
-        <p:nvSpPr>
-          <p:cNvPr id="49" name="Shape 47"/>
-          <p:cNvSpPr/>
-          <p:nvPr/>
-        </p:nvSpPr>
-        <p:spPr>
-          <a:xfrm>
-            <a:off x="7447135" y="4169664"/>
-            <a:ext cx="685800" cy="475488"/>
-          </a:xfrm>
-          <a:prstGeom prst="rect">
-            <a:avLst>
-              <a:gd name="adj" fmla="val 7692"/>
-            </a:avLst>
-          </a:prstGeom>
-          <a:solidFill>
-            <a:srgbClr val="FFFFFF"/>
-          </a:solidFill>
-          <a:ln w="12700">
-            <a:solidFill>
-              <a:srgbClr val="DB2777"/>
-            </a:solidFill>
-            <a:prstDash val="solid"/>
-          </a:ln>
-        </p:spPr>
-      </p:sp>
-      <p:sp>
-        <p:nvSpPr>
-          <p:cNvPr id="50" name="Text 48"/>
-          <p:cNvSpPr/>
-          <p:nvPr/>
-        </p:nvSpPr>
-        <p:spPr>
-          <a:xfrm>
-            <a:off x="7447135" y="4169664"/>
-            <a:ext cx="685800" cy="475488"/>
-          </a:xfrm>
-          <a:prstGeom prst="rect">
-            <a:avLst/>
-          </a:prstGeom>
-          <a:noFill/>
-          <a:ln/>
-        </p:spPr>
-        <p:txBody>
-          <a:bodyPr wrap="square" lIns="0" tIns="0" rIns="0" bIns="0" rtlCol="0" anchor="ctr"/>
-          <a:lstStyle/>
-          <a:p>
-            <a:pPr algn="ctr" indent="0" marL="0">
-              <a:buNone/>
-            </a:pPr>
-            <a:r>
-              <a:rPr lang="en-US" sz="900" b="1" dirty="0">
-                <a:solidFill>
-                  <a:srgbClr val="9D174D"/>
-                </a:solidFill>
-                <a:latin typeface="Trebuchet MS" pitchFamily="34" charset="0"/>
-                <a:ea typeface="Trebuchet MS" pitchFamily="34" charset="-122"/>
-                <a:cs typeface="Trebuchet MS" pitchFamily="34" charset="-120"/>
-              </a:rPr>
-              <a:t>y</a:t>
+              <a:t>k</a:t>
             </a:r>
             <a:endParaRPr lang="en-US" sz="900" dirty="0"/>
           </a:p>
@@ -23295,7 +22971,7 @@
                 <a:ea typeface="Calibri" pitchFamily="34" charset="-122"/>
                 <a:cs typeface="Calibri" pitchFamily="34" charset="-120"/>
               </a:rPr>
-              <a:t>Word Labs  •  wordlabs.app  •  Prefix: 'em-' = put into, make</a:t>
+              <a:t>Word Labs  •  wordlabs.app  •  Prefix: 'em-' = put into, cause to be</a:t>
             </a:r>
             <a:endParaRPr lang="en-US" sz="800" dirty="0"/>
           </a:p>
@@ -23434,7 +23110,7 @@
                 <a:ea typeface="Trebuchet MS" pitchFamily="34" charset="-122"/>
                 <a:cs typeface="Trebuchet MS" pitchFamily="34" charset="-120"/>
               </a:rPr>
-              <a:t>embrace</a:t>
+              <a:t>embedded</a:t>
             </a:r>
             <a:endParaRPr lang="en-US" sz="2800" dirty="0"/>
           </a:p>
@@ -24122,7 +23798,7 @@
                 <a:ea typeface="Calibri" pitchFamily="34" charset="-122"/>
                 <a:cs typeface="Calibri" pitchFamily="34" charset="-120"/>
               </a:rPr>
-              <a:t>Word Labs  •  wordlabs.app  •  Prefix: 'em-' = put into, make</a:t>
+              <a:t>Word Labs  •  wordlabs.app  •  Prefix: 'em-' = put into, cause to be</a:t>
             </a:r>
             <a:endParaRPr lang="en-US" sz="800" dirty="0"/>
           </a:p>
@@ -24261,7 +23937,7 @@
                 <a:ea typeface="Trebuchet MS" pitchFamily="34" charset="-122"/>
                 <a:cs typeface="Trebuchet MS" pitchFamily="34" charset="-120"/>
               </a:rPr>
-              <a:t>embrace</a:t>
+              <a:t>embedded</a:t>
             </a:r>
             <a:endParaRPr lang="en-US" sz="2800" dirty="0"/>
           </a:p>
@@ -24341,8 +24017,8 @@
         </p:nvSpPr>
         <p:spPr>
           <a:xfrm>
-            <a:off x="2938272" y="2258568"/>
-            <a:ext cx="1828800" cy="292608"/>
+            <a:off x="1989734" y="2258568"/>
+            <a:ext cx="1581912" cy="292608"/>
           </a:xfrm>
           <a:prstGeom prst="rect">
             <a:avLst>
@@ -24375,8 +24051,8 @@
         </p:nvSpPr>
         <p:spPr>
           <a:xfrm>
-            <a:off x="2938272" y="2258568"/>
-            <a:ext cx="1828800" cy="292608"/>
+            <a:off x="1989734" y="2258568"/>
+            <a:ext cx="1581912" cy="292608"/>
           </a:xfrm>
           <a:prstGeom prst="rect">
             <a:avLst/>
@@ -24414,8 +24090,8 @@
         </p:nvSpPr>
         <p:spPr>
           <a:xfrm>
-            <a:off x="2938272" y="2569464"/>
-            <a:ext cx="1828800" cy="201168"/>
+            <a:off x="1989734" y="2569464"/>
+            <a:ext cx="1581912" cy="201168"/>
           </a:xfrm>
           <a:prstGeom prst="rect">
             <a:avLst/>
@@ -24439,7 +24115,7 @@
                 <a:ea typeface="Calibri" pitchFamily="34" charset="-122"/>
                 <a:cs typeface="Calibri" pitchFamily="34" charset="-120"/>
               </a:rPr>
-              <a:t>put into, make</a:t>
+              <a:t>put into, cause to be</a:t>
             </a:r>
             <a:endParaRPr lang="en-US" sz="850" dirty="0"/>
           </a:p>
@@ -24453,8 +24129,8 @@
         </p:nvSpPr>
         <p:spPr>
           <a:xfrm>
-            <a:off x="5803392" y="2258568"/>
-            <a:ext cx="1828800" cy="292608"/>
+            <a:off x="3659429" y="2258568"/>
+            <a:ext cx="1581912" cy="292608"/>
           </a:xfrm>
           <a:prstGeom prst="rect">
             <a:avLst>
@@ -24487,8 +24163,8 @@
         </p:nvSpPr>
         <p:spPr>
           <a:xfrm>
-            <a:off x="5803392" y="2258568"/>
-            <a:ext cx="1828800" cy="292608"/>
+            <a:off x="3659429" y="2258568"/>
+            <a:ext cx="1581912" cy="292608"/>
           </a:xfrm>
           <a:prstGeom prst="rect">
             <a:avLst/>
@@ -24512,7 +24188,7 @@
                 <a:ea typeface="Trebuchet MS" pitchFamily="34" charset="-122"/>
                 <a:cs typeface="Trebuchet MS" pitchFamily="34" charset="-120"/>
               </a:rPr>
-              <a:t>brace</a:t>
+              <a:t>bed</a:t>
             </a:r>
             <a:endParaRPr lang="en-US" sz="1300" dirty="0"/>
           </a:p>
@@ -24526,8 +24202,8 @@
         </p:nvSpPr>
         <p:spPr>
           <a:xfrm>
-            <a:off x="5803392" y="2569464"/>
-            <a:ext cx="1828800" cy="201168"/>
+            <a:off x="3659429" y="2569464"/>
+            <a:ext cx="1581912" cy="201168"/>
           </a:xfrm>
           <a:prstGeom prst="rect">
             <a:avLst/>
@@ -24551,7 +24227,7 @@
                 <a:ea typeface="Calibri" pitchFamily="34" charset="-122"/>
                 <a:cs typeface="Calibri" pitchFamily="34" charset="-120"/>
               </a:rPr>
-              <a:t>arms, hold</a:t>
+              <a:t>a base, to fix in place</a:t>
             </a:r>
             <a:endParaRPr lang="en-US" sz="850" dirty="0"/>
           </a:p>
@@ -24560,6 +24236,269 @@
       <p:sp>
         <p:nvSpPr>
           <p:cNvPr id="22" name="Shape 20"/>
+          <p:cNvSpPr/>
+          <p:nvPr/>
+        </p:nvSpPr>
+        <p:spPr>
+          <a:xfrm>
+            <a:off x="5329123" y="2258568"/>
+            <a:ext cx="1581912" cy="292608"/>
+          </a:xfrm>
+          <a:prstGeom prst="rect">
+            <a:avLst>
+              <a:gd name="adj" fmla="val 25000"/>
+            </a:avLst>
+          </a:prstGeom>
+          <a:solidFill>
+            <a:srgbClr val="FCE7F3"/>
+          </a:solidFill>
+          <a:ln w="19050">
+            <a:solidFill>
+              <a:srgbClr val="DB2777"/>
+            </a:solidFill>
+            <a:prstDash val="solid"/>
+          </a:ln>
+          <a:effectLst>
+            <a:outerShdw sx="100000" sy="100000" kx="0" ky="0" algn="bl" rotWithShape="0" blurRad="101600" dist="38100" dir="8100000">
+              <a:srgbClr val="000000">
+                <a:alpha val="12000"/>
+              </a:srgbClr>
+            </a:outerShdw>
+          </a:effectLst>
+        </p:spPr>
+      </p:sp>
+      <p:sp>
+        <p:nvSpPr>
+          <p:cNvPr id="23" name="Text 21"/>
+          <p:cNvSpPr/>
+          <p:nvPr/>
+        </p:nvSpPr>
+        <p:spPr>
+          <a:xfrm>
+            <a:off x="5329123" y="2258568"/>
+            <a:ext cx="1581912" cy="292608"/>
+          </a:xfrm>
+          <a:prstGeom prst="rect">
+            <a:avLst/>
+          </a:prstGeom>
+          <a:noFill/>
+          <a:ln/>
+        </p:spPr>
+        <p:txBody>
+          <a:bodyPr wrap="square" lIns="0" tIns="0" rIns="0" bIns="0" rtlCol="0" anchor="ctr"/>
+          <a:lstStyle/>
+          <a:p>
+            <a:pPr algn="ctr" indent="0" marL="0">
+              <a:buNone/>
+            </a:pPr>
+            <a:r>
+              <a:rPr lang="en-US" sz="1300" b="1" dirty="0">
+                <a:solidFill>
+                  <a:srgbClr val="9D174D"/>
+                </a:solidFill>
+                <a:latin typeface="Trebuchet MS" pitchFamily="34" charset="0"/>
+                <a:ea typeface="Trebuchet MS" pitchFamily="34" charset="-122"/>
+                <a:cs typeface="Trebuchet MS" pitchFamily="34" charset="-120"/>
+              </a:rPr>
+              <a:t>d</a:t>
+            </a:r>
+            <a:endParaRPr lang="en-US" sz="1300" dirty="0"/>
+          </a:p>
+        </p:txBody>
+      </p:sp>
+      <p:sp>
+        <p:nvSpPr>
+          <p:cNvPr id="24" name="Text 22"/>
+          <p:cNvSpPr/>
+          <p:nvPr/>
+        </p:nvSpPr>
+        <p:spPr>
+          <a:xfrm>
+            <a:off x="5329123" y="2569464"/>
+            <a:ext cx="1581912" cy="201168"/>
+          </a:xfrm>
+          <a:prstGeom prst="rect">
+            <a:avLst/>
+          </a:prstGeom>
+          <a:noFill/>
+          <a:ln/>
+        </p:spPr>
+        <p:txBody>
+          <a:bodyPr wrap="square" lIns="0" tIns="0" rIns="0" bIns="0" rtlCol="0" anchor="t"/>
+          <a:lstStyle/>
+          <a:p>
+            <a:pPr algn="ctr" indent="0" marL="0">
+              <a:buNone/>
+            </a:pPr>
+            <a:r>
+              <a:rPr lang="en-US" sz="850" dirty="0">
+                <a:solidFill>
+                  <a:srgbClr val="475569"/>
+                </a:solidFill>
+                <a:latin typeface="Calibri" pitchFamily="34" charset="0"/>
+                <a:ea typeface="Calibri" pitchFamily="34" charset="-122"/>
+                <a:cs typeface="Calibri" pitchFamily="34" charset="-120"/>
+              </a:rPr>
+              <a:t>past tense</a:t>
+            </a:r>
+            <a:endParaRPr lang="en-US" sz="850" dirty="0"/>
+          </a:p>
+        </p:txBody>
+      </p:sp>
+      <p:sp>
+        <p:nvSpPr>
+          <p:cNvPr id="25" name="Text 23"/>
+          <p:cNvSpPr/>
+          <p:nvPr/>
+        </p:nvSpPr>
+        <p:spPr>
+          <a:xfrm>
+            <a:off x="5329123" y="2752344"/>
+            <a:ext cx="1581912" cy="182880"/>
+          </a:xfrm>
+          <a:prstGeom prst="rect">
+            <a:avLst/>
+          </a:prstGeom>
+          <a:noFill/>
+          <a:ln/>
+        </p:spPr>
+        <p:txBody>
+          <a:bodyPr wrap="square" lIns="0" tIns="0" rIns="0" bIns="0" rtlCol="0" anchor="t"/>
+          <a:lstStyle/>
+          <a:p>
+            <a:pPr algn="ctr" indent="0" marL="0">
+              <a:buNone/>
+            </a:pPr>
+            <a:r>
+              <a:rPr lang="en-US" sz="700" i="1" dirty="0">
+                <a:solidFill>
+                  <a:srgbClr val="94A3B8"/>
+                </a:solidFill>
+                <a:latin typeface="Calibri" pitchFamily="34" charset="0"/>
+                <a:ea typeface="Calibri" pitchFamily="34" charset="-122"/>
+                <a:cs typeface="Calibri" pitchFamily="34" charset="-120"/>
+              </a:rPr>
+              <a:t>final consonant doubled before 'ed'</a:t>
+            </a:r>
+            <a:endParaRPr lang="en-US" sz="700" dirty="0"/>
+          </a:p>
+        </p:txBody>
+      </p:sp>
+      <p:sp>
+        <p:nvSpPr>
+          <p:cNvPr id="26" name="Shape 24"/>
+          <p:cNvSpPr/>
+          <p:nvPr/>
+        </p:nvSpPr>
+        <p:spPr>
+          <a:xfrm>
+            <a:off x="6998818" y="2258568"/>
+            <a:ext cx="1581912" cy="292608"/>
+          </a:xfrm>
+          <a:prstGeom prst="rect">
+            <a:avLst>
+              <a:gd name="adj" fmla="val 25000"/>
+            </a:avLst>
+          </a:prstGeom>
+          <a:solidFill>
+            <a:srgbClr val="FCE7F3"/>
+          </a:solidFill>
+          <a:ln w="19050">
+            <a:solidFill>
+              <a:srgbClr val="DB2777"/>
+            </a:solidFill>
+            <a:prstDash val="solid"/>
+          </a:ln>
+          <a:effectLst>
+            <a:outerShdw sx="100000" sy="100000" kx="0" ky="0" algn="bl" rotWithShape="0" blurRad="101600" dist="38100" dir="8100000">
+              <a:srgbClr val="000000">
+                <a:alpha val="12000"/>
+              </a:srgbClr>
+            </a:outerShdw>
+          </a:effectLst>
+        </p:spPr>
+      </p:sp>
+      <p:sp>
+        <p:nvSpPr>
+          <p:cNvPr id="27" name="Text 25"/>
+          <p:cNvSpPr/>
+          <p:nvPr/>
+        </p:nvSpPr>
+        <p:spPr>
+          <a:xfrm>
+            <a:off x="6998818" y="2258568"/>
+            <a:ext cx="1581912" cy="292608"/>
+          </a:xfrm>
+          <a:prstGeom prst="rect">
+            <a:avLst/>
+          </a:prstGeom>
+          <a:noFill/>
+          <a:ln/>
+        </p:spPr>
+        <p:txBody>
+          <a:bodyPr wrap="square" lIns="0" tIns="0" rIns="0" bIns="0" rtlCol="0" anchor="ctr"/>
+          <a:lstStyle/>
+          <a:p>
+            <a:pPr algn="ctr" indent="0" marL="0">
+              <a:buNone/>
+            </a:pPr>
+            <a:r>
+              <a:rPr lang="en-US" sz="1300" b="1" dirty="0">
+                <a:solidFill>
+                  <a:srgbClr val="9D174D"/>
+                </a:solidFill>
+                <a:latin typeface="Trebuchet MS" pitchFamily="34" charset="0"/>
+                <a:ea typeface="Trebuchet MS" pitchFamily="34" charset="-122"/>
+                <a:cs typeface="Trebuchet MS" pitchFamily="34" charset="-120"/>
+              </a:rPr>
+              <a:t>ed</a:t>
+            </a:r>
+            <a:endParaRPr lang="en-US" sz="1300" dirty="0"/>
+          </a:p>
+        </p:txBody>
+      </p:sp>
+      <p:sp>
+        <p:nvSpPr>
+          <p:cNvPr id="28" name="Text 26"/>
+          <p:cNvSpPr/>
+          <p:nvPr/>
+        </p:nvSpPr>
+        <p:spPr>
+          <a:xfrm>
+            <a:off x="6998818" y="2569464"/>
+            <a:ext cx="1581912" cy="201168"/>
+          </a:xfrm>
+          <a:prstGeom prst="rect">
+            <a:avLst/>
+          </a:prstGeom>
+          <a:noFill/>
+          <a:ln/>
+        </p:spPr>
+        <p:txBody>
+          <a:bodyPr wrap="square" lIns="0" tIns="0" rIns="0" bIns="0" rtlCol="0" anchor="t"/>
+          <a:lstStyle/>
+          <a:p>
+            <a:pPr algn="ctr" indent="0" marL="0">
+              <a:buNone/>
+            </a:pPr>
+            <a:r>
+              <a:rPr lang="en-US" sz="850" dirty="0">
+                <a:solidFill>
+                  <a:srgbClr val="475569"/>
+                </a:solidFill>
+                <a:latin typeface="Calibri" pitchFamily="34" charset="0"/>
+                <a:ea typeface="Calibri" pitchFamily="34" charset="-122"/>
+                <a:cs typeface="Calibri" pitchFamily="34" charset="-120"/>
+              </a:rPr>
+              <a:t>past tense</a:t>
+            </a:r>
+            <a:endParaRPr lang="en-US" sz="850" dirty="0"/>
+          </a:p>
+        </p:txBody>
+      </p:sp>
+      <p:sp>
+        <p:nvSpPr>
+          <p:cNvPr id="29" name="Shape 27"/>
           <p:cNvSpPr/>
           <p:nvPr/>
         </p:nvSpPr>
@@ -24586,7 +24525,7 @@
       </p:sp>
       <p:sp>
         <p:nvSpPr>
-          <p:cNvPr id="23" name="Text 21"/>
+          <p:cNvPr id="30" name="Text 28"/>
           <p:cNvSpPr/>
           <p:nvPr/>
         </p:nvSpPr>
@@ -24625,7 +24564,7 @@
       </p:sp>
       <p:sp>
         <p:nvSpPr>
-          <p:cNvPr id="24" name="Shape 22"/>
+          <p:cNvPr id="31" name="Shape 29"/>
           <p:cNvSpPr/>
           <p:nvPr/>
         </p:nvSpPr>
@@ -24652,7 +24591,7 @@
       </p:sp>
       <p:sp>
         <p:nvSpPr>
-          <p:cNvPr id="25" name="Text 23"/>
+          <p:cNvPr id="32" name="Text 30"/>
           <p:cNvSpPr/>
           <p:nvPr/>
         </p:nvSpPr>
@@ -24691,7 +24630,7 @@
       </p:sp>
       <p:sp>
         <p:nvSpPr>
-          <p:cNvPr id="26" name="Shape 24"/>
+          <p:cNvPr id="33" name="Shape 31"/>
           <p:cNvSpPr/>
           <p:nvPr/>
         </p:nvSpPr>
@@ -24718,7 +24657,7 @@
       </p:sp>
       <p:sp>
         <p:nvSpPr>
-          <p:cNvPr id="27" name="Text 25"/>
+          <p:cNvPr id="34" name="Text 32"/>
           <p:cNvSpPr/>
           <p:nvPr/>
         </p:nvSpPr>
@@ -24757,7 +24696,7 @@
       </p:sp>
       <p:sp>
         <p:nvSpPr>
-          <p:cNvPr id="28" name="Shape 26"/>
+          <p:cNvPr id="35" name="Shape 33"/>
           <p:cNvSpPr/>
           <p:nvPr/>
         </p:nvSpPr>
@@ -24784,7 +24723,7 @@
       </p:sp>
       <p:sp>
         <p:nvSpPr>
-          <p:cNvPr id="29" name="Text 27"/>
+          <p:cNvPr id="36" name="Text 34"/>
           <p:cNvSpPr/>
           <p:nvPr/>
         </p:nvSpPr>
@@ -25107,7 +25046,7 @@
                 <a:ea typeface="Calibri" pitchFamily="34" charset="-122"/>
                 <a:cs typeface="Calibri" pitchFamily="34" charset="-120"/>
               </a:rPr>
-              <a:t>Word Labs  •  wordlabs.app  •  Prefix: 'em-' = put into, make</a:t>
+              <a:t>Word Labs  •  wordlabs.app  •  Prefix: 'em-' = put into, cause to be</a:t>
             </a:r>
             <a:endParaRPr lang="en-US" sz="800" dirty="0"/>
           </a:p>
@@ -25180,7 +25119,7 @@
                 <a:ea typeface="Trebuchet MS" pitchFamily="34" charset="-122"/>
                 <a:cs typeface="Trebuchet MS" pitchFamily="34" charset="-120"/>
               </a:rPr>
-              <a:t>We are learning that the prefix 'em-' means 'put into, make'.</a:t>
+              <a:t>We are learning that the prefix 'em-' means 'put into, cause to be'.</a:t>
             </a:r>
             <a:endParaRPr lang="en-US" sz="2000" dirty="0"/>
           </a:p>
@@ -25826,7 +25765,7 @@
                 <a:ea typeface="Calibri" pitchFamily="34" charset="-122"/>
                 <a:cs typeface="Calibri" pitchFamily="34" charset="-120"/>
               </a:rPr>
-              <a:t>Word Labs  •  wordlabs.app  •  Prefix: 'em-' = put into, make</a:t>
+              <a:t>Word Labs  •  wordlabs.app  •  Prefix: 'em-' = put into, cause to be</a:t>
             </a:r>
             <a:endParaRPr lang="en-US" sz="800" dirty="0"/>
           </a:p>
@@ -25965,7 +25904,7 @@
                 <a:ea typeface="Trebuchet MS" pitchFamily="34" charset="-122"/>
                 <a:cs typeface="Trebuchet MS" pitchFamily="34" charset="-120"/>
               </a:rPr>
-              <a:t>embrace</a:t>
+              <a:t>embedded</a:t>
             </a:r>
             <a:endParaRPr lang="en-US" sz="2800" dirty="0"/>
           </a:p>
@@ -26045,8 +25984,8 @@
         </p:nvSpPr>
         <p:spPr>
           <a:xfrm>
-            <a:off x="2938272" y="2258568"/>
-            <a:ext cx="1828800" cy="292608"/>
+            <a:off x="1989734" y="2258568"/>
+            <a:ext cx="1581912" cy="292608"/>
           </a:xfrm>
           <a:prstGeom prst="rect">
             <a:avLst>
@@ -26079,8 +26018,8 @@
         </p:nvSpPr>
         <p:spPr>
           <a:xfrm>
-            <a:off x="2938272" y="2258568"/>
-            <a:ext cx="1828800" cy="292608"/>
+            <a:off x="1989734" y="2258568"/>
+            <a:ext cx="1581912" cy="292608"/>
           </a:xfrm>
           <a:prstGeom prst="rect">
             <a:avLst/>
@@ -26118,8 +26057,8 @@
         </p:nvSpPr>
         <p:spPr>
           <a:xfrm>
-            <a:off x="2938272" y="2569464"/>
-            <a:ext cx="1828800" cy="201168"/>
+            <a:off x="1989734" y="2569464"/>
+            <a:ext cx="1581912" cy="201168"/>
           </a:xfrm>
           <a:prstGeom prst="rect">
             <a:avLst/>
@@ -26143,7 +26082,7 @@
                 <a:ea typeface="Calibri" pitchFamily="34" charset="-122"/>
                 <a:cs typeface="Calibri" pitchFamily="34" charset="-120"/>
               </a:rPr>
-              <a:t>put into, make</a:t>
+              <a:t>put into, cause to be</a:t>
             </a:r>
             <a:endParaRPr lang="en-US" sz="850" dirty="0"/>
           </a:p>
@@ -26157,8 +26096,8 @@
         </p:nvSpPr>
         <p:spPr>
           <a:xfrm>
-            <a:off x="5803392" y="2258568"/>
-            <a:ext cx="1828800" cy="292608"/>
+            <a:off x="3659429" y="2258568"/>
+            <a:ext cx="1581912" cy="292608"/>
           </a:xfrm>
           <a:prstGeom prst="rect">
             <a:avLst>
@@ -26191,8 +26130,8 @@
         </p:nvSpPr>
         <p:spPr>
           <a:xfrm>
-            <a:off x="5803392" y="2258568"/>
-            <a:ext cx="1828800" cy="292608"/>
+            <a:off x="3659429" y="2258568"/>
+            <a:ext cx="1581912" cy="292608"/>
           </a:xfrm>
           <a:prstGeom prst="rect">
             <a:avLst/>
@@ -26216,7 +26155,7 @@
                 <a:ea typeface="Trebuchet MS" pitchFamily="34" charset="-122"/>
                 <a:cs typeface="Trebuchet MS" pitchFamily="34" charset="-120"/>
               </a:rPr>
-              <a:t>brace</a:t>
+              <a:t>bed</a:t>
             </a:r>
             <a:endParaRPr lang="en-US" sz="1300" dirty="0"/>
           </a:p>
@@ -26230,8 +26169,8 @@
         </p:nvSpPr>
         <p:spPr>
           <a:xfrm>
-            <a:off x="5803392" y="2569464"/>
-            <a:ext cx="1828800" cy="201168"/>
+            <a:off x="3659429" y="2569464"/>
+            <a:ext cx="1581912" cy="201168"/>
           </a:xfrm>
           <a:prstGeom prst="rect">
             <a:avLst/>
@@ -26255,7 +26194,7 @@
                 <a:ea typeface="Calibri" pitchFamily="34" charset="-122"/>
                 <a:cs typeface="Calibri" pitchFamily="34" charset="-120"/>
               </a:rPr>
-              <a:t>arms, hold</a:t>
+              <a:t>a base, to fix in place</a:t>
             </a:r>
             <a:endParaRPr lang="en-US" sz="850" dirty="0"/>
           </a:p>
@@ -26264,6 +26203,269 @@
       <p:sp>
         <p:nvSpPr>
           <p:cNvPr id="22" name="Shape 20"/>
+          <p:cNvSpPr/>
+          <p:nvPr/>
+        </p:nvSpPr>
+        <p:spPr>
+          <a:xfrm>
+            <a:off x="5329123" y="2258568"/>
+            <a:ext cx="1581912" cy="292608"/>
+          </a:xfrm>
+          <a:prstGeom prst="rect">
+            <a:avLst>
+              <a:gd name="adj" fmla="val 25000"/>
+            </a:avLst>
+          </a:prstGeom>
+          <a:solidFill>
+            <a:srgbClr val="FCE7F3"/>
+          </a:solidFill>
+          <a:ln w="19050">
+            <a:solidFill>
+              <a:srgbClr val="DB2777"/>
+            </a:solidFill>
+            <a:prstDash val="solid"/>
+          </a:ln>
+          <a:effectLst>
+            <a:outerShdw sx="100000" sy="100000" kx="0" ky="0" algn="bl" rotWithShape="0" blurRad="101600" dist="38100" dir="8100000">
+              <a:srgbClr val="000000">
+                <a:alpha val="12000"/>
+              </a:srgbClr>
+            </a:outerShdw>
+          </a:effectLst>
+        </p:spPr>
+      </p:sp>
+      <p:sp>
+        <p:nvSpPr>
+          <p:cNvPr id="23" name="Text 21"/>
+          <p:cNvSpPr/>
+          <p:nvPr/>
+        </p:nvSpPr>
+        <p:spPr>
+          <a:xfrm>
+            <a:off x="5329123" y="2258568"/>
+            <a:ext cx="1581912" cy="292608"/>
+          </a:xfrm>
+          <a:prstGeom prst="rect">
+            <a:avLst/>
+          </a:prstGeom>
+          <a:noFill/>
+          <a:ln/>
+        </p:spPr>
+        <p:txBody>
+          <a:bodyPr wrap="square" lIns="0" tIns="0" rIns="0" bIns="0" rtlCol="0" anchor="ctr"/>
+          <a:lstStyle/>
+          <a:p>
+            <a:pPr algn="ctr" indent="0" marL="0">
+              <a:buNone/>
+            </a:pPr>
+            <a:r>
+              <a:rPr lang="en-US" sz="1300" b="1" dirty="0">
+                <a:solidFill>
+                  <a:srgbClr val="9D174D"/>
+                </a:solidFill>
+                <a:latin typeface="Trebuchet MS" pitchFamily="34" charset="0"/>
+                <a:ea typeface="Trebuchet MS" pitchFamily="34" charset="-122"/>
+                <a:cs typeface="Trebuchet MS" pitchFamily="34" charset="-120"/>
+              </a:rPr>
+              <a:t>d</a:t>
+            </a:r>
+            <a:endParaRPr lang="en-US" sz="1300" dirty="0"/>
+          </a:p>
+        </p:txBody>
+      </p:sp>
+      <p:sp>
+        <p:nvSpPr>
+          <p:cNvPr id="24" name="Text 22"/>
+          <p:cNvSpPr/>
+          <p:nvPr/>
+        </p:nvSpPr>
+        <p:spPr>
+          <a:xfrm>
+            <a:off x="5329123" y="2569464"/>
+            <a:ext cx="1581912" cy="201168"/>
+          </a:xfrm>
+          <a:prstGeom prst="rect">
+            <a:avLst/>
+          </a:prstGeom>
+          <a:noFill/>
+          <a:ln/>
+        </p:spPr>
+        <p:txBody>
+          <a:bodyPr wrap="square" lIns="0" tIns="0" rIns="0" bIns="0" rtlCol="0" anchor="t"/>
+          <a:lstStyle/>
+          <a:p>
+            <a:pPr algn="ctr" indent="0" marL="0">
+              <a:buNone/>
+            </a:pPr>
+            <a:r>
+              <a:rPr lang="en-US" sz="850" dirty="0">
+                <a:solidFill>
+                  <a:srgbClr val="475569"/>
+                </a:solidFill>
+                <a:latin typeface="Calibri" pitchFamily="34" charset="0"/>
+                <a:ea typeface="Calibri" pitchFamily="34" charset="-122"/>
+                <a:cs typeface="Calibri" pitchFamily="34" charset="-120"/>
+              </a:rPr>
+              <a:t>past tense</a:t>
+            </a:r>
+            <a:endParaRPr lang="en-US" sz="850" dirty="0"/>
+          </a:p>
+        </p:txBody>
+      </p:sp>
+      <p:sp>
+        <p:nvSpPr>
+          <p:cNvPr id="25" name="Text 23"/>
+          <p:cNvSpPr/>
+          <p:nvPr/>
+        </p:nvSpPr>
+        <p:spPr>
+          <a:xfrm>
+            <a:off x="5329123" y="2752344"/>
+            <a:ext cx="1581912" cy="182880"/>
+          </a:xfrm>
+          <a:prstGeom prst="rect">
+            <a:avLst/>
+          </a:prstGeom>
+          <a:noFill/>
+          <a:ln/>
+        </p:spPr>
+        <p:txBody>
+          <a:bodyPr wrap="square" lIns="0" tIns="0" rIns="0" bIns="0" rtlCol="0" anchor="t"/>
+          <a:lstStyle/>
+          <a:p>
+            <a:pPr algn="ctr" indent="0" marL="0">
+              <a:buNone/>
+            </a:pPr>
+            <a:r>
+              <a:rPr lang="en-US" sz="700" i="1" dirty="0">
+                <a:solidFill>
+                  <a:srgbClr val="94A3B8"/>
+                </a:solidFill>
+                <a:latin typeface="Calibri" pitchFamily="34" charset="0"/>
+                <a:ea typeface="Calibri" pitchFamily="34" charset="-122"/>
+                <a:cs typeface="Calibri" pitchFamily="34" charset="-120"/>
+              </a:rPr>
+              <a:t>final consonant doubled before 'ed'</a:t>
+            </a:r>
+            <a:endParaRPr lang="en-US" sz="700" dirty="0"/>
+          </a:p>
+        </p:txBody>
+      </p:sp>
+      <p:sp>
+        <p:nvSpPr>
+          <p:cNvPr id="26" name="Shape 24"/>
+          <p:cNvSpPr/>
+          <p:nvPr/>
+        </p:nvSpPr>
+        <p:spPr>
+          <a:xfrm>
+            <a:off x="6998818" y="2258568"/>
+            <a:ext cx="1581912" cy="292608"/>
+          </a:xfrm>
+          <a:prstGeom prst="rect">
+            <a:avLst>
+              <a:gd name="adj" fmla="val 25000"/>
+            </a:avLst>
+          </a:prstGeom>
+          <a:solidFill>
+            <a:srgbClr val="FCE7F3"/>
+          </a:solidFill>
+          <a:ln w="19050">
+            <a:solidFill>
+              <a:srgbClr val="DB2777"/>
+            </a:solidFill>
+            <a:prstDash val="solid"/>
+          </a:ln>
+          <a:effectLst>
+            <a:outerShdw sx="100000" sy="100000" kx="0" ky="0" algn="bl" rotWithShape="0" blurRad="101600" dist="38100" dir="8100000">
+              <a:srgbClr val="000000">
+                <a:alpha val="12000"/>
+              </a:srgbClr>
+            </a:outerShdw>
+          </a:effectLst>
+        </p:spPr>
+      </p:sp>
+      <p:sp>
+        <p:nvSpPr>
+          <p:cNvPr id="27" name="Text 25"/>
+          <p:cNvSpPr/>
+          <p:nvPr/>
+        </p:nvSpPr>
+        <p:spPr>
+          <a:xfrm>
+            <a:off x="6998818" y="2258568"/>
+            <a:ext cx="1581912" cy="292608"/>
+          </a:xfrm>
+          <a:prstGeom prst="rect">
+            <a:avLst/>
+          </a:prstGeom>
+          <a:noFill/>
+          <a:ln/>
+        </p:spPr>
+        <p:txBody>
+          <a:bodyPr wrap="square" lIns="0" tIns="0" rIns="0" bIns="0" rtlCol="0" anchor="ctr"/>
+          <a:lstStyle/>
+          <a:p>
+            <a:pPr algn="ctr" indent="0" marL="0">
+              <a:buNone/>
+            </a:pPr>
+            <a:r>
+              <a:rPr lang="en-US" sz="1300" b="1" dirty="0">
+                <a:solidFill>
+                  <a:srgbClr val="9D174D"/>
+                </a:solidFill>
+                <a:latin typeface="Trebuchet MS" pitchFamily="34" charset="0"/>
+                <a:ea typeface="Trebuchet MS" pitchFamily="34" charset="-122"/>
+                <a:cs typeface="Trebuchet MS" pitchFamily="34" charset="-120"/>
+              </a:rPr>
+              <a:t>ed</a:t>
+            </a:r>
+            <a:endParaRPr lang="en-US" sz="1300" dirty="0"/>
+          </a:p>
+        </p:txBody>
+      </p:sp>
+      <p:sp>
+        <p:nvSpPr>
+          <p:cNvPr id="28" name="Text 26"/>
+          <p:cNvSpPr/>
+          <p:nvPr/>
+        </p:nvSpPr>
+        <p:spPr>
+          <a:xfrm>
+            <a:off x="6998818" y="2569464"/>
+            <a:ext cx="1581912" cy="201168"/>
+          </a:xfrm>
+          <a:prstGeom prst="rect">
+            <a:avLst/>
+          </a:prstGeom>
+          <a:noFill/>
+          <a:ln/>
+        </p:spPr>
+        <p:txBody>
+          <a:bodyPr wrap="square" lIns="0" tIns="0" rIns="0" bIns="0" rtlCol="0" anchor="t"/>
+          <a:lstStyle/>
+          <a:p>
+            <a:pPr algn="ctr" indent="0" marL="0">
+              <a:buNone/>
+            </a:pPr>
+            <a:r>
+              <a:rPr lang="en-US" sz="850" dirty="0">
+                <a:solidFill>
+                  <a:srgbClr val="475569"/>
+                </a:solidFill>
+                <a:latin typeface="Calibri" pitchFamily="34" charset="0"/>
+                <a:ea typeface="Calibri" pitchFamily="34" charset="-122"/>
+                <a:cs typeface="Calibri" pitchFamily="34" charset="-120"/>
+              </a:rPr>
+              <a:t>past tense</a:t>
+            </a:r>
+            <a:endParaRPr lang="en-US" sz="850" dirty="0"/>
+          </a:p>
+        </p:txBody>
+      </p:sp>
+      <p:sp>
+        <p:nvSpPr>
+          <p:cNvPr id="29" name="Shape 27"/>
           <p:cNvSpPr/>
           <p:nvPr/>
         </p:nvSpPr>
@@ -26290,7 +26492,7 @@
       </p:sp>
       <p:sp>
         <p:nvSpPr>
-          <p:cNvPr id="23" name="Text 21"/>
+          <p:cNvPr id="30" name="Text 28"/>
           <p:cNvSpPr/>
           <p:nvPr/>
         </p:nvSpPr>
@@ -26329,7 +26531,7 @@
       </p:sp>
       <p:sp>
         <p:nvSpPr>
-          <p:cNvPr id="24" name="Shape 22"/>
+          <p:cNvPr id="31" name="Shape 29"/>
           <p:cNvSpPr/>
           <p:nvPr/>
         </p:nvSpPr>
@@ -26356,13 +26558,13 @@
       </p:sp>
       <p:sp>
         <p:nvSpPr>
-          <p:cNvPr id="25" name="Shape 23"/>
-          <p:cNvSpPr/>
-          <p:nvPr/>
-        </p:nvSpPr>
-        <p:spPr>
-          <a:xfrm>
-            <a:off x="2999232" y="3364992"/>
+          <p:cNvPr id="32" name="Shape 30"/>
+          <p:cNvSpPr/>
+          <p:nvPr/>
+        </p:nvSpPr>
+        <p:spPr>
+          <a:xfrm>
+            <a:off x="2313432" y="3364992"/>
             <a:ext cx="1645920" cy="475488"/>
           </a:xfrm>
           <a:prstGeom prst="rect">
@@ -26383,13 +26585,13 @@
       </p:sp>
       <p:sp>
         <p:nvSpPr>
-          <p:cNvPr id="26" name="Text 24"/>
-          <p:cNvSpPr/>
-          <p:nvPr/>
-        </p:nvSpPr>
-        <p:spPr>
-          <a:xfrm>
-            <a:off x="2999232" y="3364992"/>
+          <p:cNvPr id="33" name="Text 31"/>
+          <p:cNvSpPr/>
+          <p:nvPr/>
+        </p:nvSpPr>
+        <p:spPr>
+          <a:xfrm>
+            <a:off x="2313432" y="3364992"/>
             <a:ext cx="1645920" cy="475488"/>
           </a:xfrm>
           <a:prstGeom prst="rect">
@@ -26422,14 +26624,14 @@
       </p:sp>
       <p:sp>
         <p:nvSpPr>
-          <p:cNvPr id="27" name="Text 25"/>
-          <p:cNvSpPr/>
-          <p:nvPr/>
-        </p:nvSpPr>
-        <p:spPr>
-          <a:xfrm>
-            <a:off x="4645152" y="3364992"/>
-            <a:ext cx="1097280" cy="475488"/>
+          <p:cNvPr id="34" name="Text 32"/>
+          <p:cNvSpPr/>
+          <p:nvPr/>
+        </p:nvSpPr>
+        <p:spPr>
+          <a:xfrm>
+            <a:off x="3959352" y="3364992"/>
+            <a:ext cx="411480" cy="475488"/>
           </a:xfrm>
           <a:prstGeom prst="rect">
             <a:avLst/>
@@ -26461,13 +26663,13 @@
       </p:sp>
       <p:sp>
         <p:nvSpPr>
-          <p:cNvPr id="28" name="Shape 26"/>
-          <p:cNvSpPr/>
-          <p:nvPr/>
-        </p:nvSpPr>
-        <p:spPr>
-          <a:xfrm>
-            <a:off x="5742432" y="3364992"/>
+          <p:cNvPr id="35" name="Shape 33"/>
+          <p:cNvSpPr/>
+          <p:nvPr/>
+        </p:nvSpPr>
+        <p:spPr>
+          <a:xfrm>
+            <a:off x="4370832" y="3364992"/>
             <a:ext cx="1645920" cy="475488"/>
           </a:xfrm>
           <a:prstGeom prst="rect">
@@ -26488,13 +26690,13 @@
       </p:sp>
       <p:sp>
         <p:nvSpPr>
-          <p:cNvPr id="29" name="Text 27"/>
-          <p:cNvSpPr/>
-          <p:nvPr/>
-        </p:nvSpPr>
-        <p:spPr>
-          <a:xfrm>
-            <a:off x="5742432" y="3364992"/>
+          <p:cNvPr id="36" name="Text 34"/>
+          <p:cNvSpPr/>
+          <p:nvPr/>
+        </p:nvSpPr>
+        <p:spPr>
+          <a:xfrm>
+            <a:off x="4370832" y="3364992"/>
             <a:ext cx="1645920" cy="475488"/>
           </a:xfrm>
           <a:prstGeom prst="rect">
@@ -26519,7 +26721,7 @@
                 <a:ea typeface="Trebuchet MS" pitchFamily="34" charset="-122"/>
                 <a:cs typeface="Trebuchet MS" pitchFamily="34" charset="-120"/>
               </a:rPr>
-              <a:t>brace</a:t>
+              <a:t>bed</a:t>
             </a:r>
             <a:endParaRPr lang="en-US" sz="1400" dirty="0"/>
           </a:p>
@@ -26527,7 +26729,112 @@
       </p:sp>
       <p:sp>
         <p:nvSpPr>
-          <p:cNvPr id="30" name="Shape 28"/>
+          <p:cNvPr id="37" name="Text 35"/>
+          <p:cNvSpPr/>
+          <p:nvPr/>
+        </p:nvSpPr>
+        <p:spPr>
+          <a:xfrm>
+            <a:off x="6016752" y="3364992"/>
+            <a:ext cx="411480" cy="475488"/>
+          </a:xfrm>
+          <a:prstGeom prst="rect">
+            <a:avLst/>
+          </a:prstGeom>
+          <a:noFill/>
+          <a:ln/>
+        </p:spPr>
+        <p:txBody>
+          <a:bodyPr wrap="square" lIns="0" tIns="0" rIns="0" bIns="0" rtlCol="0" anchor="ctr"/>
+          <a:lstStyle/>
+          <a:p>
+            <a:pPr algn="ctr" indent="0" marL="0">
+              <a:buNone/>
+            </a:pPr>
+            <a:r>
+              <a:rPr lang="en-US" sz="1600" b="1" dirty="0">
+                <a:solidFill>
+                  <a:srgbClr val="0D9488"/>
+                </a:solidFill>
+                <a:latin typeface="Trebuchet MS" pitchFamily="34" charset="0"/>
+                <a:ea typeface="Trebuchet MS" pitchFamily="34" charset="-122"/>
+                <a:cs typeface="Trebuchet MS" pitchFamily="34" charset="-120"/>
+              </a:rPr>
+              <a:t>·</a:t>
+            </a:r>
+            <a:endParaRPr lang="en-US" sz="1600" dirty="0"/>
+          </a:p>
+        </p:txBody>
+      </p:sp>
+      <p:sp>
+        <p:nvSpPr>
+          <p:cNvPr id="38" name="Shape 36"/>
+          <p:cNvSpPr/>
+          <p:nvPr/>
+        </p:nvSpPr>
+        <p:spPr>
+          <a:xfrm>
+            <a:off x="6428232" y="3364992"/>
+            <a:ext cx="1645920" cy="475488"/>
+          </a:xfrm>
+          <a:prstGeom prst="rect">
+            <a:avLst>
+              <a:gd name="adj" fmla="val 9615"/>
+            </a:avLst>
+          </a:prstGeom>
+          <a:solidFill>
+            <a:srgbClr val="FFFFFF"/>
+          </a:solidFill>
+          <a:ln w="12700">
+            <a:solidFill>
+              <a:srgbClr val="0D9488"/>
+            </a:solidFill>
+            <a:prstDash val="solid"/>
+          </a:ln>
+        </p:spPr>
+      </p:sp>
+      <p:sp>
+        <p:nvSpPr>
+          <p:cNvPr id="39" name="Text 37"/>
+          <p:cNvSpPr/>
+          <p:nvPr/>
+        </p:nvSpPr>
+        <p:spPr>
+          <a:xfrm>
+            <a:off x="6428232" y="3364992"/>
+            <a:ext cx="1645920" cy="475488"/>
+          </a:xfrm>
+          <a:prstGeom prst="rect">
+            <a:avLst/>
+          </a:prstGeom>
+          <a:noFill/>
+          <a:ln/>
+        </p:spPr>
+        <p:txBody>
+          <a:bodyPr wrap="square" lIns="0" tIns="0" rIns="0" bIns="0" rtlCol="0" anchor="ctr"/>
+          <a:lstStyle/>
+          <a:p>
+            <a:pPr algn="ctr" indent="0" marL="0">
+              <a:buNone/>
+            </a:pPr>
+            <a:r>
+              <a:rPr lang="en-US" sz="1400" b="1" dirty="0">
+                <a:solidFill>
+                  <a:srgbClr val="0D9488"/>
+                </a:solidFill>
+                <a:latin typeface="Trebuchet MS" pitchFamily="34" charset="0"/>
+                <a:ea typeface="Trebuchet MS" pitchFamily="34" charset="-122"/>
+                <a:cs typeface="Trebuchet MS" pitchFamily="34" charset="-120"/>
+              </a:rPr>
+              <a:t>ded</a:t>
+            </a:r>
+            <a:endParaRPr lang="en-US" sz="1400" dirty="0"/>
+          </a:p>
+        </p:txBody>
+      </p:sp>
+      <p:sp>
+        <p:nvSpPr>
+          <p:cNvPr id="40" name="Shape 38"/>
           <p:cNvSpPr/>
           <p:nvPr/>
         </p:nvSpPr>
@@ -26554,7 +26861,7 @@
       </p:sp>
       <p:sp>
         <p:nvSpPr>
-          <p:cNvPr id="31" name="Text 29"/>
+          <p:cNvPr id="41" name="Text 39"/>
           <p:cNvSpPr/>
           <p:nvPr/>
         </p:nvSpPr>
@@ -26593,7 +26900,7 @@
       </p:sp>
       <p:sp>
         <p:nvSpPr>
-          <p:cNvPr id="32" name="Shape 30"/>
+          <p:cNvPr id="42" name="Shape 40"/>
           <p:cNvSpPr/>
           <p:nvPr/>
         </p:nvSpPr>
@@ -26620,7 +26927,7 @@
       </p:sp>
       <p:sp>
         <p:nvSpPr>
-          <p:cNvPr id="33" name="Text 31"/>
+          <p:cNvPr id="43" name="Text 41"/>
           <p:cNvSpPr/>
           <p:nvPr/>
         </p:nvSpPr>
@@ -26943,7 +27250,7 @@
                 <a:ea typeface="Calibri" pitchFamily="34" charset="-122"/>
                 <a:cs typeface="Calibri" pitchFamily="34" charset="-120"/>
               </a:rPr>
-              <a:t>Word Labs  •  wordlabs.app  •  Prefix: 'em-' = put into, make</a:t>
+              <a:t>Word Labs  •  wordlabs.app  •  Prefix: 'em-' = put into, cause to be</a:t>
             </a:r>
             <a:endParaRPr lang="en-US" sz="800" dirty="0"/>
           </a:p>
@@ -27082,7 +27389,7 @@
                 <a:ea typeface="Trebuchet MS" pitchFamily="34" charset="-122"/>
                 <a:cs typeface="Trebuchet MS" pitchFamily="34" charset="-120"/>
               </a:rPr>
-              <a:t>embrace</a:t>
+              <a:t>embedded</a:t>
             </a:r>
             <a:endParaRPr lang="en-US" sz="2800" dirty="0"/>
           </a:p>
@@ -27162,8 +27469,8 @@
         </p:nvSpPr>
         <p:spPr>
           <a:xfrm>
-            <a:off x="2938272" y="2258568"/>
-            <a:ext cx="1828800" cy="292608"/>
+            <a:off x="1989734" y="2258568"/>
+            <a:ext cx="1581912" cy="292608"/>
           </a:xfrm>
           <a:prstGeom prst="rect">
             <a:avLst>
@@ -27196,8 +27503,8 @@
         </p:nvSpPr>
         <p:spPr>
           <a:xfrm>
-            <a:off x="2938272" y="2258568"/>
-            <a:ext cx="1828800" cy="292608"/>
+            <a:off x="1989734" y="2258568"/>
+            <a:ext cx="1581912" cy="292608"/>
           </a:xfrm>
           <a:prstGeom prst="rect">
             <a:avLst/>
@@ -27235,8 +27542,8 @@
         </p:nvSpPr>
         <p:spPr>
           <a:xfrm>
-            <a:off x="2938272" y="2569464"/>
-            <a:ext cx="1828800" cy="201168"/>
+            <a:off x="1989734" y="2569464"/>
+            <a:ext cx="1581912" cy="201168"/>
           </a:xfrm>
           <a:prstGeom prst="rect">
             <a:avLst/>
@@ -27260,7 +27567,7 @@
                 <a:ea typeface="Calibri" pitchFamily="34" charset="-122"/>
                 <a:cs typeface="Calibri" pitchFamily="34" charset="-120"/>
               </a:rPr>
-              <a:t>put into, make</a:t>
+              <a:t>put into, cause to be</a:t>
             </a:r>
             <a:endParaRPr lang="en-US" sz="850" dirty="0"/>
           </a:p>
@@ -27274,8 +27581,8 @@
         </p:nvSpPr>
         <p:spPr>
           <a:xfrm>
-            <a:off x="5803392" y="2258568"/>
-            <a:ext cx="1828800" cy="292608"/>
+            <a:off x="3659429" y="2258568"/>
+            <a:ext cx="1581912" cy="292608"/>
           </a:xfrm>
           <a:prstGeom prst="rect">
             <a:avLst>
@@ -27308,8 +27615,8 @@
         </p:nvSpPr>
         <p:spPr>
           <a:xfrm>
-            <a:off x="5803392" y="2258568"/>
-            <a:ext cx="1828800" cy="292608"/>
+            <a:off x="3659429" y="2258568"/>
+            <a:ext cx="1581912" cy="292608"/>
           </a:xfrm>
           <a:prstGeom prst="rect">
             <a:avLst/>
@@ -27333,7 +27640,7 @@
                 <a:ea typeface="Trebuchet MS" pitchFamily="34" charset="-122"/>
                 <a:cs typeface="Trebuchet MS" pitchFamily="34" charset="-120"/>
               </a:rPr>
-              <a:t>brace</a:t>
+              <a:t>bed</a:t>
             </a:r>
             <a:endParaRPr lang="en-US" sz="1300" dirty="0"/>
           </a:p>
@@ -27347,8 +27654,8 @@
         </p:nvSpPr>
         <p:spPr>
           <a:xfrm>
-            <a:off x="5803392" y="2569464"/>
-            <a:ext cx="1828800" cy="201168"/>
+            <a:off x="3659429" y="2569464"/>
+            <a:ext cx="1581912" cy="201168"/>
           </a:xfrm>
           <a:prstGeom prst="rect">
             <a:avLst/>
@@ -27372,7 +27679,7 @@
                 <a:ea typeface="Calibri" pitchFamily="34" charset="-122"/>
                 <a:cs typeface="Calibri" pitchFamily="34" charset="-120"/>
               </a:rPr>
-              <a:t>arms, hold</a:t>
+              <a:t>a base, to fix in place</a:t>
             </a:r>
             <a:endParaRPr lang="en-US" sz="850" dirty="0"/>
           </a:p>
@@ -27381,6 +27688,269 @@
       <p:sp>
         <p:nvSpPr>
           <p:cNvPr id="22" name="Shape 20"/>
+          <p:cNvSpPr/>
+          <p:nvPr/>
+        </p:nvSpPr>
+        <p:spPr>
+          <a:xfrm>
+            <a:off x="5329123" y="2258568"/>
+            <a:ext cx="1581912" cy="292608"/>
+          </a:xfrm>
+          <a:prstGeom prst="rect">
+            <a:avLst>
+              <a:gd name="adj" fmla="val 25000"/>
+            </a:avLst>
+          </a:prstGeom>
+          <a:solidFill>
+            <a:srgbClr val="FCE7F3"/>
+          </a:solidFill>
+          <a:ln w="19050">
+            <a:solidFill>
+              <a:srgbClr val="DB2777"/>
+            </a:solidFill>
+            <a:prstDash val="solid"/>
+          </a:ln>
+          <a:effectLst>
+            <a:outerShdw sx="100000" sy="100000" kx="0" ky="0" algn="bl" rotWithShape="0" blurRad="101600" dist="38100" dir="8100000">
+              <a:srgbClr val="000000">
+                <a:alpha val="12000"/>
+              </a:srgbClr>
+            </a:outerShdw>
+          </a:effectLst>
+        </p:spPr>
+      </p:sp>
+      <p:sp>
+        <p:nvSpPr>
+          <p:cNvPr id="23" name="Text 21"/>
+          <p:cNvSpPr/>
+          <p:nvPr/>
+        </p:nvSpPr>
+        <p:spPr>
+          <a:xfrm>
+            <a:off x="5329123" y="2258568"/>
+            <a:ext cx="1581912" cy="292608"/>
+          </a:xfrm>
+          <a:prstGeom prst="rect">
+            <a:avLst/>
+          </a:prstGeom>
+          <a:noFill/>
+          <a:ln/>
+        </p:spPr>
+        <p:txBody>
+          <a:bodyPr wrap="square" lIns="0" tIns="0" rIns="0" bIns="0" rtlCol="0" anchor="ctr"/>
+          <a:lstStyle/>
+          <a:p>
+            <a:pPr algn="ctr" indent="0" marL="0">
+              <a:buNone/>
+            </a:pPr>
+            <a:r>
+              <a:rPr lang="en-US" sz="1300" b="1" dirty="0">
+                <a:solidFill>
+                  <a:srgbClr val="9D174D"/>
+                </a:solidFill>
+                <a:latin typeface="Trebuchet MS" pitchFamily="34" charset="0"/>
+                <a:ea typeface="Trebuchet MS" pitchFamily="34" charset="-122"/>
+                <a:cs typeface="Trebuchet MS" pitchFamily="34" charset="-120"/>
+              </a:rPr>
+              <a:t>d</a:t>
+            </a:r>
+            <a:endParaRPr lang="en-US" sz="1300" dirty="0"/>
+          </a:p>
+        </p:txBody>
+      </p:sp>
+      <p:sp>
+        <p:nvSpPr>
+          <p:cNvPr id="24" name="Text 22"/>
+          <p:cNvSpPr/>
+          <p:nvPr/>
+        </p:nvSpPr>
+        <p:spPr>
+          <a:xfrm>
+            <a:off x="5329123" y="2569464"/>
+            <a:ext cx="1581912" cy="201168"/>
+          </a:xfrm>
+          <a:prstGeom prst="rect">
+            <a:avLst/>
+          </a:prstGeom>
+          <a:noFill/>
+          <a:ln/>
+        </p:spPr>
+        <p:txBody>
+          <a:bodyPr wrap="square" lIns="0" tIns="0" rIns="0" bIns="0" rtlCol="0" anchor="t"/>
+          <a:lstStyle/>
+          <a:p>
+            <a:pPr algn="ctr" indent="0" marL="0">
+              <a:buNone/>
+            </a:pPr>
+            <a:r>
+              <a:rPr lang="en-US" sz="850" dirty="0">
+                <a:solidFill>
+                  <a:srgbClr val="475569"/>
+                </a:solidFill>
+                <a:latin typeface="Calibri" pitchFamily="34" charset="0"/>
+                <a:ea typeface="Calibri" pitchFamily="34" charset="-122"/>
+                <a:cs typeface="Calibri" pitchFamily="34" charset="-120"/>
+              </a:rPr>
+              <a:t>past tense</a:t>
+            </a:r>
+            <a:endParaRPr lang="en-US" sz="850" dirty="0"/>
+          </a:p>
+        </p:txBody>
+      </p:sp>
+      <p:sp>
+        <p:nvSpPr>
+          <p:cNvPr id="25" name="Text 23"/>
+          <p:cNvSpPr/>
+          <p:nvPr/>
+        </p:nvSpPr>
+        <p:spPr>
+          <a:xfrm>
+            <a:off x="5329123" y="2752344"/>
+            <a:ext cx="1581912" cy="182880"/>
+          </a:xfrm>
+          <a:prstGeom prst="rect">
+            <a:avLst/>
+          </a:prstGeom>
+          <a:noFill/>
+          <a:ln/>
+        </p:spPr>
+        <p:txBody>
+          <a:bodyPr wrap="square" lIns="0" tIns="0" rIns="0" bIns="0" rtlCol="0" anchor="t"/>
+          <a:lstStyle/>
+          <a:p>
+            <a:pPr algn="ctr" indent="0" marL="0">
+              <a:buNone/>
+            </a:pPr>
+            <a:r>
+              <a:rPr lang="en-US" sz="700" i="1" dirty="0">
+                <a:solidFill>
+                  <a:srgbClr val="94A3B8"/>
+                </a:solidFill>
+                <a:latin typeface="Calibri" pitchFamily="34" charset="0"/>
+                <a:ea typeface="Calibri" pitchFamily="34" charset="-122"/>
+                <a:cs typeface="Calibri" pitchFamily="34" charset="-120"/>
+              </a:rPr>
+              <a:t>final consonant doubled before 'ed'</a:t>
+            </a:r>
+            <a:endParaRPr lang="en-US" sz="700" dirty="0"/>
+          </a:p>
+        </p:txBody>
+      </p:sp>
+      <p:sp>
+        <p:nvSpPr>
+          <p:cNvPr id="26" name="Shape 24"/>
+          <p:cNvSpPr/>
+          <p:nvPr/>
+        </p:nvSpPr>
+        <p:spPr>
+          <a:xfrm>
+            <a:off x="6998818" y="2258568"/>
+            <a:ext cx="1581912" cy="292608"/>
+          </a:xfrm>
+          <a:prstGeom prst="rect">
+            <a:avLst>
+              <a:gd name="adj" fmla="val 25000"/>
+            </a:avLst>
+          </a:prstGeom>
+          <a:solidFill>
+            <a:srgbClr val="FCE7F3"/>
+          </a:solidFill>
+          <a:ln w="19050">
+            <a:solidFill>
+              <a:srgbClr val="DB2777"/>
+            </a:solidFill>
+            <a:prstDash val="solid"/>
+          </a:ln>
+          <a:effectLst>
+            <a:outerShdw sx="100000" sy="100000" kx="0" ky="0" algn="bl" rotWithShape="0" blurRad="101600" dist="38100" dir="8100000">
+              <a:srgbClr val="000000">
+                <a:alpha val="12000"/>
+              </a:srgbClr>
+            </a:outerShdw>
+          </a:effectLst>
+        </p:spPr>
+      </p:sp>
+      <p:sp>
+        <p:nvSpPr>
+          <p:cNvPr id="27" name="Text 25"/>
+          <p:cNvSpPr/>
+          <p:nvPr/>
+        </p:nvSpPr>
+        <p:spPr>
+          <a:xfrm>
+            <a:off x="6998818" y="2258568"/>
+            <a:ext cx="1581912" cy="292608"/>
+          </a:xfrm>
+          <a:prstGeom prst="rect">
+            <a:avLst/>
+          </a:prstGeom>
+          <a:noFill/>
+          <a:ln/>
+        </p:spPr>
+        <p:txBody>
+          <a:bodyPr wrap="square" lIns="0" tIns="0" rIns="0" bIns="0" rtlCol="0" anchor="ctr"/>
+          <a:lstStyle/>
+          <a:p>
+            <a:pPr algn="ctr" indent="0" marL="0">
+              <a:buNone/>
+            </a:pPr>
+            <a:r>
+              <a:rPr lang="en-US" sz="1300" b="1" dirty="0">
+                <a:solidFill>
+                  <a:srgbClr val="9D174D"/>
+                </a:solidFill>
+                <a:latin typeface="Trebuchet MS" pitchFamily="34" charset="0"/>
+                <a:ea typeface="Trebuchet MS" pitchFamily="34" charset="-122"/>
+                <a:cs typeface="Trebuchet MS" pitchFamily="34" charset="-120"/>
+              </a:rPr>
+              <a:t>ed</a:t>
+            </a:r>
+            <a:endParaRPr lang="en-US" sz="1300" dirty="0"/>
+          </a:p>
+        </p:txBody>
+      </p:sp>
+      <p:sp>
+        <p:nvSpPr>
+          <p:cNvPr id="28" name="Text 26"/>
+          <p:cNvSpPr/>
+          <p:nvPr/>
+        </p:nvSpPr>
+        <p:spPr>
+          <a:xfrm>
+            <a:off x="6998818" y="2569464"/>
+            <a:ext cx="1581912" cy="201168"/>
+          </a:xfrm>
+          <a:prstGeom prst="rect">
+            <a:avLst/>
+          </a:prstGeom>
+          <a:noFill/>
+          <a:ln/>
+        </p:spPr>
+        <p:txBody>
+          <a:bodyPr wrap="square" lIns="0" tIns="0" rIns="0" bIns="0" rtlCol="0" anchor="t"/>
+          <a:lstStyle/>
+          <a:p>
+            <a:pPr algn="ctr" indent="0" marL="0">
+              <a:buNone/>
+            </a:pPr>
+            <a:r>
+              <a:rPr lang="en-US" sz="850" dirty="0">
+                <a:solidFill>
+                  <a:srgbClr val="475569"/>
+                </a:solidFill>
+                <a:latin typeface="Calibri" pitchFamily="34" charset="0"/>
+                <a:ea typeface="Calibri" pitchFamily="34" charset="-122"/>
+                <a:cs typeface="Calibri" pitchFamily="34" charset="-120"/>
+              </a:rPr>
+              <a:t>past tense</a:t>
+            </a:r>
+            <a:endParaRPr lang="en-US" sz="850" dirty="0"/>
+          </a:p>
+        </p:txBody>
+      </p:sp>
+      <p:sp>
+        <p:nvSpPr>
+          <p:cNvPr id="29" name="Shape 27"/>
           <p:cNvSpPr/>
           <p:nvPr/>
         </p:nvSpPr>
@@ -27407,7 +27977,7 @@
       </p:sp>
       <p:sp>
         <p:nvSpPr>
-          <p:cNvPr id="23" name="Text 21"/>
+          <p:cNvPr id="30" name="Text 28"/>
           <p:cNvSpPr/>
           <p:nvPr/>
         </p:nvSpPr>
@@ -27446,7 +28016,7 @@
       </p:sp>
       <p:sp>
         <p:nvSpPr>
-          <p:cNvPr id="24" name="Shape 22"/>
+          <p:cNvPr id="31" name="Shape 29"/>
           <p:cNvSpPr/>
           <p:nvPr/>
         </p:nvSpPr>
@@ -27473,13 +28043,13 @@
       </p:sp>
       <p:sp>
         <p:nvSpPr>
-          <p:cNvPr id="25" name="Shape 23"/>
-          <p:cNvSpPr/>
-          <p:nvPr/>
-        </p:nvSpPr>
-        <p:spPr>
-          <a:xfrm>
-            <a:off x="2999232" y="3364992"/>
+          <p:cNvPr id="32" name="Shape 30"/>
+          <p:cNvSpPr/>
+          <p:nvPr/>
+        </p:nvSpPr>
+        <p:spPr>
+          <a:xfrm>
+            <a:off x="2313432" y="3364992"/>
             <a:ext cx="1645920" cy="475488"/>
           </a:xfrm>
           <a:prstGeom prst="rect">
@@ -27500,13 +28070,13 @@
       </p:sp>
       <p:sp>
         <p:nvSpPr>
-          <p:cNvPr id="26" name="Text 24"/>
-          <p:cNvSpPr/>
-          <p:nvPr/>
-        </p:nvSpPr>
-        <p:spPr>
-          <a:xfrm>
-            <a:off x="2999232" y="3364992"/>
+          <p:cNvPr id="33" name="Text 31"/>
+          <p:cNvSpPr/>
+          <p:nvPr/>
+        </p:nvSpPr>
+        <p:spPr>
+          <a:xfrm>
+            <a:off x="2313432" y="3364992"/>
             <a:ext cx="1645920" cy="475488"/>
           </a:xfrm>
           <a:prstGeom prst="rect">
@@ -27539,14 +28109,14 @@
       </p:sp>
       <p:sp>
         <p:nvSpPr>
-          <p:cNvPr id="27" name="Text 25"/>
-          <p:cNvSpPr/>
-          <p:nvPr/>
-        </p:nvSpPr>
-        <p:spPr>
-          <a:xfrm>
-            <a:off x="4645152" y="3364992"/>
-            <a:ext cx="1097280" cy="475488"/>
+          <p:cNvPr id="34" name="Text 32"/>
+          <p:cNvSpPr/>
+          <p:nvPr/>
+        </p:nvSpPr>
+        <p:spPr>
+          <a:xfrm>
+            <a:off x="3959352" y="3364992"/>
+            <a:ext cx="411480" cy="475488"/>
           </a:xfrm>
           <a:prstGeom prst="rect">
             <a:avLst/>
@@ -27578,13 +28148,13 @@
       </p:sp>
       <p:sp>
         <p:nvSpPr>
-          <p:cNvPr id="28" name="Shape 26"/>
-          <p:cNvSpPr/>
-          <p:nvPr/>
-        </p:nvSpPr>
-        <p:spPr>
-          <a:xfrm>
-            <a:off x="5742432" y="3364992"/>
+          <p:cNvPr id="35" name="Shape 33"/>
+          <p:cNvSpPr/>
+          <p:nvPr/>
+        </p:nvSpPr>
+        <p:spPr>
+          <a:xfrm>
+            <a:off x="4370832" y="3364992"/>
             <a:ext cx="1645920" cy="475488"/>
           </a:xfrm>
           <a:prstGeom prst="rect">
@@ -27605,13 +28175,13 @@
       </p:sp>
       <p:sp>
         <p:nvSpPr>
-          <p:cNvPr id="29" name="Text 27"/>
-          <p:cNvSpPr/>
-          <p:nvPr/>
-        </p:nvSpPr>
-        <p:spPr>
-          <a:xfrm>
-            <a:off x="5742432" y="3364992"/>
+          <p:cNvPr id="36" name="Text 34"/>
+          <p:cNvSpPr/>
+          <p:nvPr/>
+        </p:nvSpPr>
+        <p:spPr>
+          <a:xfrm>
+            <a:off x="4370832" y="3364992"/>
             <a:ext cx="1645920" cy="475488"/>
           </a:xfrm>
           <a:prstGeom prst="rect">
@@ -27636,7 +28206,7 @@
                 <a:ea typeface="Trebuchet MS" pitchFamily="34" charset="-122"/>
                 <a:cs typeface="Trebuchet MS" pitchFamily="34" charset="-120"/>
               </a:rPr>
-              <a:t>brace</a:t>
+              <a:t>bed</a:t>
             </a:r>
             <a:endParaRPr lang="en-US" sz="1400" dirty="0"/>
           </a:p>
@@ -27644,7 +28214,112 @@
       </p:sp>
       <p:sp>
         <p:nvSpPr>
-          <p:cNvPr id="30" name="Shape 28"/>
+          <p:cNvPr id="37" name="Text 35"/>
+          <p:cNvSpPr/>
+          <p:nvPr/>
+        </p:nvSpPr>
+        <p:spPr>
+          <a:xfrm>
+            <a:off x="6016752" y="3364992"/>
+            <a:ext cx="411480" cy="475488"/>
+          </a:xfrm>
+          <a:prstGeom prst="rect">
+            <a:avLst/>
+          </a:prstGeom>
+          <a:noFill/>
+          <a:ln/>
+        </p:spPr>
+        <p:txBody>
+          <a:bodyPr wrap="square" lIns="0" tIns="0" rIns="0" bIns="0" rtlCol="0" anchor="ctr"/>
+          <a:lstStyle/>
+          <a:p>
+            <a:pPr algn="ctr" indent="0" marL="0">
+              <a:buNone/>
+            </a:pPr>
+            <a:r>
+              <a:rPr lang="en-US" sz="1600" b="1" dirty="0">
+                <a:solidFill>
+                  <a:srgbClr val="0D9488"/>
+                </a:solidFill>
+                <a:latin typeface="Trebuchet MS" pitchFamily="34" charset="0"/>
+                <a:ea typeface="Trebuchet MS" pitchFamily="34" charset="-122"/>
+                <a:cs typeface="Trebuchet MS" pitchFamily="34" charset="-120"/>
+              </a:rPr>
+              <a:t>·</a:t>
+            </a:r>
+            <a:endParaRPr lang="en-US" sz="1600" dirty="0"/>
+          </a:p>
+        </p:txBody>
+      </p:sp>
+      <p:sp>
+        <p:nvSpPr>
+          <p:cNvPr id="38" name="Shape 36"/>
+          <p:cNvSpPr/>
+          <p:nvPr/>
+        </p:nvSpPr>
+        <p:spPr>
+          <a:xfrm>
+            <a:off x="6428232" y="3364992"/>
+            <a:ext cx="1645920" cy="475488"/>
+          </a:xfrm>
+          <a:prstGeom prst="rect">
+            <a:avLst>
+              <a:gd name="adj" fmla="val 9615"/>
+            </a:avLst>
+          </a:prstGeom>
+          <a:solidFill>
+            <a:srgbClr val="FFFFFF"/>
+          </a:solidFill>
+          <a:ln w="12700">
+            <a:solidFill>
+              <a:srgbClr val="0D9488"/>
+            </a:solidFill>
+            <a:prstDash val="solid"/>
+          </a:ln>
+        </p:spPr>
+      </p:sp>
+      <p:sp>
+        <p:nvSpPr>
+          <p:cNvPr id="39" name="Text 37"/>
+          <p:cNvSpPr/>
+          <p:nvPr/>
+        </p:nvSpPr>
+        <p:spPr>
+          <a:xfrm>
+            <a:off x="6428232" y="3364992"/>
+            <a:ext cx="1645920" cy="475488"/>
+          </a:xfrm>
+          <a:prstGeom prst="rect">
+            <a:avLst/>
+          </a:prstGeom>
+          <a:noFill/>
+          <a:ln/>
+        </p:spPr>
+        <p:txBody>
+          <a:bodyPr wrap="square" lIns="0" tIns="0" rIns="0" bIns="0" rtlCol="0" anchor="ctr"/>
+          <a:lstStyle/>
+          <a:p>
+            <a:pPr algn="ctr" indent="0" marL="0">
+              <a:buNone/>
+            </a:pPr>
+            <a:r>
+              <a:rPr lang="en-US" sz="1400" b="1" dirty="0">
+                <a:solidFill>
+                  <a:srgbClr val="0D9488"/>
+                </a:solidFill>
+                <a:latin typeface="Trebuchet MS" pitchFamily="34" charset="0"/>
+                <a:ea typeface="Trebuchet MS" pitchFamily="34" charset="-122"/>
+                <a:cs typeface="Trebuchet MS" pitchFamily="34" charset="-120"/>
+              </a:rPr>
+              <a:t>ded</a:t>
+            </a:r>
+            <a:endParaRPr lang="en-US" sz="1400" dirty="0"/>
+          </a:p>
+        </p:txBody>
+      </p:sp>
+      <p:sp>
+        <p:nvSpPr>
+          <p:cNvPr id="40" name="Shape 38"/>
           <p:cNvSpPr/>
           <p:nvPr/>
         </p:nvSpPr>
@@ -27671,7 +28346,7 @@
       </p:sp>
       <p:sp>
         <p:nvSpPr>
-          <p:cNvPr id="31" name="Text 29"/>
+          <p:cNvPr id="41" name="Text 39"/>
           <p:cNvSpPr/>
           <p:nvPr/>
         </p:nvSpPr>
@@ -27710,18 +28385,18 @@
       </p:sp>
       <p:sp>
         <p:nvSpPr>
-          <p:cNvPr id="32" name="Shape 30"/>
+          <p:cNvPr id="42" name="Shape 40"/>
           <p:cNvSpPr/>
           <p:nvPr/>
         </p:nvSpPr>
         <p:spPr>
           <a:xfrm>
             <a:off x="1874520" y="4096512"/>
-            <a:ext cx="6903720" cy="804672"/>
+            <a:ext cx="6903720" cy="658368"/>
           </a:xfrm>
           <a:prstGeom prst="rect">
             <a:avLst>
-              <a:gd name="adj" fmla="val 6818"/>
+              <a:gd name="adj" fmla="val 8333"/>
             </a:avLst>
           </a:prstGeom>
           <a:solidFill>
@@ -27737,18 +28412,18 @@
       </p:sp>
       <p:sp>
         <p:nvSpPr>
-          <p:cNvPr id="33" name="Shape 31"/>
-          <p:cNvSpPr/>
-          <p:nvPr/>
-        </p:nvSpPr>
-        <p:spPr>
-          <a:xfrm>
-            <a:off x="2254649" y="4169664"/>
-            <a:ext cx="685800" cy="384048"/>
+          <p:cNvPr id="43" name="Shape 41"/>
+          <p:cNvSpPr/>
+          <p:nvPr/>
+        </p:nvSpPr>
+        <p:spPr>
+          <a:xfrm>
+            <a:off x="2124837" y="4169664"/>
+            <a:ext cx="685800" cy="475488"/>
           </a:xfrm>
           <a:prstGeom prst="rect">
             <a:avLst>
-              <a:gd name="adj" fmla="val 9524"/>
+              <a:gd name="adj" fmla="val 7692"/>
             </a:avLst>
           </a:prstGeom>
           <a:solidFill>
@@ -27764,14 +28439,14 @@
       </p:sp>
       <p:sp>
         <p:nvSpPr>
-          <p:cNvPr id="34" name="Text 32"/>
-          <p:cNvSpPr/>
-          <p:nvPr/>
-        </p:nvSpPr>
-        <p:spPr>
-          <a:xfrm>
-            <a:off x="2254649" y="4169664"/>
-            <a:ext cx="685800" cy="384048"/>
+          <p:cNvPr id="44" name="Text 42"/>
+          <p:cNvSpPr/>
+          <p:nvPr/>
+        </p:nvSpPr>
+        <p:spPr>
+          <a:xfrm>
+            <a:off x="2124837" y="4169664"/>
+            <a:ext cx="685800" cy="475488"/>
           </a:xfrm>
           <a:prstGeom prst="rect">
             <a:avLst/>
@@ -27803,18 +28478,18 @@
       </p:sp>
       <p:sp>
         <p:nvSpPr>
-          <p:cNvPr id="35" name="Shape 33"/>
-          <p:cNvSpPr/>
-          <p:nvPr/>
-        </p:nvSpPr>
-        <p:spPr>
-          <a:xfrm>
-            <a:off x="3293146" y="4169664"/>
-            <a:ext cx="685800" cy="384048"/>
+          <p:cNvPr id="45" name="Shape 43"/>
+          <p:cNvSpPr/>
+          <p:nvPr/>
+        </p:nvSpPr>
+        <p:spPr>
+          <a:xfrm>
+            <a:off x="3033522" y="4169664"/>
+            <a:ext cx="685800" cy="475488"/>
           </a:xfrm>
           <a:prstGeom prst="rect">
             <a:avLst>
-              <a:gd name="adj" fmla="val 9524"/>
+              <a:gd name="adj" fmla="val 7692"/>
             </a:avLst>
           </a:prstGeom>
           <a:solidFill>
@@ -27830,14 +28505,14 @@
       </p:sp>
       <p:sp>
         <p:nvSpPr>
-          <p:cNvPr id="36" name="Text 34"/>
-          <p:cNvSpPr/>
-          <p:nvPr/>
-        </p:nvSpPr>
-        <p:spPr>
-          <a:xfrm>
-            <a:off x="3293146" y="4169664"/>
-            <a:ext cx="685800" cy="384048"/>
+          <p:cNvPr id="46" name="Text 44"/>
+          <p:cNvSpPr/>
+          <p:nvPr/>
+        </p:nvSpPr>
+        <p:spPr>
+          <a:xfrm>
+            <a:off x="3033522" y="4169664"/>
+            <a:ext cx="685800" cy="475488"/>
           </a:xfrm>
           <a:prstGeom prst="rect">
             <a:avLst/>
@@ -27869,18 +28544,18 @@
       </p:sp>
       <p:sp>
         <p:nvSpPr>
-          <p:cNvPr id="37" name="Shape 35"/>
-          <p:cNvSpPr/>
-          <p:nvPr/>
-        </p:nvSpPr>
-        <p:spPr>
-          <a:xfrm>
-            <a:off x="4331643" y="4169664"/>
-            <a:ext cx="685800" cy="384048"/>
+          <p:cNvPr id="47" name="Shape 45"/>
+          <p:cNvSpPr/>
+          <p:nvPr/>
+        </p:nvSpPr>
+        <p:spPr>
+          <a:xfrm>
+            <a:off x="3942207" y="4169664"/>
+            <a:ext cx="685800" cy="475488"/>
           </a:xfrm>
           <a:prstGeom prst="rect">
             <a:avLst>
-              <a:gd name="adj" fmla="val 9524"/>
+              <a:gd name="adj" fmla="val 7692"/>
             </a:avLst>
           </a:prstGeom>
           <a:solidFill>
@@ -27896,14 +28571,14 @@
       </p:sp>
       <p:sp>
         <p:nvSpPr>
-          <p:cNvPr id="38" name="Text 36"/>
-          <p:cNvSpPr/>
-          <p:nvPr/>
-        </p:nvSpPr>
-        <p:spPr>
-          <a:xfrm>
-            <a:off x="4331643" y="4169664"/>
-            <a:ext cx="685800" cy="384048"/>
+          <p:cNvPr id="48" name="Text 46"/>
+          <p:cNvSpPr/>
+          <p:nvPr/>
+        </p:nvSpPr>
+        <p:spPr>
+          <a:xfrm>
+            <a:off x="3942207" y="4169664"/>
+            <a:ext cx="685800" cy="475488"/>
           </a:xfrm>
           <a:prstGeom prst="rect">
             <a:avLst/>
@@ -27935,18 +28610,18 @@
       </p:sp>
       <p:sp>
         <p:nvSpPr>
-          <p:cNvPr id="39" name="Shape 37"/>
-          <p:cNvSpPr/>
-          <p:nvPr/>
-        </p:nvSpPr>
-        <p:spPr>
-          <a:xfrm>
-            <a:off x="5370141" y="4169664"/>
-            <a:ext cx="685800" cy="384048"/>
+          <p:cNvPr id="49" name="Shape 47"/>
+          <p:cNvSpPr/>
+          <p:nvPr/>
+        </p:nvSpPr>
+        <p:spPr>
+          <a:xfrm>
+            <a:off x="4850892" y="4169664"/>
+            <a:ext cx="685800" cy="475488"/>
           </a:xfrm>
           <a:prstGeom prst="rect">
             <a:avLst>
-              <a:gd name="adj" fmla="val 9524"/>
+              <a:gd name="adj" fmla="val 7692"/>
             </a:avLst>
           </a:prstGeom>
           <a:solidFill>
@@ -27962,14 +28637,14 @@
       </p:sp>
       <p:sp>
         <p:nvSpPr>
-          <p:cNvPr id="40" name="Text 38"/>
-          <p:cNvSpPr/>
-          <p:nvPr/>
-        </p:nvSpPr>
-        <p:spPr>
-          <a:xfrm>
-            <a:off x="5370141" y="4169664"/>
-            <a:ext cx="685800" cy="384048"/>
+          <p:cNvPr id="50" name="Text 48"/>
+          <p:cNvSpPr/>
+          <p:nvPr/>
+        </p:nvSpPr>
+        <p:spPr>
+          <a:xfrm>
+            <a:off x="4850892" y="4169664"/>
+            <a:ext cx="685800" cy="475488"/>
           </a:xfrm>
           <a:prstGeom prst="rect">
             <a:avLst/>
@@ -27993,7 +28668,7 @@
                 <a:ea typeface="Trebuchet MS" pitchFamily="34" charset="-122"/>
                 <a:cs typeface="Trebuchet MS" pitchFamily="34" charset="-120"/>
               </a:rPr>
-              <a:t>r</a:t>
+              <a:t>e</a:t>
             </a:r>
             <a:endParaRPr lang="en-US" sz="900" dirty="0"/>
           </a:p>
@@ -28001,18 +28676,18 @@
       </p:sp>
       <p:sp>
         <p:nvSpPr>
-          <p:cNvPr id="41" name="Shape 39"/>
-          <p:cNvSpPr/>
-          <p:nvPr/>
-        </p:nvSpPr>
-        <p:spPr>
-          <a:xfrm>
-            <a:off x="6408638" y="4169664"/>
-            <a:ext cx="685800" cy="384048"/>
+          <p:cNvPr id="51" name="Shape 49"/>
+          <p:cNvSpPr/>
+          <p:nvPr/>
+        </p:nvSpPr>
+        <p:spPr>
+          <a:xfrm>
+            <a:off x="5759577" y="4169664"/>
+            <a:ext cx="685800" cy="475488"/>
           </a:xfrm>
           <a:prstGeom prst="rect">
             <a:avLst>
-              <a:gd name="adj" fmla="val 9524"/>
+              <a:gd name="adj" fmla="val 7692"/>
             </a:avLst>
           </a:prstGeom>
           <a:solidFill>
@@ -28028,14 +28703,14 @@
       </p:sp>
       <p:sp>
         <p:nvSpPr>
-          <p:cNvPr id="42" name="Text 40"/>
-          <p:cNvSpPr/>
-          <p:nvPr/>
-        </p:nvSpPr>
-        <p:spPr>
-          <a:xfrm>
-            <a:off x="6408638" y="4169664"/>
-            <a:ext cx="685800" cy="384048"/>
+          <p:cNvPr id="52" name="Text 50"/>
+          <p:cNvSpPr/>
+          <p:nvPr/>
+        </p:nvSpPr>
+        <p:spPr>
+          <a:xfrm>
+            <a:off x="5759577" y="4169664"/>
+            <a:ext cx="685800" cy="475488"/>
           </a:xfrm>
           <a:prstGeom prst="rect">
             <a:avLst/>
@@ -28059,7 +28734,7 @@
                 <a:ea typeface="Trebuchet MS" pitchFamily="34" charset="-122"/>
                 <a:cs typeface="Trebuchet MS" pitchFamily="34" charset="-120"/>
               </a:rPr>
-              <a:t>a</a:t>
+              <a:t>dd</a:t>
             </a:r>
             <a:endParaRPr lang="en-US" sz="900" dirty="0"/>
           </a:p>
@@ -28067,18 +28742,18 @@
       </p:sp>
       <p:sp>
         <p:nvSpPr>
-          <p:cNvPr id="43" name="Shape 41"/>
-          <p:cNvSpPr/>
-          <p:nvPr/>
-        </p:nvSpPr>
-        <p:spPr>
-          <a:xfrm>
-            <a:off x="7447135" y="4169664"/>
-            <a:ext cx="685800" cy="384048"/>
+          <p:cNvPr id="53" name="Shape 51"/>
+          <p:cNvSpPr/>
+          <p:nvPr/>
+        </p:nvSpPr>
+        <p:spPr>
+          <a:xfrm>
+            <a:off x="6668262" y="4169664"/>
+            <a:ext cx="685800" cy="475488"/>
           </a:xfrm>
           <a:prstGeom prst="rect">
             <a:avLst>
-              <a:gd name="adj" fmla="val 9524"/>
+              <a:gd name="adj" fmla="val 7692"/>
             </a:avLst>
           </a:prstGeom>
           <a:solidFill>
@@ -28094,14 +28769,14 @@
       </p:sp>
       <p:sp>
         <p:nvSpPr>
-          <p:cNvPr id="44" name="Text 42"/>
-          <p:cNvSpPr/>
-          <p:nvPr/>
-        </p:nvSpPr>
-        <p:spPr>
-          <a:xfrm>
-            <a:off x="7447135" y="4169664"/>
-            <a:ext cx="685800" cy="384048"/>
+          <p:cNvPr id="54" name="Text 52"/>
+          <p:cNvSpPr/>
+          <p:nvPr/>
+        </p:nvSpPr>
+        <p:spPr>
+          <a:xfrm>
+            <a:off x="6668262" y="4169664"/>
+            <a:ext cx="685800" cy="475488"/>
           </a:xfrm>
           <a:prstGeom prst="rect">
             <a:avLst/>
@@ -28125,7 +28800,7 @@
                 <a:ea typeface="Trebuchet MS" pitchFamily="34" charset="-122"/>
                 <a:cs typeface="Trebuchet MS" pitchFamily="34" charset="-120"/>
               </a:rPr>
-              <a:t>ce</a:t>
+              <a:t>e</a:t>
             </a:r>
             <a:endParaRPr lang="en-US" sz="900" dirty="0"/>
           </a:p>
@@ -28133,40 +28808,67 @@
       </p:sp>
       <p:sp>
         <p:nvSpPr>
-          <p:cNvPr id="45" name="Text 43"/>
-          <p:cNvSpPr/>
-          <p:nvPr/>
-        </p:nvSpPr>
-        <p:spPr>
-          <a:xfrm>
-            <a:off x="7447135" y="4572000"/>
-            <a:ext cx="685800" cy="219456"/>
-          </a:xfrm>
-          <a:prstGeom prst="rect">
-            <a:avLst/>
-          </a:prstGeom>
-          <a:noFill/>
-          <a:ln/>
-        </p:spPr>
-        <p:txBody>
-          <a:bodyPr wrap="square" lIns="0" tIns="0" rIns="0" bIns="0" rtlCol="0" anchor="t"/>
-          <a:lstStyle/>
-          <a:p>
-            <a:pPr algn="ctr" indent="0" marL="0">
-              <a:buNone/>
-            </a:pPr>
-            <a:r>
-              <a:rPr lang="en-US" sz="750" i="1" dirty="0">
-                <a:solidFill>
-                  <a:srgbClr val="94A3B8"/>
-                </a:solidFill>
-                <a:latin typeface="Calibri" pitchFamily="34" charset="0"/>
-                <a:ea typeface="Calibri" pitchFamily="34" charset="-122"/>
-                <a:cs typeface="Calibri" pitchFamily="34" charset="-120"/>
-              </a:rPr>
-              <a:t>/s/</a:t>
-            </a:r>
-            <a:endParaRPr lang="en-US" sz="750" dirty="0"/>
+          <p:cNvPr id="55" name="Shape 53"/>
+          <p:cNvSpPr/>
+          <p:nvPr/>
+        </p:nvSpPr>
+        <p:spPr>
+          <a:xfrm>
+            <a:off x="7576947" y="4169664"/>
+            <a:ext cx="685800" cy="475488"/>
+          </a:xfrm>
+          <a:prstGeom prst="rect">
+            <a:avLst>
+              <a:gd name="adj" fmla="val 7692"/>
+            </a:avLst>
+          </a:prstGeom>
+          <a:solidFill>
+            <a:srgbClr val="FFFFFF"/>
+          </a:solidFill>
+          <a:ln w="12700">
+            <a:solidFill>
+              <a:srgbClr val="DB2777"/>
+            </a:solidFill>
+            <a:prstDash val="solid"/>
+          </a:ln>
+        </p:spPr>
+      </p:sp>
+      <p:sp>
+        <p:nvSpPr>
+          <p:cNvPr id="56" name="Text 54"/>
+          <p:cNvSpPr/>
+          <p:nvPr/>
+        </p:nvSpPr>
+        <p:spPr>
+          <a:xfrm>
+            <a:off x="7576947" y="4169664"/>
+            <a:ext cx="685800" cy="475488"/>
+          </a:xfrm>
+          <a:prstGeom prst="rect">
+            <a:avLst/>
+          </a:prstGeom>
+          <a:noFill/>
+          <a:ln/>
+        </p:spPr>
+        <p:txBody>
+          <a:bodyPr wrap="square" lIns="0" tIns="0" rIns="0" bIns="0" rtlCol="0" anchor="ctr"/>
+          <a:lstStyle/>
+          <a:p>
+            <a:pPr algn="ctr" indent="0" marL="0">
+              <a:buNone/>
+            </a:pPr>
+            <a:r>
+              <a:rPr lang="en-US" sz="900" b="1" dirty="0">
+                <a:solidFill>
+                  <a:srgbClr val="9D174D"/>
+                </a:solidFill>
+                <a:latin typeface="Trebuchet MS" pitchFamily="34" charset="0"/>
+                <a:ea typeface="Trebuchet MS" pitchFamily="34" charset="-122"/>
+                <a:cs typeface="Trebuchet MS" pitchFamily="34" charset="-120"/>
+              </a:rPr>
+              <a:t>d</a:t>
+            </a:r>
+            <a:endParaRPr lang="en-US" sz="900" dirty="0"/>
           </a:p>
         </p:txBody>
       </p:sp>
@@ -28456,7 +29158,7 @@
                 <a:ea typeface="Calibri" pitchFamily="34" charset="-122"/>
                 <a:cs typeface="Calibri" pitchFamily="34" charset="-120"/>
               </a:rPr>
-              <a:t>Word Labs  •  wordlabs.app  •  Prefix: 'em-' = put into, make</a:t>
+              <a:t>Word Labs  •  wordlabs.app  •  Prefix: 'em-' = put into, cause to be</a:t>
             </a:r>
             <a:endParaRPr lang="en-US" sz="800" dirty="0"/>
           </a:p>
@@ -28595,7 +29297,7 @@
                 <a:ea typeface="Trebuchet MS" pitchFamily="34" charset="-122"/>
                 <a:cs typeface="Trebuchet MS" pitchFamily="34" charset="-120"/>
               </a:rPr>
-              <a:t>empower</a:t>
+              <a:t>adventure</a:t>
             </a:r>
             <a:endParaRPr lang="en-US" sz="2800" dirty="0"/>
           </a:p>
@@ -29283,7 +29985,7 @@
                 <a:ea typeface="Calibri" pitchFamily="34" charset="-122"/>
                 <a:cs typeface="Calibri" pitchFamily="34" charset="-120"/>
               </a:rPr>
-              <a:t>Word Labs  •  wordlabs.app  •  Prefix: 'em-' = put into, make</a:t>
+              <a:t>Word Labs  •  wordlabs.app  •  Prefix: 'em-' = put into, cause to be</a:t>
             </a:r>
             <a:endParaRPr lang="en-US" sz="800" dirty="0"/>
           </a:p>
@@ -29422,7 +30124,7 @@
                 <a:ea typeface="Trebuchet MS" pitchFamily="34" charset="-122"/>
                 <a:cs typeface="Trebuchet MS" pitchFamily="34" charset="-120"/>
               </a:rPr>
-              <a:t>empower</a:t>
+              <a:t>adventure</a:t>
             </a:r>
             <a:endParaRPr lang="en-US" sz="2800" dirty="0"/>
           </a:p>
@@ -29502,7 +30204,7 @@
         </p:nvSpPr>
         <p:spPr>
           <a:xfrm>
-            <a:off x="2938272" y="2258568"/>
+            <a:off x="2221992" y="2258568"/>
             <a:ext cx="1828800" cy="292608"/>
           </a:xfrm>
           <a:prstGeom prst="rect">
@@ -29511,11 +30213,11 @@
             </a:avLst>
           </a:prstGeom>
           <a:solidFill>
-            <a:srgbClr val="CCFBF1"/>
+            <a:srgbClr val="DDD6FE"/>
           </a:solidFill>
           <a:ln w="19050">
             <a:solidFill>
-              <a:srgbClr val="0D9488"/>
+              <a:srgbClr val="7C3AED"/>
             </a:solidFill>
             <a:prstDash val="solid"/>
           </a:ln>
@@ -29536,7 +30238,7 @@
         </p:nvSpPr>
         <p:spPr>
           <a:xfrm>
-            <a:off x="2938272" y="2258568"/>
+            <a:off x="2221992" y="2258568"/>
             <a:ext cx="1828800" cy="292608"/>
           </a:xfrm>
           <a:prstGeom prst="rect">
@@ -29555,13 +30257,13 @@
             <a:r>
               <a:rPr lang="en-US" sz="1300" b="1" dirty="0">
                 <a:solidFill>
-                  <a:srgbClr val="0F766E"/>
+                  <a:srgbClr val="4C1D95"/>
                 </a:solidFill>
                 <a:latin typeface="Trebuchet MS" pitchFamily="34" charset="0"/>
                 <a:ea typeface="Trebuchet MS" pitchFamily="34" charset="-122"/>
                 <a:cs typeface="Trebuchet MS" pitchFamily="34" charset="-120"/>
               </a:rPr>
-              <a:t>em</a:t>
+              <a:t>ad</a:t>
             </a:r>
             <a:endParaRPr lang="en-US" sz="1300" dirty="0"/>
           </a:p>
@@ -29575,7 +30277,7 @@
         </p:nvSpPr>
         <p:spPr>
           <a:xfrm>
-            <a:off x="2938272" y="2569464"/>
+            <a:off x="2221992" y="2569464"/>
             <a:ext cx="1828800" cy="201168"/>
           </a:xfrm>
           <a:prstGeom prst="rect">
@@ -29600,7 +30302,7 @@
                 <a:ea typeface="Calibri" pitchFamily="34" charset="-122"/>
                 <a:cs typeface="Calibri" pitchFamily="34" charset="-120"/>
               </a:rPr>
-              <a:t>put into, make</a:t>
+              <a:t>to, towards</a:t>
             </a:r>
             <a:endParaRPr lang="en-US" sz="850" dirty="0"/>
           </a:p>
@@ -29614,7 +30316,7 @@
         </p:nvSpPr>
         <p:spPr>
           <a:xfrm>
-            <a:off x="5803392" y="2258568"/>
+            <a:off x="4370832" y="2258568"/>
             <a:ext cx="1828800" cy="292608"/>
           </a:xfrm>
           <a:prstGeom prst="rect">
@@ -29648,7 +30350,7 @@
         </p:nvSpPr>
         <p:spPr>
           <a:xfrm>
-            <a:off x="5803392" y="2258568"/>
+            <a:off x="4370832" y="2258568"/>
             <a:ext cx="1828800" cy="292608"/>
           </a:xfrm>
           <a:prstGeom prst="rect">
@@ -29673,7 +30375,7 @@
                 <a:ea typeface="Trebuchet MS" pitchFamily="34" charset="-122"/>
                 <a:cs typeface="Trebuchet MS" pitchFamily="34" charset="-120"/>
               </a:rPr>
-              <a:t>power</a:t>
+              <a:t>vent</a:t>
             </a:r>
             <a:endParaRPr lang="en-US" sz="1300" dirty="0"/>
           </a:p>
@@ -29687,7 +30389,7 @@
         </p:nvSpPr>
         <p:spPr>
           <a:xfrm>
-            <a:off x="5803392" y="2569464"/>
+            <a:off x="4370832" y="2569464"/>
             <a:ext cx="1828800" cy="201168"/>
           </a:xfrm>
           <a:prstGeom prst="rect">
@@ -29712,7 +30414,7 @@
                 <a:ea typeface="Calibri" pitchFamily="34" charset="-122"/>
                 <a:cs typeface="Calibri" pitchFamily="34" charset="-120"/>
               </a:rPr>
-              <a:t>strength, ability</a:t>
+              <a:t>come</a:t>
             </a:r>
             <a:endParaRPr lang="en-US" sz="850" dirty="0"/>
           </a:p>
@@ -29721,6 +30423,118 @@
       <p:sp>
         <p:nvSpPr>
           <p:cNvPr id="22" name="Shape 20"/>
+          <p:cNvSpPr/>
+          <p:nvPr/>
+        </p:nvSpPr>
+        <p:spPr>
+          <a:xfrm>
+            <a:off x="6519672" y="2258568"/>
+            <a:ext cx="1828800" cy="292608"/>
+          </a:xfrm>
+          <a:prstGeom prst="rect">
+            <a:avLst>
+              <a:gd name="adj" fmla="val 25000"/>
+            </a:avLst>
+          </a:prstGeom>
+          <a:solidFill>
+            <a:srgbClr val="FCE7F3"/>
+          </a:solidFill>
+          <a:ln w="19050">
+            <a:solidFill>
+              <a:srgbClr val="DB2777"/>
+            </a:solidFill>
+            <a:prstDash val="solid"/>
+          </a:ln>
+          <a:effectLst>
+            <a:outerShdw sx="100000" sy="100000" kx="0" ky="0" algn="bl" rotWithShape="0" blurRad="101600" dist="38100" dir="8100000">
+              <a:srgbClr val="000000">
+                <a:alpha val="12000"/>
+              </a:srgbClr>
+            </a:outerShdw>
+          </a:effectLst>
+        </p:spPr>
+      </p:sp>
+      <p:sp>
+        <p:nvSpPr>
+          <p:cNvPr id="23" name="Text 21"/>
+          <p:cNvSpPr/>
+          <p:nvPr/>
+        </p:nvSpPr>
+        <p:spPr>
+          <a:xfrm>
+            <a:off x="6519672" y="2258568"/>
+            <a:ext cx="1828800" cy="292608"/>
+          </a:xfrm>
+          <a:prstGeom prst="rect">
+            <a:avLst/>
+          </a:prstGeom>
+          <a:noFill/>
+          <a:ln/>
+        </p:spPr>
+        <p:txBody>
+          <a:bodyPr wrap="square" lIns="0" tIns="0" rIns="0" bIns="0" rtlCol="0" anchor="ctr"/>
+          <a:lstStyle/>
+          <a:p>
+            <a:pPr algn="ctr" indent="0" marL="0">
+              <a:buNone/>
+            </a:pPr>
+            <a:r>
+              <a:rPr lang="en-US" sz="1300" b="1" dirty="0">
+                <a:solidFill>
+                  <a:srgbClr val="9D174D"/>
+                </a:solidFill>
+                <a:latin typeface="Trebuchet MS" pitchFamily="34" charset="0"/>
+                <a:ea typeface="Trebuchet MS" pitchFamily="34" charset="-122"/>
+                <a:cs typeface="Trebuchet MS" pitchFamily="34" charset="-120"/>
+              </a:rPr>
+              <a:t>ure</a:t>
+            </a:r>
+            <a:endParaRPr lang="en-US" sz="1300" dirty="0"/>
+          </a:p>
+        </p:txBody>
+      </p:sp>
+      <p:sp>
+        <p:nvSpPr>
+          <p:cNvPr id="24" name="Text 22"/>
+          <p:cNvSpPr/>
+          <p:nvPr/>
+        </p:nvSpPr>
+        <p:spPr>
+          <a:xfrm>
+            <a:off x="6519672" y="2569464"/>
+            <a:ext cx="1828800" cy="201168"/>
+          </a:xfrm>
+          <a:prstGeom prst="rect">
+            <a:avLst/>
+          </a:prstGeom>
+          <a:noFill/>
+          <a:ln/>
+        </p:spPr>
+        <p:txBody>
+          <a:bodyPr wrap="square" lIns="0" tIns="0" rIns="0" bIns="0" rtlCol="0" anchor="t"/>
+          <a:lstStyle/>
+          <a:p>
+            <a:pPr algn="ctr" indent="0" marL="0">
+              <a:buNone/>
+            </a:pPr>
+            <a:r>
+              <a:rPr lang="en-US" sz="850" dirty="0">
+                <a:solidFill>
+                  <a:srgbClr val="475569"/>
+                </a:solidFill>
+                <a:latin typeface="Calibri" pitchFamily="34" charset="0"/>
+                <a:ea typeface="Calibri" pitchFamily="34" charset="-122"/>
+                <a:cs typeface="Calibri" pitchFamily="34" charset="-120"/>
+              </a:rPr>
+              <a:t>state or result of</a:t>
+            </a:r>
+            <a:endParaRPr lang="en-US" sz="850" dirty="0"/>
+          </a:p>
+        </p:txBody>
+      </p:sp>
+      <p:sp>
+        <p:nvSpPr>
+          <p:cNvPr id="25" name="Shape 23"/>
           <p:cNvSpPr/>
           <p:nvPr/>
         </p:nvSpPr>
@@ -29747,7 +30561,7 @@
       </p:sp>
       <p:sp>
         <p:nvSpPr>
-          <p:cNvPr id="23" name="Text 21"/>
+          <p:cNvPr id="26" name="Text 24"/>
           <p:cNvSpPr/>
           <p:nvPr/>
         </p:nvSpPr>
@@ -29786,7 +30600,7 @@
       </p:sp>
       <p:sp>
         <p:nvSpPr>
-          <p:cNvPr id="24" name="Shape 22"/>
+          <p:cNvPr id="27" name="Shape 25"/>
           <p:cNvSpPr/>
           <p:nvPr/>
         </p:nvSpPr>
@@ -29813,7 +30627,7 @@
       </p:sp>
       <p:sp>
         <p:nvSpPr>
-          <p:cNvPr id="25" name="Text 23"/>
+          <p:cNvPr id="28" name="Text 26"/>
           <p:cNvSpPr/>
           <p:nvPr/>
         </p:nvSpPr>
@@ -29852,7 +30666,7 @@
       </p:sp>
       <p:sp>
         <p:nvSpPr>
-          <p:cNvPr id="26" name="Shape 24"/>
+          <p:cNvPr id="29" name="Shape 27"/>
           <p:cNvSpPr/>
           <p:nvPr/>
         </p:nvSpPr>
@@ -29879,7 +30693,7 @@
       </p:sp>
       <p:sp>
         <p:nvSpPr>
-          <p:cNvPr id="27" name="Text 25"/>
+          <p:cNvPr id="30" name="Text 28"/>
           <p:cNvSpPr/>
           <p:nvPr/>
         </p:nvSpPr>
@@ -29918,7 +30732,7 @@
       </p:sp>
       <p:sp>
         <p:nvSpPr>
-          <p:cNvPr id="28" name="Shape 26"/>
+          <p:cNvPr id="31" name="Shape 29"/>
           <p:cNvSpPr/>
           <p:nvPr/>
         </p:nvSpPr>
@@ -29945,7 +30759,7 @@
       </p:sp>
       <p:sp>
         <p:nvSpPr>
-          <p:cNvPr id="29" name="Text 27"/>
+          <p:cNvPr id="32" name="Text 30"/>
           <p:cNvSpPr/>
           <p:nvPr/>
         </p:nvSpPr>
@@ -30268,7 +31082,7 @@
                 <a:ea typeface="Calibri" pitchFamily="34" charset="-122"/>
                 <a:cs typeface="Calibri" pitchFamily="34" charset="-120"/>
               </a:rPr>
-              <a:t>Word Labs  •  wordlabs.app  •  Prefix: 'em-' = put into, make</a:t>
+              <a:t>Word Labs  •  wordlabs.app  •  Prefix: 'em-' = put into, cause to be</a:t>
             </a:r>
             <a:endParaRPr lang="en-US" sz="800" dirty="0"/>
           </a:p>
@@ -30407,7 +31221,7 @@
                 <a:ea typeface="Trebuchet MS" pitchFamily="34" charset="-122"/>
                 <a:cs typeface="Trebuchet MS" pitchFamily="34" charset="-120"/>
               </a:rPr>
-              <a:t>empower</a:t>
+              <a:t>adventure</a:t>
             </a:r>
             <a:endParaRPr lang="en-US" sz="2800" dirty="0"/>
           </a:p>
@@ -30487,7 +31301,7 @@
         </p:nvSpPr>
         <p:spPr>
           <a:xfrm>
-            <a:off x="2938272" y="2258568"/>
+            <a:off x="2221992" y="2258568"/>
             <a:ext cx="1828800" cy="292608"/>
           </a:xfrm>
           <a:prstGeom prst="rect">
@@ -30496,11 +31310,11 @@
             </a:avLst>
           </a:prstGeom>
           <a:solidFill>
-            <a:srgbClr val="CCFBF1"/>
+            <a:srgbClr val="DDD6FE"/>
           </a:solidFill>
           <a:ln w="19050">
             <a:solidFill>
-              <a:srgbClr val="0D9488"/>
+              <a:srgbClr val="7C3AED"/>
             </a:solidFill>
             <a:prstDash val="solid"/>
           </a:ln>
@@ -30521,7 +31335,7 @@
         </p:nvSpPr>
         <p:spPr>
           <a:xfrm>
-            <a:off x="2938272" y="2258568"/>
+            <a:off x="2221992" y="2258568"/>
             <a:ext cx="1828800" cy="292608"/>
           </a:xfrm>
           <a:prstGeom prst="rect">
@@ -30540,13 +31354,13 @@
             <a:r>
               <a:rPr lang="en-US" sz="1300" b="1" dirty="0">
                 <a:solidFill>
-                  <a:srgbClr val="0F766E"/>
+                  <a:srgbClr val="4C1D95"/>
                 </a:solidFill>
                 <a:latin typeface="Trebuchet MS" pitchFamily="34" charset="0"/>
                 <a:ea typeface="Trebuchet MS" pitchFamily="34" charset="-122"/>
                 <a:cs typeface="Trebuchet MS" pitchFamily="34" charset="-120"/>
               </a:rPr>
-              <a:t>em</a:t>
+              <a:t>ad</a:t>
             </a:r>
             <a:endParaRPr lang="en-US" sz="1300" dirty="0"/>
           </a:p>
@@ -30560,7 +31374,7 @@
         </p:nvSpPr>
         <p:spPr>
           <a:xfrm>
-            <a:off x="2938272" y="2569464"/>
+            <a:off x="2221992" y="2569464"/>
             <a:ext cx="1828800" cy="201168"/>
           </a:xfrm>
           <a:prstGeom prst="rect">
@@ -30585,7 +31399,7 @@
                 <a:ea typeface="Calibri" pitchFamily="34" charset="-122"/>
                 <a:cs typeface="Calibri" pitchFamily="34" charset="-120"/>
               </a:rPr>
-              <a:t>put into, make</a:t>
+              <a:t>to, towards</a:t>
             </a:r>
             <a:endParaRPr lang="en-US" sz="850" dirty="0"/>
           </a:p>
@@ -30599,7 +31413,7 @@
         </p:nvSpPr>
         <p:spPr>
           <a:xfrm>
-            <a:off x="5803392" y="2258568"/>
+            <a:off x="4370832" y="2258568"/>
             <a:ext cx="1828800" cy="292608"/>
           </a:xfrm>
           <a:prstGeom prst="rect">
@@ -30633,7 +31447,7 @@
         </p:nvSpPr>
         <p:spPr>
           <a:xfrm>
-            <a:off x="5803392" y="2258568"/>
+            <a:off x="4370832" y="2258568"/>
             <a:ext cx="1828800" cy="292608"/>
           </a:xfrm>
           <a:prstGeom prst="rect">
@@ -30658,7 +31472,7 @@
                 <a:ea typeface="Trebuchet MS" pitchFamily="34" charset="-122"/>
                 <a:cs typeface="Trebuchet MS" pitchFamily="34" charset="-120"/>
               </a:rPr>
-              <a:t>power</a:t>
+              <a:t>vent</a:t>
             </a:r>
             <a:endParaRPr lang="en-US" sz="1300" dirty="0"/>
           </a:p>
@@ -30672,7 +31486,7 @@
         </p:nvSpPr>
         <p:spPr>
           <a:xfrm>
-            <a:off x="5803392" y="2569464"/>
+            <a:off x="4370832" y="2569464"/>
             <a:ext cx="1828800" cy="201168"/>
           </a:xfrm>
           <a:prstGeom prst="rect">
@@ -30697,7 +31511,7 @@
                 <a:ea typeface="Calibri" pitchFamily="34" charset="-122"/>
                 <a:cs typeface="Calibri" pitchFamily="34" charset="-120"/>
               </a:rPr>
-              <a:t>strength, ability</a:t>
+              <a:t>come</a:t>
             </a:r>
             <a:endParaRPr lang="en-US" sz="850" dirty="0"/>
           </a:p>
@@ -30706,6 +31520,118 @@
       <p:sp>
         <p:nvSpPr>
           <p:cNvPr id="22" name="Shape 20"/>
+          <p:cNvSpPr/>
+          <p:nvPr/>
+        </p:nvSpPr>
+        <p:spPr>
+          <a:xfrm>
+            <a:off x="6519672" y="2258568"/>
+            <a:ext cx="1828800" cy="292608"/>
+          </a:xfrm>
+          <a:prstGeom prst="rect">
+            <a:avLst>
+              <a:gd name="adj" fmla="val 25000"/>
+            </a:avLst>
+          </a:prstGeom>
+          <a:solidFill>
+            <a:srgbClr val="FCE7F3"/>
+          </a:solidFill>
+          <a:ln w="19050">
+            <a:solidFill>
+              <a:srgbClr val="DB2777"/>
+            </a:solidFill>
+            <a:prstDash val="solid"/>
+          </a:ln>
+          <a:effectLst>
+            <a:outerShdw sx="100000" sy="100000" kx="0" ky="0" algn="bl" rotWithShape="0" blurRad="101600" dist="38100" dir="8100000">
+              <a:srgbClr val="000000">
+                <a:alpha val="12000"/>
+              </a:srgbClr>
+            </a:outerShdw>
+          </a:effectLst>
+        </p:spPr>
+      </p:sp>
+      <p:sp>
+        <p:nvSpPr>
+          <p:cNvPr id="23" name="Text 21"/>
+          <p:cNvSpPr/>
+          <p:nvPr/>
+        </p:nvSpPr>
+        <p:spPr>
+          <a:xfrm>
+            <a:off x="6519672" y="2258568"/>
+            <a:ext cx="1828800" cy="292608"/>
+          </a:xfrm>
+          <a:prstGeom prst="rect">
+            <a:avLst/>
+          </a:prstGeom>
+          <a:noFill/>
+          <a:ln/>
+        </p:spPr>
+        <p:txBody>
+          <a:bodyPr wrap="square" lIns="0" tIns="0" rIns="0" bIns="0" rtlCol="0" anchor="ctr"/>
+          <a:lstStyle/>
+          <a:p>
+            <a:pPr algn="ctr" indent="0" marL="0">
+              <a:buNone/>
+            </a:pPr>
+            <a:r>
+              <a:rPr lang="en-US" sz="1300" b="1" dirty="0">
+                <a:solidFill>
+                  <a:srgbClr val="9D174D"/>
+                </a:solidFill>
+                <a:latin typeface="Trebuchet MS" pitchFamily="34" charset="0"/>
+                <a:ea typeface="Trebuchet MS" pitchFamily="34" charset="-122"/>
+                <a:cs typeface="Trebuchet MS" pitchFamily="34" charset="-120"/>
+              </a:rPr>
+              <a:t>ure</a:t>
+            </a:r>
+            <a:endParaRPr lang="en-US" sz="1300" dirty="0"/>
+          </a:p>
+        </p:txBody>
+      </p:sp>
+      <p:sp>
+        <p:nvSpPr>
+          <p:cNvPr id="24" name="Text 22"/>
+          <p:cNvSpPr/>
+          <p:nvPr/>
+        </p:nvSpPr>
+        <p:spPr>
+          <a:xfrm>
+            <a:off x="6519672" y="2569464"/>
+            <a:ext cx="1828800" cy="201168"/>
+          </a:xfrm>
+          <a:prstGeom prst="rect">
+            <a:avLst/>
+          </a:prstGeom>
+          <a:noFill/>
+          <a:ln/>
+        </p:spPr>
+        <p:txBody>
+          <a:bodyPr wrap="square" lIns="0" tIns="0" rIns="0" bIns="0" rtlCol="0" anchor="t"/>
+          <a:lstStyle/>
+          <a:p>
+            <a:pPr algn="ctr" indent="0" marL="0">
+              <a:buNone/>
+            </a:pPr>
+            <a:r>
+              <a:rPr lang="en-US" sz="850" dirty="0">
+                <a:solidFill>
+                  <a:srgbClr val="475569"/>
+                </a:solidFill>
+                <a:latin typeface="Calibri" pitchFamily="34" charset="0"/>
+                <a:ea typeface="Calibri" pitchFamily="34" charset="-122"/>
+                <a:cs typeface="Calibri" pitchFamily="34" charset="-120"/>
+              </a:rPr>
+              <a:t>state or result of</a:t>
+            </a:r>
+            <a:endParaRPr lang="en-US" sz="850" dirty="0"/>
+          </a:p>
+        </p:txBody>
+      </p:sp>
+      <p:sp>
+        <p:nvSpPr>
+          <p:cNvPr id="25" name="Shape 23"/>
           <p:cNvSpPr/>
           <p:nvPr/>
         </p:nvSpPr>
@@ -30732,7 +31658,7 @@
       </p:sp>
       <p:sp>
         <p:nvSpPr>
-          <p:cNvPr id="23" name="Text 21"/>
+          <p:cNvPr id="26" name="Text 24"/>
           <p:cNvSpPr/>
           <p:nvPr/>
         </p:nvSpPr>
@@ -30771,7 +31697,7 @@
       </p:sp>
       <p:sp>
         <p:nvSpPr>
-          <p:cNvPr id="24" name="Shape 22"/>
+          <p:cNvPr id="27" name="Shape 25"/>
           <p:cNvSpPr/>
           <p:nvPr/>
         </p:nvSpPr>
@@ -30798,7 +31724,7 @@
       </p:sp>
       <p:sp>
         <p:nvSpPr>
-          <p:cNvPr id="25" name="Shape 23"/>
+          <p:cNvPr id="28" name="Shape 26"/>
           <p:cNvSpPr/>
           <p:nvPr/>
         </p:nvSpPr>
@@ -30825,7 +31751,7 @@
       </p:sp>
       <p:sp>
         <p:nvSpPr>
-          <p:cNvPr id="26" name="Text 24"/>
+          <p:cNvPr id="29" name="Text 27"/>
           <p:cNvSpPr/>
           <p:nvPr/>
         </p:nvSpPr>
@@ -30856,7 +31782,7 @@
                 <a:ea typeface="Trebuchet MS" pitchFamily="34" charset="-122"/>
                 <a:cs typeface="Trebuchet MS" pitchFamily="34" charset="-120"/>
               </a:rPr>
-              <a:t>em</a:t>
+              <a:t>ad</a:t>
             </a:r>
             <a:endParaRPr lang="en-US" sz="1400" dirty="0"/>
           </a:p>
@@ -30864,7 +31790,7 @@
       </p:sp>
       <p:sp>
         <p:nvSpPr>
-          <p:cNvPr id="27" name="Text 25"/>
+          <p:cNvPr id="30" name="Text 28"/>
           <p:cNvSpPr/>
           <p:nvPr/>
         </p:nvSpPr>
@@ -30903,7 +31829,7 @@
       </p:sp>
       <p:sp>
         <p:nvSpPr>
-          <p:cNvPr id="28" name="Shape 26"/>
+          <p:cNvPr id="31" name="Shape 29"/>
           <p:cNvSpPr/>
           <p:nvPr/>
         </p:nvSpPr>
@@ -30930,7 +31856,7 @@
       </p:sp>
       <p:sp>
         <p:nvSpPr>
-          <p:cNvPr id="29" name="Text 27"/>
+          <p:cNvPr id="32" name="Text 30"/>
           <p:cNvSpPr/>
           <p:nvPr/>
         </p:nvSpPr>
@@ -30961,7 +31887,7 @@
                 <a:ea typeface="Trebuchet MS" pitchFamily="34" charset="-122"/>
                 <a:cs typeface="Trebuchet MS" pitchFamily="34" charset="-120"/>
               </a:rPr>
-              <a:t>pow</a:t>
+              <a:t>ven</a:t>
             </a:r>
             <a:endParaRPr lang="en-US" sz="1400" dirty="0"/>
           </a:p>
@@ -30969,7 +31895,7 @@
       </p:sp>
       <p:sp>
         <p:nvSpPr>
-          <p:cNvPr id="30" name="Text 28"/>
+          <p:cNvPr id="33" name="Text 31"/>
           <p:cNvSpPr/>
           <p:nvPr/>
         </p:nvSpPr>
@@ -31008,7 +31934,7 @@
       </p:sp>
       <p:sp>
         <p:nvSpPr>
-          <p:cNvPr id="31" name="Shape 29"/>
+          <p:cNvPr id="34" name="Shape 32"/>
           <p:cNvSpPr/>
           <p:nvPr/>
         </p:nvSpPr>
@@ -31035,7 +31961,7 @@
       </p:sp>
       <p:sp>
         <p:nvSpPr>
-          <p:cNvPr id="32" name="Text 30"/>
+          <p:cNvPr id="35" name="Text 33"/>
           <p:cNvSpPr/>
           <p:nvPr/>
         </p:nvSpPr>
@@ -31066,7 +31992,7 @@
                 <a:ea typeface="Trebuchet MS" pitchFamily="34" charset="-122"/>
                 <a:cs typeface="Trebuchet MS" pitchFamily="34" charset="-120"/>
               </a:rPr>
-              <a:t>er</a:t>
+              <a:t>ture</a:t>
             </a:r>
             <a:endParaRPr lang="en-US" sz="1400" dirty="0"/>
           </a:p>
@@ -31074,7 +32000,7 @@
       </p:sp>
       <p:sp>
         <p:nvSpPr>
-          <p:cNvPr id="33" name="Shape 31"/>
+          <p:cNvPr id="36" name="Shape 34"/>
           <p:cNvSpPr/>
           <p:nvPr/>
         </p:nvSpPr>
@@ -31101,7 +32027,7 @@
       </p:sp>
       <p:sp>
         <p:nvSpPr>
-          <p:cNvPr id="34" name="Text 32"/>
+          <p:cNvPr id="37" name="Text 35"/>
           <p:cNvSpPr/>
           <p:nvPr/>
         </p:nvSpPr>
@@ -31140,7 +32066,7 @@
       </p:sp>
       <p:sp>
         <p:nvSpPr>
-          <p:cNvPr id="35" name="Shape 33"/>
+          <p:cNvPr id="38" name="Shape 36"/>
           <p:cNvSpPr/>
           <p:nvPr/>
         </p:nvSpPr>
@@ -31167,7 +32093,7 @@
       </p:sp>
       <p:sp>
         <p:nvSpPr>
-          <p:cNvPr id="36" name="Text 34"/>
+          <p:cNvPr id="39" name="Text 37"/>
           <p:cNvSpPr/>
           <p:nvPr/>
         </p:nvSpPr>
@@ -31490,7 +32416,7 @@
                 <a:ea typeface="Calibri" pitchFamily="34" charset="-122"/>
                 <a:cs typeface="Calibri" pitchFamily="34" charset="-120"/>
               </a:rPr>
-              <a:t>Word Labs  •  wordlabs.app  •  Prefix: 'em-' = put into, make</a:t>
+              <a:t>Word Labs  •  wordlabs.app  •  Prefix: 'em-' = put into, cause to be</a:t>
             </a:r>
             <a:endParaRPr lang="en-US" sz="800" dirty="0"/>
           </a:p>
@@ -31629,7 +32555,7 @@
                 <a:ea typeface="Trebuchet MS" pitchFamily="34" charset="-122"/>
                 <a:cs typeface="Trebuchet MS" pitchFamily="34" charset="-120"/>
               </a:rPr>
-              <a:t>empower</a:t>
+              <a:t>adventure</a:t>
             </a:r>
             <a:endParaRPr lang="en-US" sz="2800" dirty="0"/>
           </a:p>
@@ -31709,7 +32635,7 @@
         </p:nvSpPr>
         <p:spPr>
           <a:xfrm>
-            <a:off x="2938272" y="2258568"/>
+            <a:off x="2221992" y="2258568"/>
             <a:ext cx="1828800" cy="292608"/>
           </a:xfrm>
           <a:prstGeom prst="rect">
@@ -31718,11 +32644,11 @@
             </a:avLst>
           </a:prstGeom>
           <a:solidFill>
-            <a:srgbClr val="CCFBF1"/>
+            <a:srgbClr val="DDD6FE"/>
           </a:solidFill>
           <a:ln w="19050">
             <a:solidFill>
-              <a:srgbClr val="0D9488"/>
+              <a:srgbClr val="7C3AED"/>
             </a:solidFill>
             <a:prstDash val="solid"/>
           </a:ln>
@@ -31743,7 +32669,7 @@
         </p:nvSpPr>
         <p:spPr>
           <a:xfrm>
-            <a:off x="2938272" y="2258568"/>
+            <a:off x="2221992" y="2258568"/>
             <a:ext cx="1828800" cy="292608"/>
           </a:xfrm>
           <a:prstGeom prst="rect">
@@ -31762,13 +32688,13 @@
             <a:r>
               <a:rPr lang="en-US" sz="1300" b="1" dirty="0">
                 <a:solidFill>
-                  <a:srgbClr val="0F766E"/>
+                  <a:srgbClr val="4C1D95"/>
                 </a:solidFill>
                 <a:latin typeface="Trebuchet MS" pitchFamily="34" charset="0"/>
                 <a:ea typeface="Trebuchet MS" pitchFamily="34" charset="-122"/>
                 <a:cs typeface="Trebuchet MS" pitchFamily="34" charset="-120"/>
               </a:rPr>
-              <a:t>em</a:t>
+              <a:t>ad</a:t>
             </a:r>
             <a:endParaRPr lang="en-US" sz="1300" dirty="0"/>
           </a:p>
@@ -31782,7 +32708,7 @@
         </p:nvSpPr>
         <p:spPr>
           <a:xfrm>
-            <a:off x="2938272" y="2569464"/>
+            <a:off x="2221992" y="2569464"/>
             <a:ext cx="1828800" cy="201168"/>
           </a:xfrm>
           <a:prstGeom prst="rect">
@@ -31807,7 +32733,7 @@
                 <a:ea typeface="Calibri" pitchFamily="34" charset="-122"/>
                 <a:cs typeface="Calibri" pitchFamily="34" charset="-120"/>
               </a:rPr>
-              <a:t>put into, make</a:t>
+              <a:t>to, towards</a:t>
             </a:r>
             <a:endParaRPr lang="en-US" sz="850" dirty="0"/>
           </a:p>
@@ -31821,7 +32747,7 @@
         </p:nvSpPr>
         <p:spPr>
           <a:xfrm>
-            <a:off x="5803392" y="2258568"/>
+            <a:off x="4370832" y="2258568"/>
             <a:ext cx="1828800" cy="292608"/>
           </a:xfrm>
           <a:prstGeom prst="rect">
@@ -31855,7 +32781,7 @@
         </p:nvSpPr>
         <p:spPr>
           <a:xfrm>
-            <a:off x="5803392" y="2258568"/>
+            <a:off x="4370832" y="2258568"/>
             <a:ext cx="1828800" cy="292608"/>
           </a:xfrm>
           <a:prstGeom prst="rect">
@@ -31880,7 +32806,7 @@
                 <a:ea typeface="Trebuchet MS" pitchFamily="34" charset="-122"/>
                 <a:cs typeface="Trebuchet MS" pitchFamily="34" charset="-120"/>
               </a:rPr>
-              <a:t>power</a:t>
+              <a:t>vent</a:t>
             </a:r>
             <a:endParaRPr lang="en-US" sz="1300" dirty="0"/>
           </a:p>
@@ -31894,7 +32820,7 @@
         </p:nvSpPr>
         <p:spPr>
           <a:xfrm>
-            <a:off x="5803392" y="2569464"/>
+            <a:off x="4370832" y="2569464"/>
             <a:ext cx="1828800" cy="201168"/>
           </a:xfrm>
           <a:prstGeom prst="rect">
@@ -31919,7 +32845,7 @@
                 <a:ea typeface="Calibri" pitchFamily="34" charset="-122"/>
                 <a:cs typeface="Calibri" pitchFamily="34" charset="-120"/>
               </a:rPr>
-              <a:t>strength, ability</a:t>
+              <a:t>come</a:t>
             </a:r>
             <a:endParaRPr lang="en-US" sz="850" dirty="0"/>
           </a:p>
@@ -31928,6 +32854,118 @@
       <p:sp>
         <p:nvSpPr>
           <p:cNvPr id="22" name="Shape 20"/>
+          <p:cNvSpPr/>
+          <p:nvPr/>
+        </p:nvSpPr>
+        <p:spPr>
+          <a:xfrm>
+            <a:off x="6519672" y="2258568"/>
+            <a:ext cx="1828800" cy="292608"/>
+          </a:xfrm>
+          <a:prstGeom prst="rect">
+            <a:avLst>
+              <a:gd name="adj" fmla="val 25000"/>
+            </a:avLst>
+          </a:prstGeom>
+          <a:solidFill>
+            <a:srgbClr val="FCE7F3"/>
+          </a:solidFill>
+          <a:ln w="19050">
+            <a:solidFill>
+              <a:srgbClr val="DB2777"/>
+            </a:solidFill>
+            <a:prstDash val="solid"/>
+          </a:ln>
+          <a:effectLst>
+            <a:outerShdw sx="100000" sy="100000" kx="0" ky="0" algn="bl" rotWithShape="0" blurRad="101600" dist="38100" dir="8100000">
+              <a:srgbClr val="000000">
+                <a:alpha val="12000"/>
+              </a:srgbClr>
+            </a:outerShdw>
+          </a:effectLst>
+        </p:spPr>
+      </p:sp>
+      <p:sp>
+        <p:nvSpPr>
+          <p:cNvPr id="23" name="Text 21"/>
+          <p:cNvSpPr/>
+          <p:nvPr/>
+        </p:nvSpPr>
+        <p:spPr>
+          <a:xfrm>
+            <a:off x="6519672" y="2258568"/>
+            <a:ext cx="1828800" cy="292608"/>
+          </a:xfrm>
+          <a:prstGeom prst="rect">
+            <a:avLst/>
+          </a:prstGeom>
+          <a:noFill/>
+          <a:ln/>
+        </p:spPr>
+        <p:txBody>
+          <a:bodyPr wrap="square" lIns="0" tIns="0" rIns="0" bIns="0" rtlCol="0" anchor="ctr"/>
+          <a:lstStyle/>
+          <a:p>
+            <a:pPr algn="ctr" indent="0" marL="0">
+              <a:buNone/>
+            </a:pPr>
+            <a:r>
+              <a:rPr lang="en-US" sz="1300" b="1" dirty="0">
+                <a:solidFill>
+                  <a:srgbClr val="9D174D"/>
+                </a:solidFill>
+                <a:latin typeface="Trebuchet MS" pitchFamily="34" charset="0"/>
+                <a:ea typeface="Trebuchet MS" pitchFamily="34" charset="-122"/>
+                <a:cs typeface="Trebuchet MS" pitchFamily="34" charset="-120"/>
+              </a:rPr>
+              <a:t>ure</a:t>
+            </a:r>
+            <a:endParaRPr lang="en-US" sz="1300" dirty="0"/>
+          </a:p>
+        </p:txBody>
+      </p:sp>
+      <p:sp>
+        <p:nvSpPr>
+          <p:cNvPr id="24" name="Text 22"/>
+          <p:cNvSpPr/>
+          <p:nvPr/>
+        </p:nvSpPr>
+        <p:spPr>
+          <a:xfrm>
+            <a:off x="6519672" y="2569464"/>
+            <a:ext cx="1828800" cy="201168"/>
+          </a:xfrm>
+          <a:prstGeom prst="rect">
+            <a:avLst/>
+          </a:prstGeom>
+          <a:noFill/>
+          <a:ln/>
+        </p:spPr>
+        <p:txBody>
+          <a:bodyPr wrap="square" lIns="0" tIns="0" rIns="0" bIns="0" rtlCol="0" anchor="t"/>
+          <a:lstStyle/>
+          <a:p>
+            <a:pPr algn="ctr" indent="0" marL="0">
+              <a:buNone/>
+            </a:pPr>
+            <a:r>
+              <a:rPr lang="en-US" sz="850" dirty="0">
+                <a:solidFill>
+                  <a:srgbClr val="475569"/>
+                </a:solidFill>
+                <a:latin typeface="Calibri" pitchFamily="34" charset="0"/>
+                <a:ea typeface="Calibri" pitchFamily="34" charset="-122"/>
+                <a:cs typeface="Calibri" pitchFamily="34" charset="-120"/>
+              </a:rPr>
+              <a:t>state or result of</a:t>
+            </a:r>
+            <a:endParaRPr lang="en-US" sz="850" dirty="0"/>
+          </a:p>
+        </p:txBody>
+      </p:sp>
+      <p:sp>
+        <p:nvSpPr>
+          <p:cNvPr id="25" name="Shape 23"/>
           <p:cNvSpPr/>
           <p:nvPr/>
         </p:nvSpPr>
@@ -31954,7 +32992,7 @@
       </p:sp>
       <p:sp>
         <p:nvSpPr>
-          <p:cNvPr id="23" name="Text 21"/>
+          <p:cNvPr id="26" name="Text 24"/>
           <p:cNvSpPr/>
           <p:nvPr/>
         </p:nvSpPr>
@@ -31993,7 +33031,7 @@
       </p:sp>
       <p:sp>
         <p:nvSpPr>
-          <p:cNvPr id="24" name="Shape 22"/>
+          <p:cNvPr id="27" name="Shape 25"/>
           <p:cNvSpPr/>
           <p:nvPr/>
         </p:nvSpPr>
@@ -32020,7 +33058,7 @@
       </p:sp>
       <p:sp>
         <p:nvSpPr>
-          <p:cNvPr id="25" name="Shape 23"/>
+          <p:cNvPr id="28" name="Shape 26"/>
           <p:cNvSpPr/>
           <p:nvPr/>
         </p:nvSpPr>
@@ -32047,7 +33085,7 @@
       </p:sp>
       <p:sp>
         <p:nvSpPr>
-          <p:cNvPr id="26" name="Text 24"/>
+          <p:cNvPr id="29" name="Text 27"/>
           <p:cNvSpPr/>
           <p:nvPr/>
         </p:nvSpPr>
@@ -32078,7 +33116,7 @@
                 <a:ea typeface="Trebuchet MS" pitchFamily="34" charset="-122"/>
                 <a:cs typeface="Trebuchet MS" pitchFamily="34" charset="-120"/>
               </a:rPr>
-              <a:t>em</a:t>
+              <a:t>ad</a:t>
             </a:r>
             <a:endParaRPr lang="en-US" sz="1400" dirty="0"/>
           </a:p>
@@ -32086,7 +33124,7 @@
       </p:sp>
       <p:sp>
         <p:nvSpPr>
-          <p:cNvPr id="27" name="Text 25"/>
+          <p:cNvPr id="30" name="Text 28"/>
           <p:cNvSpPr/>
           <p:nvPr/>
         </p:nvSpPr>
@@ -32125,7 +33163,7 @@
       </p:sp>
       <p:sp>
         <p:nvSpPr>
-          <p:cNvPr id="28" name="Shape 26"/>
+          <p:cNvPr id="31" name="Shape 29"/>
           <p:cNvSpPr/>
           <p:nvPr/>
         </p:nvSpPr>
@@ -32152,7 +33190,7 @@
       </p:sp>
       <p:sp>
         <p:nvSpPr>
-          <p:cNvPr id="29" name="Text 27"/>
+          <p:cNvPr id="32" name="Text 30"/>
           <p:cNvSpPr/>
           <p:nvPr/>
         </p:nvSpPr>
@@ -32183,7 +33221,7 @@
                 <a:ea typeface="Trebuchet MS" pitchFamily="34" charset="-122"/>
                 <a:cs typeface="Trebuchet MS" pitchFamily="34" charset="-120"/>
               </a:rPr>
-              <a:t>pow</a:t>
+              <a:t>ven</a:t>
             </a:r>
             <a:endParaRPr lang="en-US" sz="1400" dirty="0"/>
           </a:p>
@@ -32191,7 +33229,7 @@
       </p:sp>
       <p:sp>
         <p:nvSpPr>
-          <p:cNvPr id="30" name="Text 28"/>
+          <p:cNvPr id="33" name="Text 31"/>
           <p:cNvSpPr/>
           <p:nvPr/>
         </p:nvSpPr>
@@ -32230,7 +33268,7 @@
       </p:sp>
       <p:sp>
         <p:nvSpPr>
-          <p:cNvPr id="31" name="Shape 29"/>
+          <p:cNvPr id="34" name="Shape 32"/>
           <p:cNvSpPr/>
           <p:nvPr/>
         </p:nvSpPr>
@@ -32257,7 +33295,7 @@
       </p:sp>
       <p:sp>
         <p:nvSpPr>
-          <p:cNvPr id="32" name="Text 30"/>
+          <p:cNvPr id="35" name="Text 33"/>
           <p:cNvSpPr/>
           <p:nvPr/>
         </p:nvSpPr>
@@ -32288,7 +33326,7 @@
                 <a:ea typeface="Trebuchet MS" pitchFamily="34" charset="-122"/>
                 <a:cs typeface="Trebuchet MS" pitchFamily="34" charset="-120"/>
               </a:rPr>
-              <a:t>er</a:t>
+              <a:t>ture</a:t>
             </a:r>
             <a:endParaRPr lang="en-US" sz="1400" dirty="0"/>
           </a:p>
@@ -32296,7 +33334,7 @@
       </p:sp>
       <p:sp>
         <p:nvSpPr>
-          <p:cNvPr id="33" name="Shape 31"/>
+          <p:cNvPr id="36" name="Shape 34"/>
           <p:cNvSpPr/>
           <p:nvPr/>
         </p:nvSpPr>
@@ -32323,7 +33361,7 @@
       </p:sp>
       <p:sp>
         <p:nvSpPr>
-          <p:cNvPr id="34" name="Text 32"/>
+          <p:cNvPr id="37" name="Text 35"/>
           <p:cNvSpPr/>
           <p:nvPr/>
         </p:nvSpPr>
@@ -32362,7 +33400,7 @@
       </p:sp>
       <p:sp>
         <p:nvSpPr>
-          <p:cNvPr id="35" name="Shape 33"/>
+          <p:cNvPr id="38" name="Shape 36"/>
           <p:cNvSpPr/>
           <p:nvPr/>
         </p:nvSpPr>
@@ -32389,13 +33427,13 @@
       </p:sp>
       <p:sp>
         <p:nvSpPr>
-          <p:cNvPr id="36" name="Shape 34"/>
-          <p:cNvSpPr/>
-          <p:nvPr/>
-        </p:nvSpPr>
-        <p:spPr>
-          <a:xfrm>
-            <a:off x="2427732" y="4169664"/>
+          <p:cNvPr id="39" name="Shape 37"/>
+          <p:cNvSpPr/>
+          <p:nvPr/>
+        </p:nvSpPr>
+        <p:spPr>
+          <a:xfrm>
+            <a:off x="2124837" y="4169664"/>
             <a:ext cx="685800" cy="475488"/>
           </a:xfrm>
           <a:prstGeom prst="rect">
@@ -32416,13 +33454,13 @@
       </p:sp>
       <p:sp>
         <p:nvSpPr>
-          <p:cNvPr id="37" name="Text 35"/>
-          <p:cNvSpPr/>
-          <p:nvPr/>
-        </p:nvSpPr>
-        <p:spPr>
-          <a:xfrm>
-            <a:off x="2427732" y="4169664"/>
+          <p:cNvPr id="40" name="Text 38"/>
+          <p:cNvSpPr/>
+          <p:nvPr/>
+        </p:nvSpPr>
+        <p:spPr>
+          <a:xfrm>
+            <a:off x="2124837" y="4169664"/>
             <a:ext cx="685800" cy="475488"/>
           </a:xfrm>
           <a:prstGeom prst="rect">
@@ -32447,7 +33485,7 @@
                 <a:ea typeface="Trebuchet MS" pitchFamily="34" charset="-122"/>
                 <a:cs typeface="Trebuchet MS" pitchFamily="34" charset="-120"/>
               </a:rPr>
-              <a:t>e</a:t>
+              <a:t>a</a:t>
             </a:r>
             <a:endParaRPr lang="en-US" sz="900" dirty="0"/>
           </a:p>
@@ -32455,13 +33493,13 @@
       </p:sp>
       <p:sp>
         <p:nvSpPr>
-          <p:cNvPr id="38" name="Shape 36"/>
-          <p:cNvSpPr/>
-          <p:nvPr/>
-        </p:nvSpPr>
-        <p:spPr>
-          <a:xfrm>
-            <a:off x="3639312" y="4169664"/>
+          <p:cNvPr id="41" name="Shape 39"/>
+          <p:cNvSpPr/>
+          <p:nvPr/>
+        </p:nvSpPr>
+        <p:spPr>
+          <a:xfrm>
+            <a:off x="3033522" y="4169664"/>
             <a:ext cx="685800" cy="475488"/>
           </a:xfrm>
           <a:prstGeom prst="rect">
@@ -32482,13 +33520,13 @@
       </p:sp>
       <p:sp>
         <p:nvSpPr>
-          <p:cNvPr id="39" name="Text 37"/>
-          <p:cNvSpPr/>
-          <p:nvPr/>
-        </p:nvSpPr>
-        <p:spPr>
-          <a:xfrm>
-            <a:off x="3639312" y="4169664"/>
+          <p:cNvPr id="42" name="Text 40"/>
+          <p:cNvSpPr/>
+          <p:nvPr/>
+        </p:nvSpPr>
+        <p:spPr>
+          <a:xfrm>
+            <a:off x="3033522" y="4169664"/>
             <a:ext cx="685800" cy="475488"/>
           </a:xfrm>
           <a:prstGeom prst="rect">
@@ -32513,7 +33551,7 @@
                 <a:ea typeface="Trebuchet MS" pitchFamily="34" charset="-122"/>
                 <a:cs typeface="Trebuchet MS" pitchFamily="34" charset="-120"/>
               </a:rPr>
-              <a:t>m</a:t>
+              <a:t>d</a:t>
             </a:r>
             <a:endParaRPr lang="en-US" sz="900" dirty="0"/>
           </a:p>
@@ -32521,13 +33559,13 @@
       </p:sp>
       <p:sp>
         <p:nvSpPr>
-          <p:cNvPr id="40" name="Shape 38"/>
-          <p:cNvSpPr/>
-          <p:nvPr/>
-        </p:nvSpPr>
-        <p:spPr>
-          <a:xfrm>
-            <a:off x="4850892" y="4169664"/>
+          <p:cNvPr id="43" name="Shape 41"/>
+          <p:cNvSpPr/>
+          <p:nvPr/>
+        </p:nvSpPr>
+        <p:spPr>
+          <a:xfrm>
+            <a:off x="3942207" y="4169664"/>
             <a:ext cx="685800" cy="475488"/>
           </a:xfrm>
           <a:prstGeom prst="rect">
@@ -32548,13 +33586,13 @@
       </p:sp>
       <p:sp>
         <p:nvSpPr>
-          <p:cNvPr id="41" name="Text 39"/>
-          <p:cNvSpPr/>
-          <p:nvPr/>
-        </p:nvSpPr>
-        <p:spPr>
-          <a:xfrm>
-            <a:off x="4850892" y="4169664"/>
+          <p:cNvPr id="44" name="Text 42"/>
+          <p:cNvSpPr/>
+          <p:nvPr/>
+        </p:nvSpPr>
+        <p:spPr>
+          <a:xfrm>
+            <a:off x="3942207" y="4169664"/>
             <a:ext cx="685800" cy="475488"/>
           </a:xfrm>
           <a:prstGeom prst="rect">
@@ -32579,7 +33617,7 @@
                 <a:ea typeface="Trebuchet MS" pitchFamily="34" charset="-122"/>
                 <a:cs typeface="Trebuchet MS" pitchFamily="34" charset="-120"/>
               </a:rPr>
-              <a:t>p</a:t>
+              <a:t>v</a:t>
             </a:r>
             <a:endParaRPr lang="en-US" sz="900" dirty="0"/>
           </a:p>
@@ -32587,13 +33625,13 @@
       </p:sp>
       <p:sp>
         <p:nvSpPr>
-          <p:cNvPr id="42" name="Shape 40"/>
-          <p:cNvSpPr/>
-          <p:nvPr/>
-        </p:nvSpPr>
-        <p:spPr>
-          <a:xfrm>
-            <a:off x="6062472" y="4169664"/>
+          <p:cNvPr id="45" name="Shape 43"/>
+          <p:cNvSpPr/>
+          <p:nvPr/>
+        </p:nvSpPr>
+        <p:spPr>
+          <a:xfrm>
+            <a:off x="4850892" y="4169664"/>
             <a:ext cx="685800" cy="475488"/>
           </a:xfrm>
           <a:prstGeom prst="rect">
@@ -32614,13 +33652,13 @@
       </p:sp>
       <p:sp>
         <p:nvSpPr>
-          <p:cNvPr id="43" name="Text 41"/>
-          <p:cNvSpPr/>
-          <p:nvPr/>
-        </p:nvSpPr>
-        <p:spPr>
-          <a:xfrm>
-            <a:off x="6062472" y="4169664"/>
+          <p:cNvPr id="46" name="Text 44"/>
+          <p:cNvSpPr/>
+          <p:nvPr/>
+        </p:nvSpPr>
+        <p:spPr>
+          <a:xfrm>
+            <a:off x="4850892" y="4169664"/>
             <a:ext cx="685800" cy="475488"/>
           </a:xfrm>
           <a:prstGeom prst="rect">
@@ -32645,7 +33683,7 @@
                 <a:ea typeface="Trebuchet MS" pitchFamily="34" charset="-122"/>
                 <a:cs typeface="Trebuchet MS" pitchFamily="34" charset="-120"/>
               </a:rPr>
-              <a:t>ow</a:t>
+              <a:t>e</a:t>
             </a:r>
             <a:endParaRPr lang="en-US" sz="900" dirty="0"/>
           </a:p>
@@ -32653,13 +33691,13 @@
       </p:sp>
       <p:sp>
         <p:nvSpPr>
-          <p:cNvPr id="44" name="Shape 42"/>
-          <p:cNvSpPr/>
-          <p:nvPr/>
-        </p:nvSpPr>
-        <p:spPr>
-          <a:xfrm>
-            <a:off x="7274052" y="4169664"/>
+          <p:cNvPr id="47" name="Shape 45"/>
+          <p:cNvSpPr/>
+          <p:nvPr/>
+        </p:nvSpPr>
+        <p:spPr>
+          <a:xfrm>
+            <a:off x="5759577" y="4169664"/>
             <a:ext cx="685800" cy="475488"/>
           </a:xfrm>
           <a:prstGeom prst="rect">
@@ -32680,13 +33718,13 @@
       </p:sp>
       <p:sp>
         <p:nvSpPr>
-          <p:cNvPr id="45" name="Text 43"/>
-          <p:cNvSpPr/>
-          <p:nvPr/>
-        </p:nvSpPr>
-        <p:spPr>
-          <a:xfrm>
-            <a:off x="7274052" y="4169664"/>
+          <p:cNvPr id="48" name="Text 46"/>
+          <p:cNvSpPr/>
+          <p:nvPr/>
+        </p:nvSpPr>
+        <p:spPr>
+          <a:xfrm>
+            <a:off x="5759577" y="4169664"/>
             <a:ext cx="685800" cy="475488"/>
           </a:xfrm>
           <a:prstGeom prst="rect">
@@ -32711,7 +33749,139 @@
                 <a:ea typeface="Trebuchet MS" pitchFamily="34" charset="-122"/>
                 <a:cs typeface="Trebuchet MS" pitchFamily="34" charset="-120"/>
               </a:rPr>
-              <a:t>er</a:t>
+              <a:t>n</a:t>
+            </a:r>
+            <a:endParaRPr lang="en-US" sz="900" dirty="0"/>
+          </a:p>
+        </p:txBody>
+      </p:sp>
+      <p:sp>
+        <p:nvSpPr>
+          <p:cNvPr id="49" name="Shape 47"/>
+          <p:cNvSpPr/>
+          <p:nvPr/>
+        </p:nvSpPr>
+        <p:spPr>
+          <a:xfrm>
+            <a:off x="6668262" y="4169664"/>
+            <a:ext cx="685800" cy="475488"/>
+          </a:xfrm>
+          <a:prstGeom prst="rect">
+            <a:avLst>
+              <a:gd name="adj" fmla="val 7692"/>
+            </a:avLst>
+          </a:prstGeom>
+          <a:solidFill>
+            <a:srgbClr val="FFFFFF"/>
+          </a:solidFill>
+          <a:ln w="12700">
+            <a:solidFill>
+              <a:srgbClr val="DB2777"/>
+            </a:solidFill>
+            <a:prstDash val="solid"/>
+          </a:ln>
+        </p:spPr>
+      </p:sp>
+      <p:sp>
+        <p:nvSpPr>
+          <p:cNvPr id="50" name="Text 48"/>
+          <p:cNvSpPr/>
+          <p:nvPr/>
+        </p:nvSpPr>
+        <p:spPr>
+          <a:xfrm>
+            <a:off x="6668262" y="4169664"/>
+            <a:ext cx="685800" cy="475488"/>
+          </a:xfrm>
+          <a:prstGeom prst="rect">
+            <a:avLst/>
+          </a:prstGeom>
+          <a:noFill/>
+          <a:ln/>
+        </p:spPr>
+        <p:txBody>
+          <a:bodyPr wrap="square" lIns="0" tIns="0" rIns="0" bIns="0" rtlCol="0" anchor="ctr"/>
+          <a:lstStyle/>
+          <a:p>
+            <a:pPr algn="ctr" indent="0" marL="0">
+              <a:buNone/>
+            </a:pPr>
+            <a:r>
+              <a:rPr lang="en-US" sz="900" b="1" dirty="0">
+                <a:solidFill>
+                  <a:srgbClr val="9D174D"/>
+                </a:solidFill>
+                <a:latin typeface="Trebuchet MS" pitchFamily="34" charset="0"/>
+                <a:ea typeface="Trebuchet MS" pitchFamily="34" charset="-122"/>
+                <a:cs typeface="Trebuchet MS" pitchFamily="34" charset="-120"/>
+              </a:rPr>
+              <a:t>t</a:t>
+            </a:r>
+            <a:endParaRPr lang="en-US" sz="900" dirty="0"/>
+          </a:p>
+        </p:txBody>
+      </p:sp>
+      <p:sp>
+        <p:nvSpPr>
+          <p:cNvPr id="51" name="Shape 49"/>
+          <p:cNvSpPr/>
+          <p:nvPr/>
+        </p:nvSpPr>
+        <p:spPr>
+          <a:xfrm>
+            <a:off x="7576947" y="4169664"/>
+            <a:ext cx="685800" cy="475488"/>
+          </a:xfrm>
+          <a:prstGeom prst="rect">
+            <a:avLst>
+              <a:gd name="adj" fmla="val 7692"/>
+            </a:avLst>
+          </a:prstGeom>
+          <a:solidFill>
+            <a:srgbClr val="FFFFFF"/>
+          </a:solidFill>
+          <a:ln w="12700">
+            <a:solidFill>
+              <a:srgbClr val="DB2777"/>
+            </a:solidFill>
+            <a:prstDash val="solid"/>
+          </a:ln>
+        </p:spPr>
+      </p:sp>
+      <p:sp>
+        <p:nvSpPr>
+          <p:cNvPr id="52" name="Text 50"/>
+          <p:cNvSpPr/>
+          <p:nvPr/>
+        </p:nvSpPr>
+        <p:spPr>
+          <a:xfrm>
+            <a:off x="7576947" y="4169664"/>
+            <a:ext cx="685800" cy="475488"/>
+          </a:xfrm>
+          <a:prstGeom prst="rect">
+            <a:avLst/>
+          </a:prstGeom>
+          <a:noFill/>
+          <a:ln/>
+        </p:spPr>
+        <p:txBody>
+          <a:bodyPr wrap="square" lIns="0" tIns="0" rIns="0" bIns="0" rtlCol="0" anchor="ctr"/>
+          <a:lstStyle/>
+          <a:p>
+            <a:pPr algn="ctr" indent="0" marL="0">
+              <a:buNone/>
+            </a:pPr>
+            <a:r>
+              <a:rPr lang="en-US" sz="900" b="1" dirty="0">
+                <a:solidFill>
+                  <a:srgbClr val="9D174D"/>
+                </a:solidFill>
+                <a:latin typeface="Trebuchet MS" pitchFamily="34" charset="0"/>
+                <a:ea typeface="Trebuchet MS" pitchFamily="34" charset="-122"/>
+                <a:cs typeface="Trebuchet MS" pitchFamily="34" charset="-120"/>
+              </a:rPr>
+              <a:t>ure</a:t>
             </a:r>
             <a:endParaRPr lang="en-US" sz="900" dirty="0"/>
           </a:p>
@@ -33003,7 +34173,7 @@
                 <a:ea typeface="Calibri" pitchFamily="34" charset="-122"/>
                 <a:cs typeface="Calibri" pitchFamily="34" charset="-120"/>
               </a:rPr>
-              <a:t>Word Labs  •  wordlabs.app  •  Prefix: 'em-' = put into, make</a:t>
+              <a:t>Word Labs  •  wordlabs.app  •  Prefix: 'em-' = put into, cause to be</a:t>
             </a:r>
             <a:endParaRPr lang="en-US" sz="800" dirty="0"/>
           </a:p>
@@ -34172,7 +35342,7 @@
                 <a:ea typeface="Calibri" pitchFamily="34" charset="-122"/>
                 <a:cs typeface="Calibri" pitchFamily="34" charset="-120"/>
               </a:rPr>
-              <a:t>Word Labs  •  wordlabs.app  •  Prefix: 'em-' = put into, make</a:t>
+              <a:t>Word Labs  •  wordlabs.app  •  Prefix: 'em-' = put into, cause to be</a:t>
             </a:r>
             <a:endParaRPr lang="en-US" sz="800" dirty="0"/>
           </a:p>
@@ -35149,7 +36319,7 @@
                 <a:ea typeface="Trebuchet MS" pitchFamily="34" charset="-122"/>
                 <a:cs typeface="Trebuchet MS" pitchFamily="34" charset="-120"/>
               </a:rPr>
-              <a:t>bodi</a:t>
+              <a:t>body</a:t>
             </a:r>
             <a:endParaRPr lang="en-US" sz="1300" dirty="0"/>
           </a:p>
@@ -35780,7 +36950,7 @@
                 <a:ea typeface="Trebuchet MS" pitchFamily="34" charset="-122"/>
                 <a:cs typeface="Trebuchet MS" pitchFamily="34" charset="-120"/>
               </a:rPr>
-              <a:t>emphasise</a:t>
+              <a:t>enrich</a:t>
             </a:r>
             <a:endParaRPr lang="en-US" sz="1200" dirty="0"/>
           </a:p>
@@ -36072,7 +37242,7 @@
                 <a:ea typeface="Calibri" pitchFamily="34" charset="-122"/>
                 <a:cs typeface="Calibri" pitchFamily="34" charset="-120"/>
               </a:rPr>
-              <a:t>Word Labs  •  wordlabs.app  •  Prefix: 'em-' = put into, make</a:t>
+              <a:t>Word Labs  •  wordlabs.app  •  Prefix: 'em-' = put into, cause to be</a:t>
             </a:r>
             <a:endParaRPr lang="en-US" sz="800" dirty="0"/>
           </a:p>
@@ -36236,7 +37406,7 @@
                 <a:ea typeface="Calibri" pitchFamily="34" charset="-122"/>
                 <a:cs typeface="Calibri" pitchFamily="34" charset="-120"/>
               </a:rPr>
-              <a:t>A meaningful word part added to the beginning of a root to change its meaning. The prefix 'em-' means 'put into, make'.</a:t>
+              <a:t>A meaningful word part added to the beginning of a root to change its meaning. The prefix 'em-' means 'put into, cause to be'.</a:t>
             </a:r>
             <a:endParaRPr lang="en-US" sz="1350" dirty="0"/>
           </a:p>
@@ -36856,7 +38026,7 @@
                 <a:ea typeface="Calibri" pitchFamily="34" charset="-122"/>
                 <a:cs typeface="Calibri" pitchFamily="34" charset="-120"/>
               </a:rPr>
-              <a:t>Word Labs  •  wordlabs.app  •  Prefix: 'em-' = put into, make</a:t>
+              <a:t>Word Labs  •  wordlabs.app  •  Prefix: 'em-' = put into, cause to be</a:t>
             </a:r>
             <a:endParaRPr lang="en-US" sz="800" dirty="0"/>
           </a:p>
@@ -36968,7 +38138,7 @@
                 <a:ea typeface="Calibri" pitchFamily="34" charset="-122"/>
                 <a:cs typeface="Calibri" pitchFamily="34" charset="-120"/>
               </a:rPr>
-              <a:t>1.  The prefix 'em-' can mean 'put into' or 'make'.</a:t>
+              <a:t>1.  Adding 'em-' to a base word usually creates a verb.</a:t>
             </a:r>
             <a:endParaRPr lang="en-US" sz="1300" dirty="0"/>
           </a:p>
@@ -37107,7 +38277,7 @@
                 <a:ea typeface="Calibri" pitchFamily="34" charset="-122"/>
                 <a:cs typeface="Calibri" pitchFamily="34" charset="-120"/>
               </a:rPr>
-              <a:t>2.  The prefix 'em-' comes from a Chinese word.</a:t>
+              <a:t>2.  The prefix 'em-' always stays exactly the same spelling no matter what letter follows.</a:t>
             </a:r>
             <a:endParaRPr lang="en-US" sz="1300" dirty="0"/>
           </a:p>
@@ -37246,7 +38416,7 @@
                 <a:ea typeface="Calibri" pitchFamily="34" charset="-122"/>
                 <a:cs typeface="Calibri" pitchFamily="34" charset="-120"/>
               </a:rPr>
-              <a:t>3.  The word 'empower' uses the prefix 'em-' added to the base word 'power'.</a:t>
+              <a:t>3.  'Em-' comes from Latin and French origins.</a:t>
             </a:r>
             <a:endParaRPr lang="en-US" sz="1300" dirty="0"/>
           </a:p>
@@ -37385,7 +38555,7 @@
                 <a:ea typeface="Calibri" pitchFamily="34" charset="-122"/>
                 <a:cs typeface="Calibri" pitchFamily="34" charset="-120"/>
               </a:rPr>
-              <a:t>4.  Words starting with 'em-' always describe something happening underground.</a:t>
+              <a:t>4.  The word 'empty' contains the prefix 'em-' meaning 'put into'.</a:t>
             </a:r>
             <a:endParaRPr lang="en-US" sz="1300" dirty="0"/>
           </a:p>
@@ -37524,7 +38694,7 @@
                 <a:ea typeface="Calibri" pitchFamily="34" charset="-122"/>
                 <a:cs typeface="Calibri" pitchFamily="34" charset="-120"/>
               </a:rPr>
-              <a:t>5.  The prefix 'em-' is related to the prefix 'en-', both meaning 'put into' or 'make'.</a:t>
+              <a:t>5.  The prefix 'em-' can mean 'to put into' or 'to cause to be'.</a:t>
             </a:r>
             <a:endParaRPr lang="en-US" sz="1300" dirty="0"/>
           </a:p>
@@ -37882,7 +39052,7 @@
                 <a:ea typeface="Calibri" pitchFamily="34" charset="-122"/>
                 <a:cs typeface="Calibri" pitchFamily="34" charset="-120"/>
               </a:rPr>
-              <a:t>Word Labs  •  wordlabs.app  •  Prefix: 'em-' = put into, make</a:t>
+              <a:t>Word Labs  •  wordlabs.app  •  Prefix: 'em-' = put into, cause to be</a:t>
             </a:r>
             <a:endParaRPr lang="en-US" sz="800" dirty="0"/>
           </a:p>
@@ -38019,7 +39189,7 @@
                 <a:ea typeface="Trebuchet MS" pitchFamily="34" charset="-122"/>
                 <a:cs typeface="Trebuchet MS" pitchFamily="34" charset="-120"/>
               </a:rPr>
-              <a:t>put into, make</a:t>
+              <a:t>put into, cause to be</a:t>
             </a:r>
             <a:endParaRPr lang="en-US" sz="2000" dirty="0"/>
           </a:p>
@@ -38058,7 +39228,7 @@
                 <a:ea typeface="Calibri" pitchFamily="34" charset="-122"/>
                 <a:cs typeface="Calibri" pitchFamily="34" charset="-120"/>
               </a:rPr>
-              <a:t>Origin: Latin: in</a:t>
+              <a:t>Origin: Latin: im / French: em</a:t>
             </a:r>
             <a:endParaRPr lang="en-US" sz="1100" dirty="0"/>
           </a:p>
@@ -38851,7 +40021,7 @@
                 <a:ea typeface="Calibri" pitchFamily="34" charset="-122"/>
                 <a:cs typeface="Calibri" pitchFamily="34" charset="-120"/>
               </a:rPr>
-              <a:t>Word Labs  •  wordlabs.app  •  Prefix: 'em-' = put into, make</a:t>
+              <a:t>Word Labs  •  wordlabs.app  •  Prefix: 'em-' = put into, cause to be</a:t>
             </a:r>
             <a:endParaRPr lang="en-US" sz="800" dirty="0"/>
           </a:p>
@@ -39828,7 +40998,7 @@
                 <a:ea typeface="Trebuchet MS" pitchFamily="34" charset="-122"/>
                 <a:cs typeface="Trebuchet MS" pitchFamily="34" charset="-120"/>
               </a:rPr>
-              <a:t>bodi</a:t>
+              <a:t>body</a:t>
             </a:r>
             <a:endParaRPr lang="en-US" sz="1300" dirty="0"/>
           </a:p>
@@ -40625,7 +41795,7 @@
                 <a:ea typeface="Calibri" pitchFamily="34" charset="-122"/>
                 <a:cs typeface="Calibri" pitchFamily="34" charset="-120"/>
               </a:rPr>
-              <a:t>Word Labs  •  wordlabs.app  •  Prefix: 'em-' = put into, make</a:t>
+              <a:t>Word Labs  •  wordlabs.app  •  Prefix: 'em-' = put into, cause to be</a:t>
             </a:r>
             <a:endParaRPr lang="en-US" sz="800" dirty="0"/>
           </a:p>
@@ -40803,7 +41973,7 @@
                 <a:ea typeface="Calibri" pitchFamily="34" charset="-122"/>
                 <a:cs typeface="Calibri" pitchFamily="34" charset="-120"/>
               </a:rPr>
-              <a:t>To begin a journey or start something new and exciting.</a:t>
+              <a:t>To begin a journey or start something new.</a:t>
             </a:r>
             <a:endParaRPr lang="en-US" sz="1200" dirty="0"/>
           </a:p>
@@ -40942,7 +42112,7 @@
                 <a:ea typeface="Calibri" pitchFamily="34" charset="-122"/>
                 <a:cs typeface="Calibri" pitchFamily="34" charset="-120"/>
               </a:rPr>
-              <a:t>To give someone the strength or ability to do something important.</a:t>
+              <a:t>To give someone the strength or ability to do something.</a:t>
             </a:r>
             <a:endParaRPr lang="en-US" sz="1200" dirty="0"/>
           </a:p>
@@ -41081,7 +42251,7 @@
                 <a:ea typeface="Calibri" pitchFamily="34" charset="-122"/>
                 <a:cs typeface="Calibri" pitchFamily="34" charset="-120"/>
               </a:rPr>
-              <a:t>To give someone a job and pay them to work for you.</a:t>
+              <a:t>To give someone a job and pay them to work.</a:t>
             </a:r>
             <a:endParaRPr lang="en-US" sz="1200" dirty="0"/>
           </a:p>
@@ -41359,7 +42529,7 @@
                 <a:ea typeface="Calibri" pitchFamily="34" charset="-122"/>
                 <a:cs typeface="Calibri" pitchFamily="34" charset="-120"/>
               </a:rPr>
-              <a:t>To come out from somewhere, or to become known.</a:t>
+              <a:t>To come out from a hidden or enclosed place.</a:t>
             </a:r>
             <a:endParaRPr lang="en-US" sz="1200" dirty="0"/>
           </a:p>
@@ -41637,7 +42807,7 @@
                 <a:ea typeface="Calibri" pitchFamily="34" charset="-122"/>
                 <a:cs typeface="Calibri" pitchFamily="34" charset="-120"/>
               </a:rPr>
-              <a:t>To hug someone, or to accept something willingly.</a:t>
+              <a:t>To hold someone in your arms, or to accept something willingly.</a:t>
             </a:r>
             <a:endParaRPr lang="en-US" sz="1200" dirty="0"/>
           </a:p>
@@ -41929,7 +43099,7 @@
                 <a:ea typeface="Calibri" pitchFamily="34" charset="-122"/>
                 <a:cs typeface="Calibri" pitchFamily="34" charset="-120"/>
               </a:rPr>
-              <a:t>Word Labs  •  wordlabs.app  •  Prefix: 'em-' = put into, make</a:t>
+              <a:t>Word Labs  •  wordlabs.app  •  Prefix: 'em-' = put into, cause to be</a:t>
             </a:r>
             <a:endParaRPr lang="en-US" sz="800" dirty="0"/>
           </a:p>
@@ -42132,7 +43302,7 @@
                 <a:ea typeface="Calibri" pitchFamily="34" charset="-122"/>
                 <a:cs typeface="Calibri" pitchFamily="34" charset="-120"/>
               </a:rPr>
-              <a:t>The coach tried to empower every student to believe in their own abilities.</a:t>
+              <a:t>The teacher worked hard to empower her students to believe in themselves.</a:t>
             </a:r>
             <a:endParaRPr lang="en-US" sz="1500" dirty="0"/>
           </a:p>
@@ -42296,7 +43466,7 @@
                 <a:ea typeface="Calibri" pitchFamily="34" charset="-122"/>
                 <a:cs typeface="Calibri" pitchFamily="34" charset="-120"/>
               </a:rPr>
-              <a:t>She watched a butterfly emerge slowly from its chrysalis in the garden.</a:t>
+              <a:t>He decided to embark on a new adventure by joining the school science club.</a:t>
             </a:r>
             <a:endParaRPr lang="en-US" sz="1500" dirty="0"/>
           </a:p>
@@ -42460,7 +43630,7 @@
                 <a:ea typeface="Calibri" pitchFamily="34" charset="-122"/>
                 <a:cs typeface="Calibri" pitchFamily="34" charset="-120"/>
               </a:rPr>
-              <a:t>The teacher asked us to emphasise the most important words in our sentences.</a:t>
+              <a:t>The artist tried to embody the feeling of happiness in her colourful painting.</a:t>
             </a:r>
             <a:endParaRPr lang="en-US" sz="1500" dirty="0"/>
           </a:p>
